--- a/SLOPE_progress.pptx
+++ b/SLOPE_progress.pptx
@@ -3590,12 +3590,12 @@
         <p:spPr>
           <a:xfrm>
             <a:off x="838200" y="1825625"/>
-            <a:ext cx="4443101" cy="4351338"/>
+            <a:ext cx="7878510" cy="4351338"/>
           </a:xfrm>
         </p:spPr>
         <p:txBody>
           <a:bodyPr>
-            <a:normAutofit fontScale="92500"/>
+            <a:normAutofit/>
           </a:bodyPr>
           <a:lstStyle/>
           <a:p>
@@ -3646,7 +3646,7 @@
 </file>
 
 <file path=ppt/slides/slide4.xml><?xml version="1.0" encoding="utf-8"?>
-<p:sld xmlns:a="http://schemas.openxmlformats.org/drawingml/2006/main" xmlns:r="http://schemas.openxmlformats.org/officeDocument/2006/relationships" xmlns:p="http://schemas.openxmlformats.org/presentationml/2006/main">
+<p:sld xmlns:a="http://schemas.openxmlformats.org/drawingml/2006/main" xmlns:r="http://schemas.openxmlformats.org/officeDocument/2006/relationships" xmlns:p="http://schemas.openxmlformats.org/presentationml/2006/main" show="0">
   <p:cSld>
     <p:spTree>
       <p:nvGrpSpPr>
@@ -4713,7 +4713,13 @@
             <a:avLst/>
           </a:prstGeom>
           <a:noFill/>
-          <a:ln w="57150"/>
+          <a:ln w="57150">
+            <a:solidFill>
+              <a:schemeClr val="accent4">
+                <a:lumMod val="75000"/>
+              </a:schemeClr>
+            </a:solidFill>
+          </a:ln>
         </p:spPr>
         <p:style>
           <a:lnRef idx="2">
@@ -4761,7 +4767,13 @@
             <a:avLst/>
           </a:prstGeom>
           <a:noFill/>
-          <a:ln w="57150"/>
+          <a:ln w="57150">
+            <a:solidFill>
+              <a:schemeClr val="accent4">
+                <a:lumMod val="75000"/>
+              </a:schemeClr>
+            </a:solidFill>
+          </a:ln>
         </p:spPr>
         <p:style>
           <a:lnRef idx="2">
@@ -4809,7 +4821,13 @@
             <a:avLst/>
           </a:prstGeom>
           <a:noFill/>
-          <a:ln w="57150"/>
+          <a:ln w="57150">
+            <a:solidFill>
+              <a:schemeClr val="accent4">
+                <a:lumMod val="75000"/>
+              </a:schemeClr>
+            </a:solidFill>
+          </a:ln>
         </p:spPr>
         <p:style>
           <a:lnRef idx="2">
@@ -4857,7 +4875,13 @@
             <a:avLst/>
           </a:prstGeom>
           <a:noFill/>
-          <a:ln w="57150"/>
+          <a:ln w="57150">
+            <a:solidFill>
+              <a:schemeClr val="accent4">
+                <a:lumMod val="75000"/>
+              </a:schemeClr>
+            </a:solidFill>
+          </a:ln>
         </p:spPr>
         <p:style>
           <a:lnRef idx="2">
@@ -5199,8 +5223,8 @@
         </p:nvSpPr>
         <p:spPr>
           <a:xfrm>
-            <a:off x="4058063" y="5718202"/>
-            <a:ext cx="3346877" cy="1200329"/>
+            <a:off x="4058063" y="5834228"/>
+            <a:ext cx="3346877" cy="923330"/>
           </a:xfrm>
           <a:prstGeom prst="rect">
             <a:avLst/>
@@ -5215,23 +5239,7 @@
           <a:p>
             <a:r>
               <a:rPr lang="en-US" dirty="0"/>
-              <a:t>This is always run </a:t>
-            </a:r>
-            <a:r>
-              <a:rPr lang="en-US" dirty="0" err="1"/>
-              <a:t>rn</a:t>
-            </a:r>
-            <a:r>
-              <a:rPr lang="en-US" dirty="0"/>
-              <a:t>, therefore comparing </a:t>
-            </a:r>
-            <a:r>
-              <a:rPr lang="en-US" dirty="0" err="1"/>
-              <a:t>nFolds</a:t>
-            </a:r>
-            <a:r>
-              <a:rPr lang="en-US" dirty="0"/>
-              <a:t> means you’re confounding with the effect of selected HPs</a:t>
+              <a:t>This is always run when you don’t specify all the default tunings to *not* tune</a:t>
             </a:r>
           </a:p>
         </p:txBody>
@@ -5271,6 +5279,50 @@
           </a:p>
         </p:txBody>
       </p:sp>
+      <p:cxnSp>
+        <p:nvCxnSpPr>
+          <p:cNvPr id="48" name="Straight Arrow Connector 47">
+            <a:extLst>
+              <a:ext uri="{FF2B5EF4-FFF2-40B4-BE49-F238E27FC236}">
+                <a16:creationId xmlns:a16="http://schemas.microsoft.com/office/drawing/2014/main" id="{0B46EAA4-2911-2D15-DC14-10E6111CBA24}"/>
+              </a:ext>
+            </a:extLst>
+          </p:cNvPr>
+          <p:cNvCxnSpPr>
+            <a:cxnSpLocks/>
+          </p:cNvCxnSpPr>
+          <p:nvPr/>
+        </p:nvCxnSpPr>
+        <p:spPr>
+          <a:xfrm flipV="1">
+            <a:off x="7229742" y="6295893"/>
+            <a:ext cx="1880074" cy="823"/>
+          </a:xfrm>
+          <a:prstGeom prst="straightConnector1">
+            <a:avLst/>
+          </a:prstGeom>
+          <a:ln w="76200">
+            <a:solidFill>
+              <a:schemeClr val="tx1"/>
+            </a:solidFill>
+            <a:tailEnd type="triangle"/>
+          </a:ln>
+        </p:spPr>
+        <p:style>
+          <a:lnRef idx="1">
+            <a:schemeClr val="accent1"/>
+          </a:lnRef>
+          <a:fillRef idx="0">
+            <a:schemeClr val="accent1"/>
+          </a:fillRef>
+          <a:effectRef idx="0">
+            <a:schemeClr val="accent1"/>
+          </a:effectRef>
+          <a:fontRef idx="minor">
+            <a:schemeClr val="tx1"/>
+          </a:fontRef>
+        </p:style>
+      </p:cxnSp>
     </p:spTree>
     <p:extLst>
       <p:ext uri="{BB962C8B-B14F-4D97-AF65-F5344CB8AC3E}">
@@ -5285,7 +5337,7 @@
 </file>
 
 <file path=ppt/slides/slide5.xml><?xml version="1.0" encoding="utf-8"?>
-<p:sld xmlns:a="http://schemas.openxmlformats.org/drawingml/2006/main" xmlns:r="http://schemas.openxmlformats.org/officeDocument/2006/relationships" xmlns:p="http://schemas.openxmlformats.org/presentationml/2006/main">
+<p:sld xmlns:a="http://schemas.openxmlformats.org/drawingml/2006/main" xmlns:r="http://schemas.openxmlformats.org/officeDocument/2006/relationships" xmlns:p="http://schemas.openxmlformats.org/presentationml/2006/main" show="0">
   <p:cSld>
     <p:spTree>
       <p:nvGrpSpPr>
@@ -5969,7 +6021,13 @@
             <a:avLst/>
           </a:prstGeom>
           <a:noFill/>
-          <a:ln w="57150"/>
+          <a:ln w="57150">
+            <a:solidFill>
+              <a:schemeClr val="accent4">
+                <a:lumMod val="75000"/>
+              </a:schemeClr>
+            </a:solidFill>
+          </a:ln>
         </p:spPr>
         <p:style>
           <a:lnRef idx="2">
@@ -6017,7 +6075,13 @@
             <a:avLst/>
           </a:prstGeom>
           <a:noFill/>
-          <a:ln w="57150"/>
+          <a:ln w="57150">
+            <a:solidFill>
+              <a:schemeClr val="accent4">
+                <a:lumMod val="75000"/>
+              </a:schemeClr>
+            </a:solidFill>
+          </a:ln>
         </p:spPr>
         <p:style>
           <a:lnRef idx="2">
@@ -6065,7 +6129,13 @@
             <a:avLst/>
           </a:prstGeom>
           <a:noFill/>
-          <a:ln w="57150"/>
+          <a:ln w="57150">
+            <a:solidFill>
+              <a:schemeClr val="accent4">
+                <a:lumMod val="75000"/>
+              </a:schemeClr>
+            </a:solidFill>
+          </a:ln>
         </p:spPr>
         <p:style>
           <a:lnRef idx="2">
@@ -6293,7 +6363,13 @@
             <a:avLst/>
           </a:prstGeom>
           <a:noFill/>
-          <a:ln w="57150"/>
+          <a:ln w="57150">
+            <a:solidFill>
+              <a:schemeClr val="accent4">
+                <a:lumMod val="75000"/>
+              </a:schemeClr>
+            </a:solidFill>
+          </a:ln>
         </p:spPr>
         <p:style>
           <a:lnRef idx="2">
@@ -6764,8 +6840,8 @@
         </p:nvSpPr>
         <p:spPr>
           <a:xfrm>
-            <a:off x="145990" y="3041571"/>
-            <a:ext cx="8169067" cy="4124206"/>
+            <a:off x="145991" y="3503044"/>
+            <a:ext cx="6297539" cy="3662541"/>
           </a:xfrm>
           <a:prstGeom prst="rect">
             <a:avLst/>
@@ -6779,7 +6855,7 @@
           <a:lstStyle/>
           <a:p>
             <a:r>
-              <a:rPr lang="en-US" sz="2400" dirty="0"/>
+              <a:rPr lang="en-US" dirty="0"/>
               <a:t>User friendly</a:t>
             </a:r>
           </a:p>
@@ -6789,7 +6865,7 @@
               <a:buChar char="•"/>
             </a:pPr>
             <a:r>
-              <a:rPr lang="en-US" sz="2000" dirty="0"/>
+              <a:rPr lang="en-US" sz="1600" dirty="0"/>
               <a:t>Populate help button</a:t>
             </a:r>
           </a:p>
@@ -6799,7 +6875,7 @@
               <a:buChar char="•"/>
             </a:pPr>
             <a:r>
-              <a:rPr lang="en-US" sz="2000" dirty="0"/>
+              <a:rPr lang="en-US" sz="1600" dirty="0"/>
               <a:t>Completion criteria so “Done” only appears when done by panel, tab</a:t>
             </a:r>
           </a:p>
@@ -6809,7 +6885,7 @@
               <a:buChar char="•"/>
             </a:pPr>
             <a:r>
-              <a:rPr lang="en-US" sz="2000" dirty="0">
+              <a:rPr lang="en-US" sz="1600" dirty="0">
                 <a:effectLst/>
                 <a:latin typeface=".AppleSystemUIFontMonospaced"/>
               </a:rPr>
@@ -6822,7 +6898,7 @@
               <a:buChar char="•"/>
             </a:pPr>
             <a:r>
-              <a:rPr lang="en-US" sz="2000" dirty="0">
+              <a:rPr lang="en-US" sz="1600" dirty="0">
                 <a:effectLst/>
                 <a:latin typeface=".AppleSystemUIFontMonospaced"/>
               </a:rPr>
@@ -6835,7 +6911,7 @@
               <a:buChar char="•"/>
             </a:pPr>
             <a:r>
-              <a:rPr lang="en-US" sz="2000" dirty="0">
+              <a:rPr lang="en-US" sz="1600" dirty="0">
                 <a:effectLst/>
                 <a:latin typeface=".AppleSystemUIFontMonospaced"/>
               </a:rPr>
@@ -6848,7 +6924,7 @@
               <a:buChar char="•"/>
             </a:pPr>
             <a:r>
-              <a:rPr lang="en-US" sz="2000" dirty="0">
+              <a:rPr lang="en-US" sz="1600" dirty="0">
                 <a:latin typeface=".AppleSystemUIFontMonospaced"/>
               </a:rPr>
               <a:t>Time estimates for model if long</a:t>
@@ -6860,10 +6936,10 @@
               <a:buChar char="•"/>
             </a:pPr>
             <a:r>
-              <a:rPr lang="en-US" sz="2000" dirty="0">
+              <a:rPr lang="en-US" sz="1600" dirty="0">
                 <a:latin typeface=".AppleSystemUIFontMonospaced"/>
               </a:rPr>
-              <a:t>K-means plots – get more hover info, most contributing biomolecules</a:t>
+              <a:t>K-means plots – get more hover info, most contributing PCA biomolecules</a:t>
             </a:r>
           </a:p>
           <a:p>
@@ -6872,7 +6948,7 @@
               <a:buChar char="•"/>
             </a:pPr>
             <a:r>
-              <a:rPr lang="en-US" sz="2000" dirty="0">
+              <a:rPr lang="en-US" sz="1600" dirty="0">
                 <a:latin typeface=".AppleSystemUIFontMonospaced"/>
               </a:rPr>
               <a:t>More tool tips</a:t>
@@ -6884,7 +6960,7 @@
               <a:buChar char="•"/>
             </a:pPr>
             <a:r>
-              <a:rPr lang="en-US" sz="2000" dirty="0">
+              <a:rPr lang="en-US" sz="1600" dirty="0">
                 <a:latin typeface=".AppleSystemUIFontMonospaced"/>
               </a:rPr>
               <a:t>Progress pages</a:t>
@@ -6896,7 +6972,7 @@
               <a:buChar char="•"/>
             </a:pPr>
             <a:r>
-              <a:rPr lang="en-US" sz="2000" dirty="0">
+              <a:rPr lang="en-US" sz="1600" dirty="0">
                 <a:latin typeface=".AppleSystemUIFontMonospaced"/>
               </a:rPr>
               <a:t>Require missingness handling where needed</a:t>
@@ -7042,8 +7118,8 @@
         </p:nvSpPr>
         <p:spPr>
           <a:xfrm>
-            <a:off x="8315057" y="3596080"/>
-            <a:ext cx="3608461" cy="3170099"/>
+            <a:off x="6598065" y="2211086"/>
+            <a:ext cx="5529127" cy="4555093"/>
           </a:xfrm>
           <a:prstGeom prst="rect">
             <a:avLst/>
@@ -7137,6 +7213,59 @@
             </a:r>
           </a:p>
           <a:p>
+            <a:pPr marL="742950" lvl="1" indent="-285750">
+              <a:buFont typeface="Arial" panose="020B0604020202020204" pitchFamily="34" charset="0"/>
+              <a:buChar char="•"/>
+            </a:pPr>
+            <a:r>
+              <a:rPr lang="en-US" dirty="0"/>
+              <a:t>RVs with a level for models in case users </a:t>
+            </a:r>
+            <a:r>
+              <a:rPr lang="en-US" dirty="0" err="1"/>
+              <a:t>wanna</a:t>
+            </a:r>
+            <a:r>
+              <a:rPr lang="en-US" dirty="0"/>
+              <a:t> go back</a:t>
+            </a:r>
+          </a:p>
+          <a:p>
+            <a:pPr marL="1200150" lvl="2" indent="-285750">
+              <a:buFont typeface="Arial" panose="020B0604020202020204" pitchFamily="34" charset="0"/>
+              <a:buChar char="•"/>
+            </a:pPr>
+            <a:r>
+              <a:rPr lang="en-US" dirty="0"/>
+              <a:t>For advanced users, allow different models for different hp tunings</a:t>
+            </a:r>
+          </a:p>
+          <a:p>
+            <a:pPr marL="742950" lvl="1" indent="-285750">
+              <a:buFont typeface="Arial" panose="020B0604020202020204" pitchFamily="34" charset="0"/>
+              <a:buChar char="•"/>
+            </a:pPr>
+            <a:r>
+              <a:rPr lang="en-US" dirty="0"/>
+              <a:t>Cap the number of new models users can do</a:t>
+            </a:r>
+          </a:p>
+          <a:p>
+            <a:pPr marL="742950" lvl="1" indent="-285750">
+              <a:buFont typeface="Arial" panose="020B0604020202020204" pitchFamily="34" charset="0"/>
+              <a:buChar char="•"/>
+            </a:pPr>
+            <a:r>
+              <a:rPr lang="en-US" dirty="0"/>
+              <a:t>Or save and return to </a:t>
+            </a:r>
+            <a:r>
+              <a:rPr lang="en-US" dirty="0" err="1"/>
+              <a:t>expert_mentor</a:t>
+            </a:r>
+            <a:endParaRPr lang="en-US" dirty="0"/>
+          </a:p>
+          <a:p>
             <a:pPr marL="285750" indent="-285750">
               <a:buFont typeface="Arial" panose="020B0604020202020204" pitchFamily="34" charset="0"/>
               <a:buChar char="•"/>
@@ -7144,6 +7273,24 @@
             <a:r>
               <a:rPr lang="en-US" dirty="0"/>
               <a:t>New normalization</a:t>
+            </a:r>
+          </a:p>
+          <a:p>
+            <a:pPr marL="285750" indent="-285750">
+              <a:buFont typeface="Arial" panose="020B0604020202020204" pitchFamily="34" charset="0"/>
+              <a:buChar char="•"/>
+            </a:pPr>
+            <a:r>
+              <a:rPr lang="en-US" dirty="0"/>
+              <a:t>Add </a:t>
+            </a:r>
+            <a:r>
+              <a:rPr lang="en-US" dirty="0" err="1"/>
+              <a:t>spls</a:t>
+            </a:r>
+            <a:r>
+              <a:rPr lang="en-US" dirty="0"/>
+              <a:t> da</a:t>
             </a:r>
           </a:p>
         </p:txBody>
@@ -7280,7 +7427,7 @@
         <p:spPr/>
         <p:txBody>
           <a:bodyPr>
-            <a:normAutofit fontScale="92500"/>
+            <a:normAutofit fontScale="92500" lnSpcReduction="10000"/>
           </a:bodyPr>
           <a:lstStyle/>
           <a:p>
@@ -7387,6 +7534,13 @@
             <a:r>
               <a:rPr lang="en-US" dirty="0"/>
               <a:t> results – the fix above should address it</a:t>
+            </a:r>
+          </a:p>
+          <a:p>
+            <a:pPr lvl="1"/>
+            <a:r>
+              <a:rPr lang="en-US" dirty="0"/>
+              <a:t>Put up an issue</a:t>
             </a:r>
           </a:p>
           <a:p>

--- a/SLOPE_progress.pptx
+++ b/SLOPE_progress.pptx
@@ -111,6 +111,11 @@
       </a:defRPr>
     </a:lvl9pPr>
   </p:defaultTextStyle>
+  <p:extLst>
+    <p:ext uri="{EFAFB233-063F-42B5-8137-9DF3F51BA10A}">
+      <p15:sldGuideLst xmlns:p15="http://schemas.microsoft.com/office/powerpoint/2012/main"/>
+    </p:ext>
+  </p:extLst>
 </p:presentation>
 </file>
 
@@ -261,7 +266,7 @@
           <a:p>
             <a:fld id="{D8E254F4-E692-8547-ACD7-35D341663ABD}" type="datetimeFigureOut">
               <a:rPr lang="en-US" smtClean="0"/>
-              <a:t>2/20/24</a:t>
+              <a:t>2/27/24</a:t>
             </a:fld>
             <a:endParaRPr lang="en-US"/>
           </a:p>
@@ -459,7 +464,7 @@
           <a:p>
             <a:fld id="{D8E254F4-E692-8547-ACD7-35D341663ABD}" type="datetimeFigureOut">
               <a:rPr lang="en-US" smtClean="0"/>
-              <a:t>2/20/24</a:t>
+              <a:t>2/27/24</a:t>
             </a:fld>
             <a:endParaRPr lang="en-US"/>
           </a:p>
@@ -667,7 +672,7 @@
           <a:p>
             <a:fld id="{D8E254F4-E692-8547-ACD7-35D341663ABD}" type="datetimeFigureOut">
               <a:rPr lang="en-US" smtClean="0"/>
-              <a:t>2/20/24</a:t>
+              <a:t>2/27/24</a:t>
             </a:fld>
             <a:endParaRPr lang="en-US"/>
           </a:p>
@@ -865,7 +870,7 @@
           <a:p>
             <a:fld id="{D8E254F4-E692-8547-ACD7-35D341663ABD}" type="datetimeFigureOut">
               <a:rPr lang="en-US" smtClean="0"/>
-              <a:t>2/20/24</a:t>
+              <a:t>2/27/24</a:t>
             </a:fld>
             <a:endParaRPr lang="en-US"/>
           </a:p>
@@ -1140,7 +1145,7 @@
           <a:p>
             <a:fld id="{D8E254F4-E692-8547-ACD7-35D341663ABD}" type="datetimeFigureOut">
               <a:rPr lang="en-US" smtClean="0"/>
-              <a:t>2/20/24</a:t>
+              <a:t>2/27/24</a:t>
             </a:fld>
             <a:endParaRPr lang="en-US"/>
           </a:p>
@@ -1405,7 +1410,7 @@
           <a:p>
             <a:fld id="{D8E254F4-E692-8547-ACD7-35D341663ABD}" type="datetimeFigureOut">
               <a:rPr lang="en-US" smtClean="0"/>
-              <a:t>2/20/24</a:t>
+              <a:t>2/27/24</a:t>
             </a:fld>
             <a:endParaRPr lang="en-US"/>
           </a:p>
@@ -1817,7 +1822,7 @@
           <a:p>
             <a:fld id="{D8E254F4-E692-8547-ACD7-35D341663ABD}" type="datetimeFigureOut">
               <a:rPr lang="en-US" smtClean="0"/>
-              <a:t>2/20/24</a:t>
+              <a:t>2/27/24</a:t>
             </a:fld>
             <a:endParaRPr lang="en-US"/>
           </a:p>
@@ -1958,7 +1963,7 @@
           <a:p>
             <a:fld id="{D8E254F4-E692-8547-ACD7-35D341663ABD}" type="datetimeFigureOut">
               <a:rPr lang="en-US" smtClean="0"/>
-              <a:t>2/20/24</a:t>
+              <a:t>2/27/24</a:t>
             </a:fld>
             <a:endParaRPr lang="en-US"/>
           </a:p>
@@ -2071,7 +2076,7 @@
           <a:p>
             <a:fld id="{D8E254F4-E692-8547-ACD7-35D341663ABD}" type="datetimeFigureOut">
               <a:rPr lang="en-US" smtClean="0"/>
-              <a:t>2/20/24</a:t>
+              <a:t>2/27/24</a:t>
             </a:fld>
             <a:endParaRPr lang="en-US"/>
           </a:p>
@@ -2382,7 +2387,7 @@
           <a:p>
             <a:fld id="{D8E254F4-E692-8547-ACD7-35D341663ABD}" type="datetimeFigureOut">
               <a:rPr lang="en-US" smtClean="0"/>
-              <a:t>2/20/24</a:t>
+              <a:t>2/27/24</a:t>
             </a:fld>
             <a:endParaRPr lang="en-US"/>
           </a:p>
@@ -2670,7 +2675,7 @@
           <a:p>
             <a:fld id="{D8E254F4-E692-8547-ACD7-35D341663ABD}" type="datetimeFigureOut">
               <a:rPr lang="en-US" smtClean="0"/>
-              <a:t>2/20/24</a:t>
+              <a:t>2/27/24</a:t>
             </a:fld>
             <a:endParaRPr lang="en-US"/>
           </a:p>
@@ -2911,7 +2916,7 @@
           <a:p>
             <a:fld id="{D8E254F4-E692-8547-ACD7-35D341663ABD}" type="datetimeFigureOut">
               <a:rPr lang="en-US" smtClean="0"/>
-              <a:t>2/20/24</a:t>
+              <a:t>2/27/24</a:t>
             </a:fld>
             <a:endParaRPr lang="en-US"/>
           </a:p>
@@ -3379,7 +3384,7 @@
           <a:p>
             <a:r>
               <a:rPr lang="en-US" dirty="0"/>
-              <a:t>20Feb2024</a:t>
+              <a:t>27Feb2024</a:t>
             </a:r>
           </a:p>
         </p:txBody>
@@ -3437,7 +3442,7 @@
           <a:p>
             <a:r>
               <a:rPr lang="en-US" dirty="0"/>
-              <a:t>Backend fun</a:t>
+              <a:t>Backend fun – Dan and Clayton tasks</a:t>
             </a:r>
           </a:p>
         </p:txBody>
@@ -3472,7 +3477,7 @@
             <a:pPr lvl="1"/>
             <a:r>
               <a:rPr lang="en-US" dirty="0"/>
-              <a:t>Others?</a:t>
+              <a:t>SPLS-DA</a:t>
             </a:r>
           </a:p>
           <a:p>
@@ -3487,21 +3492,7 @@
           <a:p>
             <a:r>
               <a:rPr lang="en-US" dirty="0"/>
-              <a:t>Generalize for regression response</a:t>
-            </a:r>
-          </a:p>
-          <a:p>
-            <a:r>
-              <a:rPr lang="en-US" dirty="0"/>
-              <a:t>Revisit the CV, hyperparameter, </a:t>
-            </a:r>
-            <a:r>
-              <a:rPr lang="en-US" dirty="0" err="1"/>
-              <a:t>sup_model</a:t>
-            </a:r>
-            <a:r>
-              <a:rPr lang="en-US" dirty="0"/>
-              <a:t> discussion</a:t>
+              <a:t>Some day: Generalize for regression response</a:t>
             </a:r>
           </a:p>
         </p:txBody>
@@ -3566,7 +3557,7 @@
           <a:p>
             <a:r>
               <a:rPr lang="en-US" dirty="0"/>
-              <a:t>Requested backend changes from RR</a:t>
+              <a:t>Backend requests from RR</a:t>
             </a:r>
           </a:p>
         </p:txBody>
@@ -3589,19 +3580,34 @@
         </p:nvSpPr>
         <p:spPr>
           <a:xfrm>
-            <a:off x="838200" y="1825625"/>
-            <a:ext cx="7878510" cy="4351338"/>
+            <a:off x="838199" y="1470025"/>
+            <a:ext cx="8932333" cy="5022850"/>
           </a:xfrm>
         </p:spPr>
         <p:txBody>
           <a:bodyPr>
-            <a:normAutofit/>
+            <a:normAutofit fontScale="85000" lnSpcReduction="20000"/>
           </a:bodyPr>
           <a:lstStyle/>
           <a:p>
             <a:r>
               <a:rPr lang="en-US" dirty="0"/>
-              <a:t>Update the supervised methods for better isolation</a:t>
+              <a:t>More subfunctions for better task isolation/access </a:t>
+            </a:r>
+          </a:p>
+          <a:p>
+            <a:pPr lvl="1"/>
+            <a:r>
+              <a:rPr lang="en-US" dirty="0"/>
+              <a:t>e.g., can’t call tuning results </a:t>
+            </a:r>
+            <a:r>
+              <a:rPr lang="en-US" dirty="0" err="1"/>
+              <a:t>rn</a:t>
+            </a:r>
+            <a:r>
+              <a:rPr lang="en-US" dirty="0"/>
+              <a:t> from supervised</a:t>
             </a:r>
           </a:p>
           <a:p>
@@ -3627,8 +3633,60 @@
             </a:r>
             <a:r>
               <a:rPr lang="en-US" dirty="0"/>
-              <a:t> = 0</a:t>
-            </a:r>
+              <a:t> = 0 (no holdout)</a:t>
+            </a:r>
+          </a:p>
+          <a:p>
+            <a:pPr lvl="1"/>
+            <a:r>
+              <a:rPr lang="en-US" dirty="0"/>
+              <a:t>Appears to be fixed, double check if new results are </a:t>
+            </a:r>
+            <a:r>
+              <a:rPr lang="en-US"/>
+              <a:t>from means across </a:t>
+            </a:r>
+            <a:r>
+              <a:rPr lang="en-US" dirty="0"/>
+              <a:t>cross validation?  </a:t>
+            </a:r>
+          </a:p>
+          <a:p>
+            <a:r>
+              <a:rPr lang="en-US" dirty="0"/>
+              <a:t>Update to variable importance and normal fit – can’t get  a reduced model in </a:t>
+            </a:r>
+            <a:r>
+              <a:rPr lang="en-US" dirty="0" err="1"/>
+              <a:t>variable_importance</a:t>
+            </a:r>
+            <a:r>
+              <a:rPr lang="en-US" dirty="0"/>
+              <a:t>, can’t get variable importance in fit() – can’t we make one function where variable importance is always returned and reduction is an option?</a:t>
+            </a:r>
+          </a:p>
+          <a:p>
+            <a:r>
+              <a:rPr lang="en-US" dirty="0"/>
+              <a:t>Add argument for seed for consistent fun</a:t>
+            </a:r>
+          </a:p>
+          <a:p>
+            <a:r>
+              <a:rPr lang="en-US" dirty="0"/>
+              <a:t>Recommendation function for unsupervised </a:t>
+            </a:r>
+            <a:r>
+              <a:rPr lang="en-US" dirty="0" err="1"/>
+              <a:t>nclust</a:t>
+            </a:r>
+            <a:endParaRPr lang="en-US" dirty="0"/>
+          </a:p>
+          <a:p>
+            <a:pPr marL="0" indent="0">
+              <a:buNone/>
+            </a:pPr>
+            <a:endParaRPr lang="en-US" dirty="0"/>
           </a:p>
         </p:txBody>
       </p:sp>
@@ -6755,7 +6813,7 @@
         </p:spPr>
         <p:txBody>
           <a:bodyPr>
-            <a:normAutofit fontScale="70000" lnSpcReduction="20000"/>
+            <a:normAutofit fontScale="77500" lnSpcReduction="20000"/>
           </a:bodyPr>
           <a:lstStyle/>
           <a:p>
@@ -6786,12 +6844,6 @@
             <a:r>
               <a:rPr lang="en-US" dirty="0"/>
               <a:t> run-through</a:t>
-            </a:r>
-          </a:p>
-          <a:p>
-            <a:r>
-              <a:rPr lang="en-US" dirty="0"/>
-              <a:t>Unsupervised run through</a:t>
             </a:r>
           </a:p>
           <a:p>
@@ -6840,7 +6892,7 @@
         </p:nvSpPr>
         <p:spPr>
           <a:xfrm>
-            <a:off x="145991" y="3503044"/>
+            <a:off x="145991" y="3126081"/>
             <a:ext cx="6297539" cy="3662541"/>
           </a:xfrm>
           <a:prstGeom prst="rect">
@@ -6927,7 +6979,7 @@
               <a:rPr lang="en-US" sz="1600" dirty="0">
                 <a:latin typeface=".AppleSystemUIFontMonospaced"/>
               </a:rPr>
-              <a:t>Time estimates for model if long</a:t>
+              <a:t>Time estimates for model if long &lt;- backburner</a:t>
             </a:r>
           </a:p>
           <a:p>
@@ -7008,8 +7060,8 @@
         </p:nvSpPr>
         <p:spPr>
           <a:xfrm>
-            <a:off x="6990460" y="91821"/>
-            <a:ext cx="5264210" cy="2062103"/>
+            <a:off x="5335471" y="39605"/>
+            <a:ext cx="5939609" cy="2062103"/>
           </a:xfrm>
           <a:prstGeom prst="rect">
             <a:avLst/>
@@ -7037,7 +7089,7 @@
                 <a:effectLst/>
                 <a:latin typeface=".AppleSystemUIFontMonospaced"/>
               </a:rPr>
-              <a:t>Normalization – remove error options where all data is complete</a:t>
+              <a:t>Normalization – remove error options where all data is complete or other weirdness</a:t>
             </a:r>
           </a:p>
           <a:p>
@@ -7049,7 +7101,19 @@
               <a:rPr lang="en-US" dirty="0">
                 <a:latin typeface=".AppleSystemUIFontMonospaced"/>
               </a:rPr>
-              <a:t>Logic for holdout needs to change</a:t>
+              <a:t>Skip variable specifications if no f-data or </a:t>
+            </a:r>
+            <a:r>
+              <a:rPr lang="en-US" dirty="0" err="1">
+                <a:latin typeface=".AppleSystemUIFontMonospaced"/>
+              </a:rPr>
+              <a:t>e_meta</a:t>
+            </a:r>
+            <a:r>
+              <a:rPr lang="en-US" dirty="0">
+                <a:latin typeface=".AppleSystemUIFontMonospaced"/>
+              </a:rPr>
+              <a:t>?</a:t>
             </a:r>
           </a:p>
           <a:p>
@@ -7062,7 +7126,7 @@
                 <a:effectLst/>
                 <a:latin typeface=".AppleSystemUIFontMonospaced"/>
               </a:rPr>
-              <a:t>	update to facet plots</a:t>
+              <a:t>Expert mentor table overflow</a:t>
             </a:r>
           </a:p>
           <a:p>
@@ -7071,22 +7135,16 @@
               <a:buChar char="•"/>
             </a:pPr>
             <a:r>
+              <a:rPr lang="en-US" dirty="0" err="1">
+                <a:effectLst/>
+              </a:rPr>
+              <a:t>Hclust</a:t>
+            </a:r>
+            <a:r>
               <a:rPr lang="en-US" dirty="0">
-                <a:latin typeface=".AppleSystemUIFontMonospaced"/>
+                <a:effectLst/>
               </a:rPr>
-              <a:t>Skip variable specifications if no f-data or </a:t>
-            </a:r>
-            <a:r>
-              <a:rPr lang="en-US" dirty="0" err="1">
-                <a:latin typeface=".AppleSystemUIFontMonospaced"/>
-              </a:rPr>
-              <a:t>e_meta</a:t>
-            </a:r>
-            <a:r>
-              <a:rPr lang="en-US" dirty="0">
-                <a:latin typeface=".AppleSystemUIFontMonospaced"/>
-              </a:rPr>
-              <a:t>?</a:t>
+              <a:t> line color</a:t>
             </a:r>
           </a:p>
           <a:p>
@@ -7095,12 +7153,12 @@
               <a:buChar char="•"/>
             </a:pPr>
             <a:r>
-              <a:rPr lang="en-US" dirty="0">
-                <a:effectLst/>
-                <a:latin typeface=".AppleSystemUIFontMonospaced"/>
-              </a:rPr>
-              <a:t>Expert mentor table can be wonky</a:t>
-            </a:r>
+              <a:rPr lang="en-US" dirty="0"/>
+              <a:t>Double check defaults for all model hp settings</a:t>
+            </a:r>
+            <a:endParaRPr lang="en-US" dirty="0">
+              <a:effectLst/>
+            </a:endParaRPr>
           </a:p>
         </p:txBody>
       </p:sp>
@@ -7118,8 +7176,8 @@
         </p:nvSpPr>
         <p:spPr>
           <a:xfrm>
-            <a:off x="6598065" y="2211086"/>
-            <a:ext cx="5529127" cy="4555093"/>
+            <a:off x="6443530" y="2682242"/>
+            <a:ext cx="5529127" cy="4001095"/>
           </a:xfrm>
           <a:prstGeom prst="rect">
             <a:avLst/>
@@ -7154,8 +7212,23 @@
             </a:pPr>
             <a:r>
               <a:rPr lang="en-US" dirty="0"/>
-              <a:t>Variable importance</a:t>
-            </a:r>
+              <a:t>Peptide rollup</a:t>
+            </a:r>
+          </a:p>
+          <a:p>
+            <a:pPr marL="285750" indent="-285750">
+              <a:buFont typeface="Arial" panose="020B0604020202020204" pitchFamily="34" charset="0"/>
+              <a:buChar char="•"/>
+            </a:pPr>
+            <a:r>
+              <a:rPr lang="en-US" dirty="0"/>
+              <a:t>Recommendation function for </a:t>
+            </a:r>
+            <a:r>
+              <a:rPr lang="en-US" dirty="0" err="1"/>
+              <a:t>nclust</a:t>
+            </a:r>
+            <a:endParaRPr lang="en-US" dirty="0"/>
           </a:p>
           <a:p>
             <a:pPr marL="742950" lvl="1" indent="-285750">
@@ -7164,7 +7237,7 @@
             </a:pPr>
             <a:r>
               <a:rPr lang="en-US" dirty="0"/>
-              <a:t>Scaling?</a:t>
+              <a:t>Move samples/biomolecules to other tab?</a:t>
             </a:r>
           </a:p>
           <a:p>
@@ -7174,8 +7247,61 @@
             </a:pPr>
             <a:r>
               <a:rPr lang="en-US" dirty="0"/>
-              <a:t>Fold evaluation </a:t>
-            </a:r>
+              <a:t>Downloads</a:t>
+            </a:r>
+          </a:p>
+          <a:p>
+            <a:pPr marL="742950" lvl="1" indent="-285750">
+              <a:buFont typeface="Arial" panose="020B0604020202020204" pitchFamily="34" charset="0"/>
+              <a:buChar char="•"/>
+            </a:pPr>
+            <a:r>
+              <a:rPr lang="en-US" dirty="0"/>
+              <a:t>RVs with a level for models in case users </a:t>
+            </a:r>
+            <a:r>
+              <a:rPr lang="en-US" dirty="0" err="1"/>
+              <a:t>wanna</a:t>
+            </a:r>
+            <a:r>
+              <a:rPr lang="en-US" dirty="0"/>
+              <a:t> go back</a:t>
+            </a:r>
+          </a:p>
+          <a:p>
+            <a:pPr marL="1200150" lvl="2" indent="-285750">
+              <a:buFont typeface="Arial" panose="020B0604020202020204" pitchFamily="34" charset="0"/>
+              <a:buChar char="•"/>
+            </a:pPr>
+            <a:r>
+              <a:rPr lang="en-US" dirty="0"/>
+              <a:t>For advanced users, allow different models for different hp tunings</a:t>
+            </a:r>
+          </a:p>
+          <a:p>
+            <a:pPr marL="742950" lvl="1" indent="-285750">
+              <a:buFont typeface="Arial" panose="020B0604020202020204" pitchFamily="34" charset="0"/>
+              <a:buChar char="•"/>
+            </a:pPr>
+            <a:r>
+              <a:rPr lang="en-US" dirty="0"/>
+              <a:t>Cap the number of new models users can do</a:t>
+            </a:r>
+          </a:p>
+          <a:p>
+            <a:pPr marL="742950" lvl="1" indent="-285750">
+              <a:buFont typeface="Arial" panose="020B0604020202020204" pitchFamily="34" charset="0"/>
+              <a:buChar char="•"/>
+            </a:pPr>
+            <a:r>
+              <a:rPr lang="en-US" dirty="0"/>
+              <a:t>Or save and return to </a:t>
+            </a:r>
+            <a:r>
+              <a:rPr lang="en-US" dirty="0" err="1"/>
+              <a:t>expert_mentor</a:t>
+            </a:r>
+            <a:endParaRPr lang="en-US" dirty="0"/>
           </a:p>
           <a:p>
             <a:pPr marL="285750" indent="-285750">
@@ -7184,23 +7310,13 @@
             </a:pPr>
             <a:r>
               <a:rPr lang="en-US" dirty="0"/>
-              <a:t>Recommendation function for </a:t>
+              <a:t>New normalization – solidify in </a:t>
             </a:r>
             <a:r>
               <a:rPr lang="en-US" dirty="0" err="1"/>
-              <a:t>nclust</a:t>
+              <a:t>pmartR</a:t>
             </a:r>
             <a:endParaRPr lang="en-US" dirty="0"/>
-          </a:p>
-          <a:p>
-            <a:pPr marL="742950" lvl="1" indent="-285750">
-              <a:buFont typeface="Arial" panose="020B0604020202020204" pitchFamily="34" charset="0"/>
-              <a:buChar char="•"/>
-            </a:pPr>
-            <a:r>
-              <a:rPr lang="en-US" dirty="0"/>
-              <a:t>Move samples/biomolecules to other tab?</a:t>
-            </a:r>
           </a:p>
           <a:p>
             <a:pPr marL="285750" indent="-285750">
@@ -7209,79 +7325,6 @@
             </a:pPr>
             <a:r>
               <a:rPr lang="en-US" dirty="0"/>
-              <a:t>Downloads</a:t>
-            </a:r>
-          </a:p>
-          <a:p>
-            <a:pPr marL="742950" lvl="1" indent="-285750">
-              <a:buFont typeface="Arial" panose="020B0604020202020204" pitchFamily="34" charset="0"/>
-              <a:buChar char="•"/>
-            </a:pPr>
-            <a:r>
-              <a:rPr lang="en-US" dirty="0"/>
-              <a:t>RVs with a level for models in case users </a:t>
-            </a:r>
-            <a:r>
-              <a:rPr lang="en-US" dirty="0" err="1"/>
-              <a:t>wanna</a:t>
-            </a:r>
-            <a:r>
-              <a:rPr lang="en-US" dirty="0"/>
-              <a:t> go back</a:t>
-            </a:r>
-          </a:p>
-          <a:p>
-            <a:pPr marL="1200150" lvl="2" indent="-285750">
-              <a:buFont typeface="Arial" panose="020B0604020202020204" pitchFamily="34" charset="0"/>
-              <a:buChar char="•"/>
-            </a:pPr>
-            <a:r>
-              <a:rPr lang="en-US" dirty="0"/>
-              <a:t>For advanced users, allow different models for different hp tunings</a:t>
-            </a:r>
-          </a:p>
-          <a:p>
-            <a:pPr marL="742950" lvl="1" indent="-285750">
-              <a:buFont typeface="Arial" panose="020B0604020202020204" pitchFamily="34" charset="0"/>
-              <a:buChar char="•"/>
-            </a:pPr>
-            <a:r>
-              <a:rPr lang="en-US" dirty="0"/>
-              <a:t>Cap the number of new models users can do</a:t>
-            </a:r>
-          </a:p>
-          <a:p>
-            <a:pPr marL="742950" lvl="1" indent="-285750">
-              <a:buFont typeface="Arial" panose="020B0604020202020204" pitchFamily="34" charset="0"/>
-              <a:buChar char="•"/>
-            </a:pPr>
-            <a:r>
-              <a:rPr lang="en-US" dirty="0"/>
-              <a:t>Or save and return to </a:t>
-            </a:r>
-            <a:r>
-              <a:rPr lang="en-US" dirty="0" err="1"/>
-              <a:t>expert_mentor</a:t>
-            </a:r>
-            <a:endParaRPr lang="en-US" dirty="0"/>
-          </a:p>
-          <a:p>
-            <a:pPr marL="285750" indent="-285750">
-              <a:buFont typeface="Arial" panose="020B0604020202020204" pitchFamily="34" charset="0"/>
-              <a:buChar char="•"/>
-            </a:pPr>
-            <a:r>
-              <a:rPr lang="en-US" dirty="0"/>
-              <a:t>New normalization</a:t>
-            </a:r>
-          </a:p>
-          <a:p>
-            <a:pPr marL="285750" indent="-285750">
-              <a:buFont typeface="Arial" panose="020B0604020202020204" pitchFamily="34" charset="0"/>
-              <a:buChar char="•"/>
-            </a:pPr>
-            <a:r>
-              <a:rPr lang="en-US" dirty="0"/>
               <a:t>Add </a:t>
             </a:r>
             <a:r>
@@ -7290,7 +7333,7 @@
             </a:r>
             <a:r>
               <a:rPr lang="en-US" dirty="0"/>
-              <a:t> da</a:t>
+              <a:t> da -- Dan</a:t>
             </a:r>
           </a:p>
         </p:txBody>
@@ -7460,15 +7503,7 @@
             <a:pPr lvl="1"/>
             <a:r>
               <a:rPr lang="en-US" dirty="0"/>
-              <a:t>May also </a:t>
-            </a:r>
-            <a:r>
-              <a:rPr lang="en-US" dirty="0" err="1"/>
-              <a:t>incoperate</a:t>
-            </a:r>
-            <a:r>
-              <a:rPr lang="en-US" dirty="0"/>
-              <a:t> ids for observers to make future </a:t>
+              <a:t>May also incorporate ids for observers to make future </a:t>
             </a:r>
             <a:r>
               <a:rPr lang="en-US" dirty="0" err="1"/>

--- a/SLOPE_progress.pptx
+++ b/SLOPE_progress.pptx
@@ -266,7 +266,7 @@
           <a:p>
             <a:fld id="{D8E254F4-E692-8547-ACD7-35D341663ABD}" type="datetimeFigureOut">
               <a:rPr lang="en-US" smtClean="0"/>
-              <a:t>2/27/24</a:t>
+              <a:t>3/21/24</a:t>
             </a:fld>
             <a:endParaRPr lang="en-US"/>
           </a:p>
@@ -464,7 +464,7 @@
           <a:p>
             <a:fld id="{D8E254F4-E692-8547-ACD7-35D341663ABD}" type="datetimeFigureOut">
               <a:rPr lang="en-US" smtClean="0"/>
-              <a:t>2/27/24</a:t>
+              <a:t>3/21/24</a:t>
             </a:fld>
             <a:endParaRPr lang="en-US"/>
           </a:p>
@@ -672,7 +672,7 @@
           <a:p>
             <a:fld id="{D8E254F4-E692-8547-ACD7-35D341663ABD}" type="datetimeFigureOut">
               <a:rPr lang="en-US" smtClean="0"/>
-              <a:t>2/27/24</a:t>
+              <a:t>3/21/24</a:t>
             </a:fld>
             <a:endParaRPr lang="en-US"/>
           </a:p>
@@ -870,7 +870,7 @@
           <a:p>
             <a:fld id="{D8E254F4-E692-8547-ACD7-35D341663ABD}" type="datetimeFigureOut">
               <a:rPr lang="en-US" smtClean="0"/>
-              <a:t>2/27/24</a:t>
+              <a:t>3/21/24</a:t>
             </a:fld>
             <a:endParaRPr lang="en-US"/>
           </a:p>
@@ -1145,7 +1145,7 @@
           <a:p>
             <a:fld id="{D8E254F4-E692-8547-ACD7-35D341663ABD}" type="datetimeFigureOut">
               <a:rPr lang="en-US" smtClean="0"/>
-              <a:t>2/27/24</a:t>
+              <a:t>3/21/24</a:t>
             </a:fld>
             <a:endParaRPr lang="en-US"/>
           </a:p>
@@ -1410,7 +1410,7 @@
           <a:p>
             <a:fld id="{D8E254F4-E692-8547-ACD7-35D341663ABD}" type="datetimeFigureOut">
               <a:rPr lang="en-US" smtClean="0"/>
-              <a:t>2/27/24</a:t>
+              <a:t>3/21/24</a:t>
             </a:fld>
             <a:endParaRPr lang="en-US"/>
           </a:p>
@@ -1822,7 +1822,7 @@
           <a:p>
             <a:fld id="{D8E254F4-E692-8547-ACD7-35D341663ABD}" type="datetimeFigureOut">
               <a:rPr lang="en-US" smtClean="0"/>
-              <a:t>2/27/24</a:t>
+              <a:t>3/21/24</a:t>
             </a:fld>
             <a:endParaRPr lang="en-US"/>
           </a:p>
@@ -1963,7 +1963,7 @@
           <a:p>
             <a:fld id="{D8E254F4-E692-8547-ACD7-35D341663ABD}" type="datetimeFigureOut">
               <a:rPr lang="en-US" smtClean="0"/>
-              <a:t>2/27/24</a:t>
+              <a:t>3/21/24</a:t>
             </a:fld>
             <a:endParaRPr lang="en-US"/>
           </a:p>
@@ -2076,7 +2076,7 @@
           <a:p>
             <a:fld id="{D8E254F4-E692-8547-ACD7-35D341663ABD}" type="datetimeFigureOut">
               <a:rPr lang="en-US" smtClean="0"/>
-              <a:t>2/27/24</a:t>
+              <a:t>3/21/24</a:t>
             </a:fld>
             <a:endParaRPr lang="en-US"/>
           </a:p>
@@ -2387,7 +2387,7 @@
           <a:p>
             <a:fld id="{D8E254F4-E692-8547-ACD7-35D341663ABD}" type="datetimeFigureOut">
               <a:rPr lang="en-US" smtClean="0"/>
-              <a:t>2/27/24</a:t>
+              <a:t>3/21/24</a:t>
             </a:fld>
             <a:endParaRPr lang="en-US"/>
           </a:p>
@@ -2675,7 +2675,7 @@
           <a:p>
             <a:fld id="{D8E254F4-E692-8547-ACD7-35D341663ABD}" type="datetimeFigureOut">
               <a:rPr lang="en-US" smtClean="0"/>
-              <a:t>2/27/24</a:t>
+              <a:t>3/21/24</a:t>
             </a:fld>
             <a:endParaRPr lang="en-US"/>
           </a:p>
@@ -2916,7 +2916,7 @@
           <a:p>
             <a:fld id="{D8E254F4-E692-8547-ACD7-35D341663ABD}" type="datetimeFigureOut">
               <a:rPr lang="en-US" smtClean="0"/>
-              <a:t>2/27/24</a:t>
+              <a:t>3/21/24</a:t>
             </a:fld>
             <a:endParaRPr lang="en-US"/>
           </a:p>
@@ -3384,7 +3384,7 @@
           <a:p>
             <a:r>
               <a:rPr lang="en-US" dirty="0"/>
-              <a:t>27Feb2024</a:t>
+              <a:t>21Mar2024</a:t>
             </a:r>
           </a:p>
         </p:txBody>
@@ -3586,36 +3586,9 @@
         </p:spPr>
         <p:txBody>
           <a:bodyPr>
-            <a:normAutofit fontScale="85000" lnSpcReduction="20000"/>
+            <a:normAutofit/>
           </a:bodyPr>
           <a:lstStyle/>
-          <a:p>
-            <a:r>
-              <a:rPr lang="en-US" dirty="0"/>
-              <a:t>More subfunctions for better task isolation/access </a:t>
-            </a:r>
-          </a:p>
-          <a:p>
-            <a:pPr lvl="1"/>
-            <a:r>
-              <a:rPr lang="en-US" dirty="0"/>
-              <a:t>e.g., can’t call tuning results </a:t>
-            </a:r>
-            <a:r>
-              <a:rPr lang="en-US" dirty="0" err="1"/>
-              <a:t>rn</a:t>
-            </a:r>
-            <a:r>
-              <a:rPr lang="en-US" dirty="0"/>
-              <a:t> from supervised</a:t>
-            </a:r>
-          </a:p>
-          <a:p>
-            <a:r>
-              <a:rPr lang="en-US" dirty="0"/>
-              <a:t>Allow specification of folds to happen outside the model training functions (we should be able to tell the users ahead of time what samples are in which fold)</a:t>
-            </a:r>
-          </a:p>
           <a:p>
             <a:r>
               <a:rPr lang="en-US" dirty="0"/>
@@ -3640,15 +3613,7 @@
             <a:pPr lvl="1"/>
             <a:r>
               <a:rPr lang="en-US" dirty="0"/>
-              <a:t>Appears to be fixed, double check if new results are </a:t>
-            </a:r>
-            <a:r>
-              <a:rPr lang="en-US"/>
-              <a:t>from means across </a:t>
-            </a:r>
-            <a:r>
-              <a:rPr lang="en-US" dirty="0"/>
-              <a:t>cross validation?  </a:t>
+              <a:t>Appears to be fixed, double check if new results are from means across cross validation?  </a:t>
             </a:r>
           </a:p>
           <a:p>
@@ -3663,12 +3628,6 @@
             <a:r>
               <a:rPr lang="en-US" dirty="0"/>
               <a:t>, can’t get variable importance in fit() – can’t we make one function where variable importance is always returned and reduction is an option?</a:t>
-            </a:r>
-          </a:p>
-          <a:p>
-            <a:r>
-              <a:rPr lang="en-US" dirty="0"/>
-              <a:t>Add argument for seed for consistent fun</a:t>
             </a:r>
           </a:p>
           <a:p>
@@ -6893,7 +6852,7 @@
         <p:spPr>
           <a:xfrm>
             <a:off x="145991" y="3126081"/>
-            <a:ext cx="6297539" cy="3662541"/>
+            <a:ext cx="5707941" cy="3908762"/>
           </a:xfrm>
           <a:prstGeom prst="rect">
             <a:avLst/>
@@ -7060,8 +7019,8 @@
         </p:nvSpPr>
         <p:spPr>
           <a:xfrm>
-            <a:off x="5335471" y="39605"/>
-            <a:ext cx="5939609" cy="2062103"/>
+            <a:off x="4412975" y="41336"/>
+            <a:ext cx="8183932" cy="3170099"/>
           </a:xfrm>
           <a:prstGeom prst="rect">
             <a:avLst/>
@@ -7156,6 +7115,59 @@
               <a:rPr lang="en-US" dirty="0"/>
               <a:t>Double check defaults for all model hp settings</a:t>
             </a:r>
+          </a:p>
+          <a:p>
+            <a:pPr marL="285750" indent="-285750">
+              <a:buFont typeface="Arial" panose="020B0604020202020204" pitchFamily="34" charset="0"/>
+              <a:buChar char="•"/>
+            </a:pPr>
+            <a:r>
+              <a:rPr lang="en-US" b="1" dirty="0">
+                <a:effectLst/>
+                <a:latin typeface="+mj-lt"/>
+              </a:rPr>
+              <a:t>Make confirm selection on analysis goals hide/appear</a:t>
+            </a:r>
+            <a:br>
+              <a:rPr lang="en-US" b="1" dirty="0">
+                <a:effectLst/>
+                <a:latin typeface="+mj-lt"/>
+              </a:rPr>
+            </a:br>
+            <a:r>
+              <a:rPr lang="en-US" b="1" dirty="0">
+                <a:effectLst/>
+                <a:latin typeface="+mj-lt"/>
+              </a:rPr>
+              <a:t>Make sure bundle and download downloads correctly</a:t>
+            </a:r>
+            <a:endParaRPr lang="en-US" dirty="0">
+              <a:effectLst/>
+              <a:latin typeface="+mj-lt"/>
+            </a:endParaRPr>
+          </a:p>
+          <a:p>
+            <a:pPr marL="285750" indent="-285750">
+              <a:buFont typeface="Arial" panose="020B0604020202020204" pitchFamily="34" charset="0"/>
+              <a:buChar char="•"/>
+            </a:pPr>
+            <a:r>
+              <a:rPr lang="en-US" b="1" dirty="0">
+                <a:effectLst/>
+                <a:latin typeface="+mj-lt"/>
+              </a:rPr>
+              <a:t>Reorder the rows in download tables</a:t>
+            </a:r>
+            <a:endParaRPr lang="en-US" dirty="0">
+              <a:effectLst/>
+              <a:latin typeface="+mj-lt"/>
+            </a:endParaRPr>
+          </a:p>
+          <a:p>
+            <a:pPr marL="285750" indent="-285750">
+              <a:buFont typeface="Arial" panose="020B0604020202020204" pitchFamily="34" charset="0"/>
+              <a:buChar char="•"/>
+            </a:pPr>
             <a:endParaRPr lang="en-US" dirty="0">
               <a:effectLst/>
             </a:endParaRPr>
@@ -7176,8 +7188,8 @@
         </p:nvSpPr>
         <p:spPr>
           <a:xfrm>
-            <a:off x="6443530" y="2682242"/>
-            <a:ext cx="5529127" cy="4001095"/>
+            <a:off x="6338069" y="3228895"/>
+            <a:ext cx="5853931" cy="3724096"/>
           </a:xfrm>
           <a:prstGeom prst="rect">
             <a:avLst/>
@@ -7193,16 +7205,6 @@
             <a:r>
               <a:rPr lang="en-US" sz="2000" dirty="0"/>
               <a:t>Feature additions</a:t>
-            </a:r>
-          </a:p>
-          <a:p>
-            <a:pPr marL="285750" indent="-285750">
-              <a:buFont typeface="Arial" panose="020B0604020202020204" pitchFamily="34" charset="0"/>
-              <a:buChar char="•"/>
-            </a:pPr>
-            <a:r>
-              <a:rPr lang="en-US" dirty="0"/>
-              <a:t>Parameter optimization plots</a:t>
             </a:r>
           </a:p>
           <a:p>
@@ -7470,7 +7472,7 @@
         <p:spPr/>
         <p:txBody>
           <a:bodyPr>
-            <a:normAutofit fontScale="92500" lnSpcReduction="10000"/>
+            <a:normAutofit fontScale="92500"/>
           </a:bodyPr>
           <a:lstStyle/>
           <a:p>
@@ -7581,30 +7583,13 @@
           <a:p>
             <a:r>
               <a:rPr lang="en-US" dirty="0"/>
-              <a:t>Documentation</a:t>
-            </a:r>
-          </a:p>
-          <a:p>
-            <a:pPr lvl="1"/>
-            <a:r>
-              <a:rPr lang="en-US" dirty="0"/>
-              <a:t>Do stuff</a:t>
-            </a:r>
-          </a:p>
-          <a:p>
-            <a:pPr lvl="1"/>
-            <a:r>
-              <a:rPr lang="en-US" dirty="0"/>
-              <a:t>Chat with Clayton on app </a:t>
-            </a:r>
-            <a:r>
-              <a:rPr lang="en-US" dirty="0" err="1"/>
-              <a:t>runthrough</a:t>
-            </a:r>
-            <a:r>
-              <a:rPr lang="en-US" dirty="0"/>
-              <a:t> + screenshots</a:t>
-            </a:r>
+              <a:t>Everything up on </a:t>
+            </a:r>
+            <a:r>
+              <a:rPr lang="en-US"/>
+              <a:t>the multiprobe</a:t>
+            </a:r>
+            <a:endParaRPr lang="en-US" dirty="0"/>
           </a:p>
           <a:p>
             <a:r>

--- a/SLOPE_progress.pptx
+++ b/SLOPE_progress.pptx
@@ -8,11 +8,11 @@
     <p:sldId id="256" r:id="rId2"/>
     <p:sldId id="257" r:id="rId3"/>
     <p:sldId id="260" r:id="rId4"/>
-    <p:sldId id="258" r:id="rId5"/>
-    <p:sldId id="259" r:id="rId6"/>
-    <p:sldId id="261" r:id="rId7"/>
-    <p:sldId id="262" r:id="rId8"/>
-    <p:sldId id="263" r:id="rId9"/>
+    <p:sldId id="261" r:id="rId5"/>
+    <p:sldId id="262" r:id="rId6"/>
+    <p:sldId id="265" r:id="rId7"/>
+    <p:sldId id="263" r:id="rId8"/>
+    <p:sldId id="264" r:id="rId9"/>
   </p:sldIdLst>
   <p:sldSz cx="12192000" cy="6858000"/>
   <p:notesSz cx="6858000" cy="9144000"/>
@@ -266,7 +266,7 @@
           <a:p>
             <a:fld id="{D8E254F4-E692-8547-ACD7-35D341663ABD}" type="datetimeFigureOut">
               <a:rPr lang="en-US" smtClean="0"/>
-              <a:t>3/21/24</a:t>
+              <a:t>4/19/24</a:t>
             </a:fld>
             <a:endParaRPr lang="en-US"/>
           </a:p>
@@ -464,7 +464,7 @@
           <a:p>
             <a:fld id="{D8E254F4-E692-8547-ACD7-35D341663ABD}" type="datetimeFigureOut">
               <a:rPr lang="en-US" smtClean="0"/>
-              <a:t>3/21/24</a:t>
+              <a:t>4/19/24</a:t>
             </a:fld>
             <a:endParaRPr lang="en-US"/>
           </a:p>
@@ -672,7 +672,7 @@
           <a:p>
             <a:fld id="{D8E254F4-E692-8547-ACD7-35D341663ABD}" type="datetimeFigureOut">
               <a:rPr lang="en-US" smtClean="0"/>
-              <a:t>3/21/24</a:t>
+              <a:t>4/19/24</a:t>
             </a:fld>
             <a:endParaRPr lang="en-US"/>
           </a:p>
@@ -870,7 +870,7 @@
           <a:p>
             <a:fld id="{D8E254F4-E692-8547-ACD7-35D341663ABD}" type="datetimeFigureOut">
               <a:rPr lang="en-US" smtClean="0"/>
-              <a:t>3/21/24</a:t>
+              <a:t>4/19/24</a:t>
             </a:fld>
             <a:endParaRPr lang="en-US"/>
           </a:p>
@@ -1145,7 +1145,7 @@
           <a:p>
             <a:fld id="{D8E254F4-E692-8547-ACD7-35D341663ABD}" type="datetimeFigureOut">
               <a:rPr lang="en-US" smtClean="0"/>
-              <a:t>3/21/24</a:t>
+              <a:t>4/19/24</a:t>
             </a:fld>
             <a:endParaRPr lang="en-US"/>
           </a:p>
@@ -1410,7 +1410,7 @@
           <a:p>
             <a:fld id="{D8E254F4-E692-8547-ACD7-35D341663ABD}" type="datetimeFigureOut">
               <a:rPr lang="en-US" smtClean="0"/>
-              <a:t>3/21/24</a:t>
+              <a:t>4/19/24</a:t>
             </a:fld>
             <a:endParaRPr lang="en-US"/>
           </a:p>
@@ -1822,7 +1822,7 @@
           <a:p>
             <a:fld id="{D8E254F4-E692-8547-ACD7-35D341663ABD}" type="datetimeFigureOut">
               <a:rPr lang="en-US" smtClean="0"/>
-              <a:t>3/21/24</a:t>
+              <a:t>4/19/24</a:t>
             </a:fld>
             <a:endParaRPr lang="en-US"/>
           </a:p>
@@ -1963,7 +1963,7 @@
           <a:p>
             <a:fld id="{D8E254F4-E692-8547-ACD7-35D341663ABD}" type="datetimeFigureOut">
               <a:rPr lang="en-US" smtClean="0"/>
-              <a:t>3/21/24</a:t>
+              <a:t>4/19/24</a:t>
             </a:fld>
             <a:endParaRPr lang="en-US"/>
           </a:p>
@@ -2076,7 +2076,7 @@
           <a:p>
             <a:fld id="{D8E254F4-E692-8547-ACD7-35D341663ABD}" type="datetimeFigureOut">
               <a:rPr lang="en-US" smtClean="0"/>
-              <a:t>3/21/24</a:t>
+              <a:t>4/19/24</a:t>
             </a:fld>
             <a:endParaRPr lang="en-US"/>
           </a:p>
@@ -2387,7 +2387,7 @@
           <a:p>
             <a:fld id="{D8E254F4-E692-8547-ACD7-35D341663ABD}" type="datetimeFigureOut">
               <a:rPr lang="en-US" smtClean="0"/>
-              <a:t>3/21/24</a:t>
+              <a:t>4/19/24</a:t>
             </a:fld>
             <a:endParaRPr lang="en-US"/>
           </a:p>
@@ -2675,7 +2675,7 @@
           <a:p>
             <a:fld id="{D8E254F4-E692-8547-ACD7-35D341663ABD}" type="datetimeFigureOut">
               <a:rPr lang="en-US" smtClean="0"/>
-              <a:t>3/21/24</a:t>
+              <a:t>4/19/24</a:t>
             </a:fld>
             <a:endParaRPr lang="en-US"/>
           </a:p>
@@ -2916,7 +2916,7 @@
           <a:p>
             <a:fld id="{D8E254F4-E692-8547-ACD7-35D341663ABD}" type="datetimeFigureOut">
               <a:rPr lang="en-US" smtClean="0"/>
-              <a:t>3/21/24</a:t>
+              <a:t>4/19/24</a:t>
             </a:fld>
             <a:endParaRPr lang="en-US"/>
           </a:p>
@@ -3384,7 +3384,7 @@
           <a:p>
             <a:r>
               <a:rPr lang="en-US" dirty="0"/>
-              <a:t>21Mar2024</a:t>
+              <a:t>09Apr2024</a:t>
             </a:r>
           </a:p>
         </p:txBody>
@@ -3442,7 +3442,7 @@
           <a:p>
             <a:r>
               <a:rPr lang="en-US" dirty="0"/>
-              <a:t>Backend fun – Dan and Clayton tasks</a:t>
+              <a:t>Backend fun</a:t>
             </a:r>
           </a:p>
         </p:txBody>
@@ -3470,18 +3470,8 @@
           <a:p>
             <a:r>
               <a:rPr lang="en-US" dirty="0"/>
-              <a:t>Implement PPCA</a:t>
-            </a:r>
-          </a:p>
-          <a:p>
-            <a:pPr lvl="1"/>
-            <a:r>
-              <a:rPr lang="en-US" dirty="0"/>
-              <a:t>SPLS-DA</a:t>
-            </a:r>
-          </a:p>
-          <a:p>
-            <a:endParaRPr lang="en-US" dirty="0"/>
+              <a:t>Implement all the fun models</a:t>
+            </a:r>
           </a:p>
           <a:p>
             <a:r>
@@ -3492,7 +3482,19 @@
           <a:p>
             <a:r>
               <a:rPr lang="en-US" dirty="0"/>
-              <a:t>Some day: Generalize for regression response</a:t>
+              <a:t>Relate rankings to results</a:t>
+            </a:r>
+          </a:p>
+          <a:p>
+            <a:r>
+              <a:rPr lang="en-US" dirty="0"/>
+              <a:t>Generalize for regression response</a:t>
+            </a:r>
+          </a:p>
+          <a:p>
+            <a:r>
+              <a:rPr lang="en-US" dirty="0"/>
+              <a:t>Get accuracy summary based on average cv results</a:t>
             </a:r>
           </a:p>
         </p:txBody>
@@ -3592,33 +3594,6 @@
           <a:p>
             <a:r>
               <a:rPr lang="en-US" dirty="0"/>
-              <a:t>Wonky lassos</a:t>
-            </a:r>
-          </a:p>
-          <a:p>
-            <a:r>
-              <a:rPr lang="en-US" dirty="0"/>
-              <a:t>Plots break if </a:t>
-            </a:r>
-            <a:r>
-              <a:rPr lang="en-US" dirty="0" err="1"/>
-              <a:t>nTest</a:t>
-            </a:r>
-            <a:r>
-              <a:rPr lang="en-US" dirty="0"/>
-              <a:t> = 0 (no holdout)</a:t>
-            </a:r>
-          </a:p>
-          <a:p>
-            <a:pPr lvl="1"/>
-            <a:r>
-              <a:rPr lang="en-US" dirty="0"/>
-              <a:t>Appears to be fixed, double check if new results are from means across cross validation?  </a:t>
-            </a:r>
-          </a:p>
-          <a:p>
-            <a:r>
-              <a:rPr lang="en-US" dirty="0"/>
               <a:t>Update to variable importance and normal fit – can’t get  a reduced model in </a:t>
             </a:r>
             <a:r>
@@ -3663,7 +3638,7 @@
 </file>
 
 <file path=ppt/slides/slide4.xml><?xml version="1.0" encoding="utf-8"?>
-<p:sld xmlns:a="http://schemas.openxmlformats.org/drawingml/2006/main" xmlns:r="http://schemas.openxmlformats.org/officeDocument/2006/relationships" xmlns:p="http://schemas.openxmlformats.org/presentationml/2006/main" show="0">
+<p:sld xmlns:a="http://schemas.openxmlformats.org/drawingml/2006/main" xmlns:r="http://schemas.openxmlformats.org/officeDocument/2006/relationships" xmlns:p="http://schemas.openxmlformats.org/presentationml/2006/main">
   <p:cSld>
     <p:spTree>
       <p:nvGrpSpPr>
@@ -3684,7 +3659,7 @@
           <p:cNvPr id="2" name="Title 1">
             <a:extLst>
               <a:ext uri="{FF2B5EF4-FFF2-40B4-BE49-F238E27FC236}">
-                <a16:creationId xmlns:a16="http://schemas.microsoft.com/office/drawing/2014/main" id="{306FEBE2-243B-20DD-353C-234A8B764AC2}"/>
+                <a16:creationId xmlns:a16="http://schemas.microsoft.com/office/drawing/2014/main" id="{DEB97BBB-8EFB-7355-72AA-208D42E7BDCD}"/>
               </a:ext>
             </a:extLst>
           </p:cNvPr>
@@ -3702,1648 +3677,67 @@
           <a:p>
             <a:r>
               <a:rPr lang="en-US" dirty="0"/>
-              <a:t>Current structure</a:t>
-            </a:r>
-          </a:p>
-        </p:txBody>
-      </p:sp>
-      <p:sp>
-        <p:nvSpPr>
-          <p:cNvPr id="4" name="Rectangle 3">
-            <a:extLst>
-              <a:ext uri="{FF2B5EF4-FFF2-40B4-BE49-F238E27FC236}">
-                <a16:creationId xmlns:a16="http://schemas.microsoft.com/office/drawing/2014/main" id="{E6AE1316-80DC-7453-35F2-7F15ABFA6500}"/>
-              </a:ext>
-            </a:extLst>
-          </p:cNvPr>
-          <p:cNvSpPr/>
-          <p:nvPr/>
-        </p:nvSpPr>
-        <p:spPr>
-          <a:xfrm>
-            <a:off x="4165383" y="2583006"/>
-            <a:ext cx="1854437" cy="456102"/>
-          </a:xfrm>
-          <a:prstGeom prst="rect">
-            <a:avLst/>
-          </a:prstGeom>
-        </p:spPr>
-        <p:style>
-          <a:lnRef idx="2">
-            <a:schemeClr val="accent1">
-              <a:shade val="15000"/>
-            </a:schemeClr>
-          </a:lnRef>
-          <a:fillRef idx="1">
-            <a:schemeClr val="accent1"/>
-          </a:fillRef>
-          <a:effectRef idx="0">
-            <a:schemeClr val="accent1"/>
-          </a:effectRef>
-          <a:fontRef idx="minor">
-            <a:schemeClr val="lt1"/>
-          </a:fontRef>
-        </p:style>
-        <p:txBody>
-          <a:bodyPr rtlCol="0" anchor="ctr"/>
-          <a:lstStyle/>
-          <a:p>
-            <a:pPr algn="ctr"/>
+              <a:t>Front end tasks</a:t>
+            </a:r>
+          </a:p>
+        </p:txBody>
+      </p:sp>
+      <p:sp>
+        <p:nvSpPr>
+          <p:cNvPr id="3" name="Content Placeholder 2">
+            <a:extLst>
+              <a:ext uri="{FF2B5EF4-FFF2-40B4-BE49-F238E27FC236}">
+                <a16:creationId xmlns:a16="http://schemas.microsoft.com/office/drawing/2014/main" id="{4EDE26FF-0C45-F52A-A5D1-6FDB250A8AF7}"/>
+              </a:ext>
+            </a:extLst>
+          </p:cNvPr>
+          <p:cNvSpPr>
+            <a:spLocks noGrp="1"/>
+          </p:cNvSpPr>
+          <p:nvPr>
+            <p:ph idx="1"/>
+          </p:nvPr>
+        </p:nvSpPr>
+        <p:spPr/>
+        <p:txBody>
+          <a:bodyPr/>
+          <a:lstStyle/>
+          <a:p>
             <a:r>
               <a:rPr lang="en-US" dirty="0"/>
-              <a:t>Fold evaluation</a:t>
-            </a:r>
-          </a:p>
-        </p:txBody>
-      </p:sp>
-      <p:sp>
-        <p:nvSpPr>
-          <p:cNvPr id="5" name="Rectangle 4">
-            <a:extLst>
-              <a:ext uri="{FF2B5EF4-FFF2-40B4-BE49-F238E27FC236}">
-                <a16:creationId xmlns:a16="http://schemas.microsoft.com/office/drawing/2014/main" id="{23B489CD-76CA-A77E-E098-B92006BDF637}"/>
-              </a:ext>
-            </a:extLst>
-          </p:cNvPr>
-          <p:cNvSpPr/>
-          <p:nvPr/>
-        </p:nvSpPr>
-        <p:spPr>
-          <a:xfrm>
-            <a:off x="4458788" y="3127815"/>
-            <a:ext cx="1854437" cy="456102"/>
-          </a:xfrm>
-          <a:prstGeom prst="rect">
-            <a:avLst/>
-          </a:prstGeom>
-        </p:spPr>
-        <p:style>
-          <a:lnRef idx="2">
-            <a:schemeClr val="accent1">
-              <a:shade val="15000"/>
-            </a:schemeClr>
-          </a:lnRef>
-          <a:fillRef idx="1">
-            <a:schemeClr val="accent1"/>
-          </a:fillRef>
-          <a:effectRef idx="0">
-            <a:schemeClr val="accent1"/>
-          </a:effectRef>
-          <a:fontRef idx="minor">
-            <a:schemeClr val="lt1"/>
-          </a:fontRef>
-        </p:style>
-        <p:txBody>
-          <a:bodyPr rtlCol="0" anchor="ctr"/>
-          <a:lstStyle/>
-          <a:p>
-            <a:pPr algn="ctr"/>
+              <a:t>Robustness</a:t>
+            </a:r>
+          </a:p>
+          <a:p>
             <a:r>
               <a:rPr lang="en-US" dirty="0"/>
-              <a:t>Sup model</a:t>
-            </a:r>
-          </a:p>
-        </p:txBody>
-      </p:sp>
-      <p:sp>
-        <p:nvSpPr>
-          <p:cNvPr id="6" name="Rectangle 5">
-            <a:extLst>
-              <a:ext uri="{FF2B5EF4-FFF2-40B4-BE49-F238E27FC236}">
-                <a16:creationId xmlns:a16="http://schemas.microsoft.com/office/drawing/2014/main" id="{FE252F33-7AA6-AF92-5778-571E32D22546}"/>
-              </a:ext>
-            </a:extLst>
-          </p:cNvPr>
-          <p:cNvSpPr/>
-          <p:nvPr/>
-        </p:nvSpPr>
-        <p:spPr>
-          <a:xfrm>
-            <a:off x="4765012" y="3672624"/>
-            <a:ext cx="2079476" cy="1665496"/>
-          </a:xfrm>
-          <a:prstGeom prst="rect">
-            <a:avLst/>
-          </a:prstGeom>
-        </p:spPr>
-        <p:style>
-          <a:lnRef idx="2">
-            <a:schemeClr val="accent1">
-              <a:shade val="15000"/>
-            </a:schemeClr>
-          </a:lnRef>
-          <a:fillRef idx="1">
-            <a:schemeClr val="accent1"/>
-          </a:fillRef>
-          <a:effectRef idx="0">
-            <a:schemeClr val="accent1"/>
-          </a:effectRef>
-          <a:fontRef idx="minor">
-            <a:schemeClr val="lt1"/>
-          </a:fontRef>
-        </p:style>
-        <p:txBody>
-          <a:bodyPr rtlCol="0" anchor="ctr"/>
-          <a:lstStyle/>
-          <a:p>
-            <a:pPr algn="ctr"/>
+              <a:t>User friendly features</a:t>
+            </a:r>
+          </a:p>
+          <a:p>
             <a:r>
               <a:rPr lang="en-US" dirty="0"/>
-              <a:t>HP tuning, unless each hyperparameter is specified for tuning or not</a:t>
-            </a:r>
-          </a:p>
-        </p:txBody>
-      </p:sp>
-      <p:sp>
-        <p:nvSpPr>
-          <p:cNvPr id="7" name="TextBox 6">
-            <a:extLst>
-              <a:ext uri="{FF2B5EF4-FFF2-40B4-BE49-F238E27FC236}">
-                <a16:creationId xmlns:a16="http://schemas.microsoft.com/office/drawing/2014/main" id="{C67CC0BD-6009-FA68-E8B6-F35708CC0504}"/>
-              </a:ext>
-            </a:extLst>
-          </p:cNvPr>
-          <p:cNvSpPr txBox="1"/>
-          <p:nvPr/>
-        </p:nvSpPr>
-        <p:spPr>
-          <a:xfrm>
-            <a:off x="4058063" y="1527938"/>
-            <a:ext cx="3539148" cy="923330"/>
-          </a:xfrm>
-          <a:prstGeom prst="rect">
-            <a:avLst/>
-          </a:prstGeom>
-          <a:noFill/>
-        </p:spPr>
-        <p:txBody>
-          <a:bodyPr wrap="square" rtlCol="0">
-            <a:spAutoFit/>
-          </a:bodyPr>
-          <a:lstStyle/>
+              <a:t>Bug fixes</a:t>
+            </a:r>
+          </a:p>
           <a:p>
             <a:r>
               <a:rPr lang="en-US" dirty="0"/>
-              <a:t>User selects training/testing/validation structure</a:t>
+              <a:t>Feature additions</a:t>
             </a:r>
           </a:p>
           <a:p>
             <a:r>
               <a:rPr lang="en-US" dirty="0"/>
-              <a:t>Can run fold evaluation</a:t>
-            </a:r>
-          </a:p>
-        </p:txBody>
-      </p:sp>
-      <p:sp>
-        <p:nvSpPr>
-          <p:cNvPr id="8" name="TextBox 7">
-            <a:extLst>
-              <a:ext uri="{FF2B5EF4-FFF2-40B4-BE49-F238E27FC236}">
-                <a16:creationId xmlns:a16="http://schemas.microsoft.com/office/drawing/2014/main" id="{EC33526F-BE6D-3CAF-2B42-D364CC6EDE5B}"/>
-              </a:ext>
-            </a:extLst>
-          </p:cNvPr>
-          <p:cNvSpPr txBox="1"/>
-          <p:nvPr/>
-        </p:nvSpPr>
-        <p:spPr>
-          <a:xfrm>
-            <a:off x="452930" y="1518813"/>
-            <a:ext cx="2785926" cy="923330"/>
-          </a:xfrm>
-          <a:prstGeom prst="rect">
-            <a:avLst/>
-          </a:prstGeom>
-          <a:noFill/>
-        </p:spPr>
-        <p:txBody>
-          <a:bodyPr wrap="square" rtlCol="0">
-            <a:spAutoFit/>
-          </a:bodyPr>
-          <a:lstStyle/>
-          <a:p>
-            <a:r>
-              <a:rPr lang="en-US" dirty="0"/>
-              <a:t>User selects if they want robustness to new data and hyperparameter excitement</a:t>
-            </a:r>
-          </a:p>
-        </p:txBody>
-      </p:sp>
-      <p:sp>
-        <p:nvSpPr>
-          <p:cNvPr id="10" name="Rounded Rectangle 9">
-            <a:extLst>
-              <a:ext uri="{FF2B5EF4-FFF2-40B4-BE49-F238E27FC236}">
-                <a16:creationId xmlns:a16="http://schemas.microsoft.com/office/drawing/2014/main" id="{912EB8DB-ED2B-AC73-A4C7-69925FC2CB44}"/>
-              </a:ext>
-            </a:extLst>
-          </p:cNvPr>
-          <p:cNvSpPr/>
-          <p:nvPr/>
-        </p:nvSpPr>
-        <p:spPr>
-          <a:xfrm>
-            <a:off x="615297" y="2610633"/>
-            <a:ext cx="1743342" cy="576008"/>
-          </a:xfrm>
-          <a:prstGeom prst="roundRect">
-            <a:avLst/>
-          </a:prstGeom>
-        </p:spPr>
-        <p:style>
-          <a:lnRef idx="1">
-            <a:schemeClr val="accent6"/>
-          </a:lnRef>
-          <a:fillRef idx="2">
-            <a:schemeClr val="accent6"/>
-          </a:fillRef>
-          <a:effectRef idx="1">
-            <a:schemeClr val="accent6"/>
-          </a:effectRef>
-          <a:fontRef idx="minor">
-            <a:schemeClr val="dk1"/>
-          </a:fontRef>
-        </p:style>
-        <p:txBody>
-          <a:bodyPr rtlCol="0" anchor="ctr"/>
-          <a:lstStyle/>
-          <a:p>
-            <a:pPr algn="ctr"/>
-            <a:r>
-              <a:rPr lang="en-US" dirty="0"/>
-              <a:t>HP tuning</a:t>
-            </a:r>
-          </a:p>
-        </p:txBody>
-      </p:sp>
-      <p:sp>
-        <p:nvSpPr>
-          <p:cNvPr id="11" name="Rounded Rectangle 10">
-            <a:extLst>
-              <a:ext uri="{FF2B5EF4-FFF2-40B4-BE49-F238E27FC236}">
-                <a16:creationId xmlns:a16="http://schemas.microsoft.com/office/drawing/2014/main" id="{77D90A80-E1FB-C68D-C70F-D8365C9EE8FA}"/>
-              </a:ext>
-            </a:extLst>
-          </p:cNvPr>
-          <p:cNvSpPr/>
-          <p:nvPr/>
-        </p:nvSpPr>
-        <p:spPr>
-          <a:xfrm>
-            <a:off x="615297" y="4038620"/>
-            <a:ext cx="1743342" cy="576008"/>
-          </a:xfrm>
-          <a:prstGeom prst="roundRect">
-            <a:avLst/>
-          </a:prstGeom>
-        </p:spPr>
-        <p:style>
-          <a:lnRef idx="1">
-            <a:schemeClr val="accent6"/>
-          </a:lnRef>
-          <a:fillRef idx="2">
-            <a:schemeClr val="accent6"/>
-          </a:fillRef>
-          <a:effectRef idx="1">
-            <a:schemeClr val="accent6"/>
-          </a:effectRef>
-          <a:fontRef idx="minor">
-            <a:schemeClr val="dk1"/>
-          </a:fontRef>
-        </p:style>
-        <p:txBody>
-          <a:bodyPr rtlCol="0" anchor="ctr"/>
-          <a:lstStyle/>
-          <a:p>
-            <a:pPr algn="ctr"/>
-            <a:r>
-              <a:rPr lang="en-US" dirty="0"/>
-              <a:t>Default values</a:t>
-            </a:r>
-          </a:p>
-        </p:txBody>
-      </p:sp>
-      <p:sp>
-        <p:nvSpPr>
-          <p:cNvPr id="12" name="Rounded Rectangle 11">
-            <a:extLst>
-              <a:ext uri="{FF2B5EF4-FFF2-40B4-BE49-F238E27FC236}">
-                <a16:creationId xmlns:a16="http://schemas.microsoft.com/office/drawing/2014/main" id="{D677B87E-CAC4-FDBB-A6F1-6E4D841A1F8C}"/>
-              </a:ext>
-            </a:extLst>
-          </p:cNvPr>
-          <p:cNvSpPr/>
-          <p:nvPr/>
-        </p:nvSpPr>
-        <p:spPr>
-          <a:xfrm>
-            <a:off x="615297" y="5373608"/>
-            <a:ext cx="1743342" cy="576008"/>
-          </a:xfrm>
-          <a:prstGeom prst="roundRect">
-            <a:avLst/>
-          </a:prstGeom>
-        </p:spPr>
-        <p:style>
-          <a:lnRef idx="1">
-            <a:schemeClr val="accent6"/>
-          </a:lnRef>
-          <a:fillRef idx="2">
-            <a:schemeClr val="accent6"/>
-          </a:fillRef>
-          <a:effectRef idx="1">
-            <a:schemeClr val="accent6"/>
-          </a:effectRef>
-          <a:fontRef idx="minor">
-            <a:schemeClr val="dk1"/>
-          </a:fontRef>
-        </p:style>
-        <p:txBody>
-          <a:bodyPr rtlCol="0" anchor="ctr"/>
-          <a:lstStyle/>
-          <a:p>
-            <a:pPr algn="ctr"/>
-            <a:r>
-              <a:rPr lang="en-US" dirty="0"/>
-              <a:t>Custom values</a:t>
-            </a:r>
-          </a:p>
-        </p:txBody>
-      </p:sp>
-      <p:sp>
-        <p:nvSpPr>
-          <p:cNvPr id="13" name="TextBox 12">
-            <a:extLst>
-              <a:ext uri="{FF2B5EF4-FFF2-40B4-BE49-F238E27FC236}">
-                <a16:creationId xmlns:a16="http://schemas.microsoft.com/office/drawing/2014/main" id="{CD70AC41-5B76-0D64-2684-F75B709D2EE7}"/>
-              </a:ext>
-            </a:extLst>
-          </p:cNvPr>
-          <p:cNvSpPr txBox="1"/>
-          <p:nvPr/>
-        </p:nvSpPr>
-        <p:spPr>
-          <a:xfrm>
-            <a:off x="1278417" y="3448131"/>
-            <a:ext cx="417102" cy="369332"/>
-          </a:xfrm>
-          <a:prstGeom prst="rect">
-            <a:avLst/>
-          </a:prstGeom>
-          <a:noFill/>
-        </p:spPr>
-        <p:txBody>
-          <a:bodyPr wrap="none" rtlCol="0">
-            <a:spAutoFit/>
-          </a:bodyPr>
-          <a:lstStyle/>
-          <a:p>
-            <a:r>
-              <a:rPr lang="en-US" dirty="0"/>
-              <a:t>Or</a:t>
-            </a:r>
-          </a:p>
-        </p:txBody>
-      </p:sp>
-      <p:sp>
-        <p:nvSpPr>
-          <p:cNvPr id="14" name="TextBox 13">
-            <a:extLst>
-              <a:ext uri="{FF2B5EF4-FFF2-40B4-BE49-F238E27FC236}">
-                <a16:creationId xmlns:a16="http://schemas.microsoft.com/office/drawing/2014/main" id="{B7E536C7-4A60-A5FB-4555-4AF0288DAF0D}"/>
-              </a:ext>
-            </a:extLst>
-          </p:cNvPr>
-          <p:cNvSpPr txBox="1"/>
-          <p:nvPr/>
-        </p:nvSpPr>
-        <p:spPr>
-          <a:xfrm>
-            <a:off x="1278417" y="4835786"/>
-            <a:ext cx="417102" cy="369332"/>
-          </a:xfrm>
-          <a:prstGeom prst="rect">
-            <a:avLst/>
-          </a:prstGeom>
-          <a:noFill/>
-        </p:spPr>
-        <p:txBody>
-          <a:bodyPr wrap="none" rtlCol="0">
-            <a:spAutoFit/>
-          </a:bodyPr>
-          <a:lstStyle/>
-          <a:p>
-            <a:r>
-              <a:rPr lang="en-US" dirty="0"/>
-              <a:t>Or</a:t>
-            </a:r>
-          </a:p>
-        </p:txBody>
-      </p:sp>
-      <p:sp>
-        <p:nvSpPr>
-          <p:cNvPr id="15" name="TextBox 14">
-            <a:extLst>
-              <a:ext uri="{FF2B5EF4-FFF2-40B4-BE49-F238E27FC236}">
-                <a16:creationId xmlns:a16="http://schemas.microsoft.com/office/drawing/2014/main" id="{ABA00D94-1920-1A94-026E-2858230D953A}"/>
-              </a:ext>
-            </a:extLst>
-          </p:cNvPr>
-          <p:cNvSpPr txBox="1"/>
-          <p:nvPr/>
-        </p:nvSpPr>
-        <p:spPr>
-          <a:xfrm>
-            <a:off x="7840064" y="288025"/>
-            <a:ext cx="4018778" cy="369332"/>
-          </a:xfrm>
-          <a:prstGeom prst="rect">
-            <a:avLst/>
-          </a:prstGeom>
-          <a:noFill/>
-        </p:spPr>
-        <p:txBody>
-          <a:bodyPr wrap="square" rtlCol="0">
-            <a:spAutoFit/>
-          </a:bodyPr>
-          <a:lstStyle/>
-          <a:p>
-            <a:r>
-              <a:rPr lang="en-US" dirty="0"/>
-              <a:t>If not using default values, user picks </a:t>
-            </a:r>
-            <a:r>
-              <a:rPr lang="en-US" dirty="0" err="1"/>
-              <a:t>Hps</a:t>
-            </a:r>
-            <a:r>
-              <a:rPr lang="en-US" dirty="0"/>
-              <a:t> </a:t>
-            </a:r>
-          </a:p>
-        </p:txBody>
-      </p:sp>
-      <p:sp>
-        <p:nvSpPr>
-          <p:cNvPr id="16" name="TextBox 15">
-            <a:extLst>
-              <a:ext uri="{FF2B5EF4-FFF2-40B4-BE49-F238E27FC236}">
-                <a16:creationId xmlns:a16="http://schemas.microsoft.com/office/drawing/2014/main" id="{EBBCE068-1C73-8B72-BD90-231AAA7452ED}"/>
-              </a:ext>
-            </a:extLst>
-          </p:cNvPr>
-          <p:cNvSpPr txBox="1"/>
-          <p:nvPr/>
-        </p:nvSpPr>
-        <p:spPr>
-          <a:xfrm>
-            <a:off x="2397788" y="4066874"/>
-            <a:ext cx="1682136" cy="1200329"/>
-          </a:xfrm>
-          <a:prstGeom prst="rect">
-            <a:avLst/>
-          </a:prstGeom>
-          <a:noFill/>
-        </p:spPr>
-        <p:txBody>
-          <a:bodyPr wrap="square" rtlCol="0">
-            <a:spAutoFit/>
-          </a:bodyPr>
-          <a:lstStyle/>
-          <a:p>
-            <a:r>
-              <a:rPr lang="en-US" dirty="0"/>
-              <a:t>Must calculate all default </a:t>
-            </a:r>
-            <a:r>
-              <a:rPr lang="en-US" dirty="0" err="1"/>
-              <a:t>hps</a:t>
-            </a:r>
-            <a:r>
-              <a:rPr lang="en-US" dirty="0"/>
-              <a:t> for the data for fold eval</a:t>
-            </a:r>
-          </a:p>
-        </p:txBody>
-      </p:sp>
-      <p:sp>
-        <p:nvSpPr>
-          <p:cNvPr id="17" name="TextBox 16">
-            <a:extLst>
-              <a:ext uri="{FF2B5EF4-FFF2-40B4-BE49-F238E27FC236}">
-                <a16:creationId xmlns:a16="http://schemas.microsoft.com/office/drawing/2014/main" id="{1FD98A70-4AA1-CE89-3883-06BF4673B3A5}"/>
-              </a:ext>
-            </a:extLst>
-          </p:cNvPr>
-          <p:cNvSpPr txBox="1"/>
-          <p:nvPr/>
-        </p:nvSpPr>
-        <p:spPr>
-          <a:xfrm>
-            <a:off x="2397788" y="5412216"/>
-            <a:ext cx="1682136" cy="1200329"/>
-          </a:xfrm>
-          <a:prstGeom prst="rect">
-            <a:avLst/>
-          </a:prstGeom>
-          <a:noFill/>
-        </p:spPr>
-        <p:txBody>
-          <a:bodyPr wrap="square" rtlCol="0">
-            <a:spAutoFit/>
-          </a:bodyPr>
-          <a:lstStyle/>
-          <a:p>
-            <a:r>
-              <a:rPr lang="en-US" dirty="0"/>
-              <a:t>Must calculate all default </a:t>
-            </a:r>
-            <a:r>
-              <a:rPr lang="en-US" dirty="0" err="1"/>
-              <a:t>hps</a:t>
-            </a:r>
-            <a:r>
-              <a:rPr lang="en-US" dirty="0"/>
-              <a:t> for the data for fold eval</a:t>
-            </a:r>
-          </a:p>
-        </p:txBody>
-      </p:sp>
-      <p:sp>
-        <p:nvSpPr>
-          <p:cNvPr id="19" name="TextBox 18">
-            <a:extLst>
-              <a:ext uri="{FF2B5EF4-FFF2-40B4-BE49-F238E27FC236}">
-                <a16:creationId xmlns:a16="http://schemas.microsoft.com/office/drawing/2014/main" id="{953F0598-F989-3D0C-5DB3-21756311D4A2}"/>
-              </a:ext>
-            </a:extLst>
-          </p:cNvPr>
-          <p:cNvSpPr txBox="1"/>
-          <p:nvPr/>
-        </p:nvSpPr>
-        <p:spPr>
-          <a:xfrm>
-            <a:off x="2380607" y="2284294"/>
-            <a:ext cx="1550370" cy="1754326"/>
-          </a:xfrm>
-          <a:prstGeom prst="rect">
-            <a:avLst/>
-          </a:prstGeom>
-          <a:noFill/>
-        </p:spPr>
-        <p:txBody>
-          <a:bodyPr wrap="square">
-            <a:spAutoFit/>
-          </a:bodyPr>
-          <a:lstStyle/>
-          <a:p>
-            <a:r>
-              <a:rPr lang="en-US" dirty="0"/>
-              <a:t>Might not reflect the range of hp user wants to tune for fold eval</a:t>
-            </a:r>
-          </a:p>
-        </p:txBody>
-      </p:sp>
-      <p:sp>
-        <p:nvSpPr>
-          <p:cNvPr id="20" name="Rectangle 19">
-            <a:extLst>
-              <a:ext uri="{FF2B5EF4-FFF2-40B4-BE49-F238E27FC236}">
-                <a16:creationId xmlns:a16="http://schemas.microsoft.com/office/drawing/2014/main" id="{1260562E-F64F-EDB4-4220-3175805DB7DE}"/>
-              </a:ext>
-            </a:extLst>
-          </p:cNvPr>
-          <p:cNvSpPr/>
-          <p:nvPr/>
-        </p:nvSpPr>
-        <p:spPr>
-          <a:xfrm>
-            <a:off x="4079924" y="2485818"/>
-            <a:ext cx="3367043" cy="3050790"/>
-          </a:xfrm>
-          <a:prstGeom prst="rect">
-            <a:avLst/>
-          </a:prstGeom>
-          <a:noFill/>
-          <a:ln w="57150"/>
-        </p:spPr>
-        <p:style>
-          <a:lnRef idx="2">
-            <a:schemeClr val="accent1">
-              <a:shade val="15000"/>
-            </a:schemeClr>
-          </a:lnRef>
-          <a:fillRef idx="1">
-            <a:schemeClr val="accent1"/>
-          </a:fillRef>
-          <a:effectRef idx="0">
-            <a:schemeClr val="accent1"/>
-          </a:effectRef>
-          <a:fontRef idx="minor">
-            <a:schemeClr val="lt1"/>
-          </a:fontRef>
-        </p:style>
-        <p:txBody>
-          <a:bodyPr rtlCol="0" anchor="ctr"/>
-          <a:lstStyle/>
-          <a:p>
-            <a:pPr algn="ctr"/>
-            <a:endParaRPr lang="en-US"/>
-          </a:p>
-        </p:txBody>
-      </p:sp>
-      <p:sp>
-        <p:nvSpPr>
-          <p:cNvPr id="21" name="TextBox 20">
-            <a:extLst>
-              <a:ext uri="{FF2B5EF4-FFF2-40B4-BE49-F238E27FC236}">
-                <a16:creationId xmlns:a16="http://schemas.microsoft.com/office/drawing/2014/main" id="{45ED492D-7C99-2B54-98AE-406B2C7B408C}"/>
-              </a:ext>
-            </a:extLst>
-          </p:cNvPr>
-          <p:cNvSpPr txBox="1"/>
-          <p:nvPr/>
-        </p:nvSpPr>
-        <p:spPr>
-          <a:xfrm>
-            <a:off x="5974427" y="5463704"/>
-            <a:ext cx="1580882" cy="369332"/>
-          </a:xfrm>
-          <a:prstGeom prst="rect">
-            <a:avLst/>
-          </a:prstGeom>
-          <a:noFill/>
-        </p:spPr>
-        <p:txBody>
-          <a:bodyPr wrap="none" rtlCol="0">
-            <a:spAutoFit/>
-          </a:bodyPr>
-          <a:lstStyle/>
-          <a:p>
-            <a:r>
-              <a:rPr lang="en-US" dirty="0"/>
-              <a:t>Single function</a:t>
-            </a:r>
-          </a:p>
-        </p:txBody>
-      </p:sp>
-      <p:sp>
-        <p:nvSpPr>
-          <p:cNvPr id="22" name="Rounded Rectangle 21">
-            <a:extLst>
-              <a:ext uri="{FF2B5EF4-FFF2-40B4-BE49-F238E27FC236}">
-                <a16:creationId xmlns:a16="http://schemas.microsoft.com/office/drawing/2014/main" id="{3E561FF7-A8DA-9FE5-0B38-18C95600F300}"/>
-              </a:ext>
-            </a:extLst>
-          </p:cNvPr>
-          <p:cNvSpPr/>
-          <p:nvPr/>
-        </p:nvSpPr>
-        <p:spPr>
-          <a:xfrm>
-            <a:off x="7746762" y="2220441"/>
-            <a:ext cx="1743342" cy="576008"/>
-          </a:xfrm>
-          <a:prstGeom prst="roundRect">
-            <a:avLst/>
-          </a:prstGeom>
-        </p:spPr>
-        <p:style>
-          <a:lnRef idx="1">
-            <a:schemeClr val="accent6"/>
-          </a:lnRef>
-          <a:fillRef idx="2">
-            <a:schemeClr val="accent6"/>
-          </a:fillRef>
-          <a:effectRef idx="1">
-            <a:schemeClr val="accent6"/>
-          </a:effectRef>
-          <a:fontRef idx="minor">
-            <a:schemeClr val="dk1"/>
-          </a:fontRef>
-        </p:style>
-        <p:txBody>
-          <a:bodyPr rtlCol="0" anchor="ctr"/>
-          <a:lstStyle/>
-          <a:p>
-            <a:pPr algn="ctr"/>
-            <a:r>
-              <a:rPr lang="en-US" dirty="0"/>
-              <a:t>Custom values</a:t>
-            </a:r>
-          </a:p>
-        </p:txBody>
-      </p:sp>
-      <p:sp>
-        <p:nvSpPr>
-          <p:cNvPr id="23" name="TextBox 22">
-            <a:extLst>
-              <a:ext uri="{FF2B5EF4-FFF2-40B4-BE49-F238E27FC236}">
-                <a16:creationId xmlns:a16="http://schemas.microsoft.com/office/drawing/2014/main" id="{750A6D15-A797-65E3-B236-18B732DEDA9F}"/>
-              </a:ext>
-            </a:extLst>
-          </p:cNvPr>
-          <p:cNvSpPr txBox="1"/>
-          <p:nvPr/>
-        </p:nvSpPr>
-        <p:spPr>
-          <a:xfrm>
-            <a:off x="8409882" y="2949498"/>
-            <a:ext cx="417102" cy="369332"/>
-          </a:xfrm>
-          <a:prstGeom prst="rect">
-            <a:avLst/>
-          </a:prstGeom>
-          <a:noFill/>
-        </p:spPr>
-        <p:txBody>
-          <a:bodyPr wrap="none" rtlCol="0">
-            <a:spAutoFit/>
-          </a:bodyPr>
-          <a:lstStyle/>
-          <a:p>
-            <a:r>
-              <a:rPr lang="en-US" dirty="0"/>
-              <a:t>Or</a:t>
-            </a:r>
-          </a:p>
-        </p:txBody>
-      </p:sp>
-      <p:sp>
-        <p:nvSpPr>
-          <p:cNvPr id="24" name="Rounded Rectangle 23">
-            <a:extLst>
-              <a:ext uri="{FF2B5EF4-FFF2-40B4-BE49-F238E27FC236}">
-                <a16:creationId xmlns:a16="http://schemas.microsoft.com/office/drawing/2014/main" id="{59C17E15-C5F5-7111-81EF-74C0897614F2}"/>
-              </a:ext>
-            </a:extLst>
-          </p:cNvPr>
-          <p:cNvSpPr/>
-          <p:nvPr/>
-        </p:nvSpPr>
-        <p:spPr>
-          <a:xfrm>
-            <a:off x="7746762" y="3411094"/>
-            <a:ext cx="1743342" cy="981831"/>
-          </a:xfrm>
-          <a:prstGeom prst="roundRect">
-            <a:avLst/>
-          </a:prstGeom>
-        </p:spPr>
-        <p:style>
-          <a:lnRef idx="1">
-            <a:schemeClr val="accent6"/>
-          </a:lnRef>
-          <a:fillRef idx="2">
-            <a:schemeClr val="accent6"/>
-          </a:fillRef>
-          <a:effectRef idx="1">
-            <a:schemeClr val="accent6"/>
-          </a:effectRef>
-          <a:fontRef idx="minor">
-            <a:schemeClr val="dk1"/>
-          </a:fontRef>
-        </p:style>
-        <p:txBody>
-          <a:bodyPr rtlCol="0" anchor="ctr"/>
-          <a:lstStyle/>
-          <a:p>
-            <a:pPr algn="ctr"/>
-            <a:r>
-              <a:rPr lang="en-US" dirty="0"/>
-              <a:t>Which </a:t>
-            </a:r>
-            <a:r>
-              <a:rPr lang="en-US" dirty="0" err="1"/>
-              <a:t>hps</a:t>
-            </a:r>
-            <a:r>
-              <a:rPr lang="en-US" dirty="0"/>
-              <a:t> to tune</a:t>
-            </a:r>
-          </a:p>
-        </p:txBody>
-      </p:sp>
-      <p:sp>
-        <p:nvSpPr>
-          <p:cNvPr id="25" name="TextBox 24">
-            <a:extLst>
-              <a:ext uri="{FF2B5EF4-FFF2-40B4-BE49-F238E27FC236}">
-                <a16:creationId xmlns:a16="http://schemas.microsoft.com/office/drawing/2014/main" id="{4D1924B6-73D7-F21F-B226-A176CDB4C363}"/>
-              </a:ext>
-            </a:extLst>
-          </p:cNvPr>
-          <p:cNvSpPr txBox="1"/>
-          <p:nvPr/>
-        </p:nvSpPr>
-        <p:spPr>
-          <a:xfrm>
-            <a:off x="9576846" y="3109295"/>
-            <a:ext cx="1682136" cy="1477328"/>
-          </a:xfrm>
-          <a:prstGeom prst="rect">
-            <a:avLst/>
-          </a:prstGeom>
-          <a:noFill/>
-        </p:spPr>
-        <p:txBody>
-          <a:bodyPr wrap="square" rtlCol="0">
-            <a:spAutoFit/>
-          </a:bodyPr>
-          <a:lstStyle/>
-          <a:p>
-            <a:r>
-              <a:rPr lang="en-US" dirty="0"/>
-              <a:t>Must calculate all default </a:t>
-            </a:r>
-            <a:r>
-              <a:rPr lang="en-US" dirty="0" err="1"/>
-              <a:t>hps</a:t>
-            </a:r>
-            <a:r>
-              <a:rPr lang="en-US" dirty="0"/>
-              <a:t> for the </a:t>
-            </a:r>
-            <a:r>
-              <a:rPr lang="en-US" dirty="0" err="1"/>
-              <a:t>hps</a:t>
-            </a:r>
-            <a:r>
-              <a:rPr lang="en-US" dirty="0"/>
-              <a:t> not being tuned  for run model</a:t>
-            </a:r>
-          </a:p>
-        </p:txBody>
-      </p:sp>
-      <p:sp>
-        <p:nvSpPr>
-          <p:cNvPr id="26" name="TextBox 25">
-            <a:extLst>
-              <a:ext uri="{FF2B5EF4-FFF2-40B4-BE49-F238E27FC236}">
-                <a16:creationId xmlns:a16="http://schemas.microsoft.com/office/drawing/2014/main" id="{57B512C8-0450-CCD3-3302-D3B1CE6F955A}"/>
-              </a:ext>
-            </a:extLst>
-          </p:cNvPr>
-          <p:cNvSpPr txBox="1"/>
-          <p:nvPr/>
-        </p:nvSpPr>
-        <p:spPr>
-          <a:xfrm>
-            <a:off x="7746762" y="4805538"/>
-            <a:ext cx="1202573" cy="369332"/>
-          </a:xfrm>
-          <a:prstGeom prst="rect">
-            <a:avLst/>
-          </a:prstGeom>
-          <a:noFill/>
-        </p:spPr>
-        <p:txBody>
-          <a:bodyPr wrap="none" rtlCol="0">
-            <a:spAutoFit/>
-          </a:bodyPr>
-          <a:lstStyle/>
-          <a:p>
-            <a:r>
-              <a:rPr lang="en-US" dirty="0"/>
-              <a:t>Run model</a:t>
-            </a:r>
-          </a:p>
-        </p:txBody>
-      </p:sp>
-      <p:sp>
-        <p:nvSpPr>
-          <p:cNvPr id="27" name="Rectangle 26">
-            <a:extLst>
-              <a:ext uri="{FF2B5EF4-FFF2-40B4-BE49-F238E27FC236}">
-                <a16:creationId xmlns:a16="http://schemas.microsoft.com/office/drawing/2014/main" id="{E9A162EC-B55A-4FA4-6CB8-36CAD06E712B}"/>
-              </a:ext>
-            </a:extLst>
-          </p:cNvPr>
-          <p:cNvSpPr/>
-          <p:nvPr/>
-        </p:nvSpPr>
-        <p:spPr>
-          <a:xfrm>
-            <a:off x="8261462" y="5570031"/>
-            <a:ext cx="1375746" cy="232689"/>
-          </a:xfrm>
-          <a:prstGeom prst="rect">
-            <a:avLst/>
-          </a:prstGeom>
-        </p:spPr>
-        <p:style>
-          <a:lnRef idx="2">
-            <a:schemeClr val="accent1">
-              <a:shade val="15000"/>
-            </a:schemeClr>
-          </a:lnRef>
-          <a:fillRef idx="1">
-            <a:schemeClr val="accent1"/>
-          </a:fillRef>
-          <a:effectRef idx="0">
-            <a:schemeClr val="accent1"/>
-          </a:effectRef>
-          <a:fontRef idx="minor">
-            <a:schemeClr val="lt1"/>
-          </a:fontRef>
-        </p:style>
-        <p:txBody>
-          <a:bodyPr rtlCol="0" anchor="ctr"/>
-          <a:lstStyle/>
-          <a:p>
-            <a:pPr algn="ctr"/>
-            <a:r>
-              <a:rPr lang="en-US" dirty="0"/>
-              <a:t>Sup model</a:t>
-            </a:r>
-          </a:p>
-        </p:txBody>
-      </p:sp>
-      <p:sp>
-        <p:nvSpPr>
-          <p:cNvPr id="28" name="Rectangle 27">
-            <a:extLst>
-              <a:ext uri="{FF2B5EF4-FFF2-40B4-BE49-F238E27FC236}">
-                <a16:creationId xmlns:a16="http://schemas.microsoft.com/office/drawing/2014/main" id="{F8630736-1870-4CC1-10B8-0CA1913C98A6}"/>
-              </a:ext>
-            </a:extLst>
-          </p:cNvPr>
-          <p:cNvSpPr/>
-          <p:nvPr/>
-        </p:nvSpPr>
-        <p:spPr>
-          <a:xfrm>
-            <a:off x="9109816" y="5826464"/>
-            <a:ext cx="2633703" cy="725441"/>
-          </a:xfrm>
-          <a:prstGeom prst="rect">
-            <a:avLst/>
-          </a:prstGeom>
-        </p:spPr>
-        <p:style>
-          <a:lnRef idx="2">
-            <a:schemeClr val="accent1">
-              <a:shade val="15000"/>
-            </a:schemeClr>
-          </a:lnRef>
-          <a:fillRef idx="1">
-            <a:schemeClr val="accent1"/>
-          </a:fillRef>
-          <a:effectRef idx="0">
-            <a:schemeClr val="accent1"/>
-          </a:effectRef>
-          <a:fontRef idx="minor">
-            <a:schemeClr val="lt1"/>
-          </a:fontRef>
-        </p:style>
-        <p:txBody>
-          <a:bodyPr rtlCol="0" anchor="ctr"/>
-          <a:lstStyle/>
-          <a:p>
-            <a:pPr algn="ctr"/>
-            <a:r>
-              <a:rPr lang="en-US" dirty="0"/>
-              <a:t>HP tuning, unless each hyperparameter is specified for tuning or not</a:t>
-            </a:r>
-          </a:p>
-        </p:txBody>
-      </p:sp>
-      <p:sp>
-        <p:nvSpPr>
-          <p:cNvPr id="29" name="Rectangle 28">
-            <a:extLst>
-              <a:ext uri="{FF2B5EF4-FFF2-40B4-BE49-F238E27FC236}">
-                <a16:creationId xmlns:a16="http://schemas.microsoft.com/office/drawing/2014/main" id="{E33ADB9C-548C-C920-BA28-439700124884}"/>
-              </a:ext>
-            </a:extLst>
-          </p:cNvPr>
-          <p:cNvSpPr/>
-          <p:nvPr/>
-        </p:nvSpPr>
-        <p:spPr>
-          <a:xfrm>
-            <a:off x="7660020" y="4706892"/>
-            <a:ext cx="4466462" cy="2151108"/>
-          </a:xfrm>
-          <a:prstGeom prst="rect">
-            <a:avLst/>
-          </a:prstGeom>
-          <a:noFill/>
-          <a:ln w="57150">
-            <a:solidFill>
-              <a:schemeClr val="accent4">
-                <a:lumMod val="75000"/>
-              </a:schemeClr>
-            </a:solidFill>
-          </a:ln>
-        </p:spPr>
-        <p:style>
-          <a:lnRef idx="2">
-            <a:schemeClr val="accent1">
-              <a:shade val="15000"/>
-            </a:schemeClr>
-          </a:lnRef>
-          <a:fillRef idx="1">
-            <a:schemeClr val="accent1"/>
-          </a:fillRef>
-          <a:effectRef idx="0">
-            <a:schemeClr val="accent1"/>
-          </a:effectRef>
-          <a:fontRef idx="minor">
-            <a:schemeClr val="lt1"/>
-          </a:fontRef>
-        </p:style>
-        <p:txBody>
-          <a:bodyPr rtlCol="0" anchor="ctr"/>
-          <a:lstStyle/>
-          <a:p>
-            <a:pPr algn="ctr"/>
-            <a:endParaRPr lang="en-US"/>
-          </a:p>
-        </p:txBody>
-      </p:sp>
-      <p:sp>
-        <p:nvSpPr>
-          <p:cNvPr id="30" name="Rectangle 29">
-            <a:extLst>
-              <a:ext uri="{FF2B5EF4-FFF2-40B4-BE49-F238E27FC236}">
-                <a16:creationId xmlns:a16="http://schemas.microsoft.com/office/drawing/2014/main" id="{F6AFBE9E-5FCF-80C8-5822-E7DBA78800F8}"/>
-              </a:ext>
-            </a:extLst>
-          </p:cNvPr>
-          <p:cNvSpPr/>
-          <p:nvPr/>
-        </p:nvSpPr>
-        <p:spPr>
-          <a:xfrm>
-            <a:off x="306554" y="1454582"/>
-            <a:ext cx="3601958" cy="5185500"/>
-          </a:xfrm>
-          <a:prstGeom prst="rect">
-            <a:avLst/>
-          </a:prstGeom>
-          <a:noFill/>
-          <a:ln w="57150">
-            <a:solidFill>
-              <a:schemeClr val="accent4">
-                <a:lumMod val="75000"/>
-              </a:schemeClr>
-            </a:solidFill>
-          </a:ln>
-        </p:spPr>
-        <p:style>
-          <a:lnRef idx="2">
-            <a:schemeClr val="accent1">
-              <a:shade val="15000"/>
-            </a:schemeClr>
-          </a:lnRef>
-          <a:fillRef idx="1">
-            <a:schemeClr val="accent1"/>
-          </a:fillRef>
-          <a:effectRef idx="0">
-            <a:schemeClr val="accent1"/>
-          </a:effectRef>
-          <a:fontRef idx="minor">
-            <a:schemeClr val="lt1"/>
-          </a:fontRef>
-        </p:style>
-        <p:txBody>
-          <a:bodyPr rtlCol="0" anchor="ctr"/>
-          <a:lstStyle/>
-          <a:p>
-            <a:pPr algn="ctr"/>
-            <a:endParaRPr lang="en-US"/>
-          </a:p>
-        </p:txBody>
-      </p:sp>
-      <p:sp>
-        <p:nvSpPr>
-          <p:cNvPr id="31" name="Rectangle 30">
-            <a:extLst>
-              <a:ext uri="{FF2B5EF4-FFF2-40B4-BE49-F238E27FC236}">
-                <a16:creationId xmlns:a16="http://schemas.microsoft.com/office/drawing/2014/main" id="{D6273DC1-853B-AD21-85EC-A534E422D9B7}"/>
-              </a:ext>
-            </a:extLst>
-          </p:cNvPr>
-          <p:cNvSpPr/>
-          <p:nvPr/>
-        </p:nvSpPr>
-        <p:spPr>
-          <a:xfrm>
-            <a:off x="3985827" y="1454582"/>
-            <a:ext cx="3601958" cy="5403418"/>
-          </a:xfrm>
-          <a:prstGeom prst="rect">
-            <a:avLst/>
-          </a:prstGeom>
-          <a:noFill/>
-          <a:ln w="57150">
-            <a:solidFill>
-              <a:schemeClr val="accent4">
-                <a:lumMod val="75000"/>
-              </a:schemeClr>
-            </a:solidFill>
-          </a:ln>
-        </p:spPr>
-        <p:style>
-          <a:lnRef idx="2">
-            <a:schemeClr val="accent1">
-              <a:shade val="15000"/>
-            </a:schemeClr>
-          </a:lnRef>
-          <a:fillRef idx="1">
-            <a:schemeClr val="accent1"/>
-          </a:fillRef>
-          <a:effectRef idx="0">
-            <a:schemeClr val="accent1"/>
-          </a:effectRef>
-          <a:fontRef idx="minor">
-            <a:schemeClr val="lt1"/>
-          </a:fontRef>
-        </p:style>
-        <p:txBody>
-          <a:bodyPr rtlCol="0" anchor="ctr"/>
-          <a:lstStyle/>
-          <a:p>
-            <a:pPr algn="ctr"/>
-            <a:endParaRPr lang="en-US"/>
-          </a:p>
-        </p:txBody>
-      </p:sp>
-      <p:sp>
-        <p:nvSpPr>
-          <p:cNvPr id="32" name="Rectangle 31">
-            <a:extLst>
-              <a:ext uri="{FF2B5EF4-FFF2-40B4-BE49-F238E27FC236}">
-                <a16:creationId xmlns:a16="http://schemas.microsoft.com/office/drawing/2014/main" id="{8BD06DB1-E112-6445-4764-C181D84C8B4B}"/>
-              </a:ext>
-            </a:extLst>
-          </p:cNvPr>
-          <p:cNvSpPr/>
-          <p:nvPr/>
-        </p:nvSpPr>
-        <p:spPr>
-          <a:xfrm>
-            <a:off x="7660020" y="217918"/>
-            <a:ext cx="4378867" cy="4396710"/>
-          </a:xfrm>
-          <a:prstGeom prst="rect">
-            <a:avLst/>
-          </a:prstGeom>
-          <a:noFill/>
-          <a:ln w="57150">
-            <a:solidFill>
-              <a:schemeClr val="accent4">
-                <a:lumMod val="75000"/>
-              </a:schemeClr>
-            </a:solidFill>
-          </a:ln>
-        </p:spPr>
-        <p:style>
-          <a:lnRef idx="2">
-            <a:schemeClr val="accent1">
-              <a:shade val="15000"/>
-            </a:schemeClr>
-          </a:lnRef>
-          <a:fillRef idx="1">
-            <a:schemeClr val="accent1"/>
-          </a:fillRef>
-          <a:effectRef idx="0">
-            <a:schemeClr val="accent1"/>
-          </a:effectRef>
-          <a:fontRef idx="minor">
-            <a:schemeClr val="lt1"/>
-          </a:fontRef>
-        </p:style>
-        <p:txBody>
-          <a:bodyPr rtlCol="0" anchor="ctr"/>
-          <a:lstStyle/>
-          <a:p>
-            <a:pPr algn="ctr"/>
-            <a:endParaRPr lang="en-US"/>
-          </a:p>
-        </p:txBody>
-      </p:sp>
-      <p:sp>
-        <p:nvSpPr>
-          <p:cNvPr id="34" name="Rectangle 33">
-            <a:extLst>
-              <a:ext uri="{FF2B5EF4-FFF2-40B4-BE49-F238E27FC236}">
-                <a16:creationId xmlns:a16="http://schemas.microsoft.com/office/drawing/2014/main" id="{D6527F2E-1C4F-BABF-4952-145E62A048F9}"/>
-              </a:ext>
-            </a:extLst>
-          </p:cNvPr>
-          <p:cNvSpPr/>
-          <p:nvPr/>
-        </p:nvSpPr>
-        <p:spPr>
-          <a:xfrm>
-            <a:off x="7913406" y="5273516"/>
-            <a:ext cx="3972040" cy="1366566"/>
-          </a:xfrm>
-          <a:prstGeom prst="rect">
-            <a:avLst/>
-          </a:prstGeom>
-          <a:noFill/>
-          <a:ln w="57150"/>
-        </p:spPr>
-        <p:style>
-          <a:lnRef idx="2">
-            <a:schemeClr val="accent1">
-              <a:shade val="15000"/>
-            </a:schemeClr>
-          </a:lnRef>
-          <a:fillRef idx="1">
-            <a:schemeClr val="accent1"/>
-          </a:fillRef>
-          <a:effectRef idx="0">
-            <a:schemeClr val="accent1"/>
-          </a:effectRef>
-          <a:fontRef idx="minor">
-            <a:schemeClr val="lt1"/>
-          </a:fontRef>
-        </p:style>
-        <p:txBody>
-          <a:bodyPr rtlCol="0" anchor="ctr"/>
-          <a:lstStyle/>
-          <a:p>
-            <a:pPr algn="ctr"/>
-            <a:endParaRPr lang="en-US"/>
-          </a:p>
-        </p:txBody>
-      </p:sp>
-      <p:sp>
-        <p:nvSpPr>
-          <p:cNvPr id="35" name="TextBox 34">
-            <a:extLst>
-              <a:ext uri="{FF2B5EF4-FFF2-40B4-BE49-F238E27FC236}">
-                <a16:creationId xmlns:a16="http://schemas.microsoft.com/office/drawing/2014/main" id="{2F891F01-92E7-FA08-019E-3594F1D19FB7}"/>
-              </a:ext>
-            </a:extLst>
-          </p:cNvPr>
-          <p:cNvSpPr txBox="1"/>
-          <p:nvPr/>
-        </p:nvSpPr>
-        <p:spPr>
-          <a:xfrm>
-            <a:off x="10162638" y="4890509"/>
-            <a:ext cx="1580882" cy="369332"/>
-          </a:xfrm>
-          <a:prstGeom prst="rect">
-            <a:avLst/>
-          </a:prstGeom>
-          <a:noFill/>
-        </p:spPr>
-        <p:txBody>
-          <a:bodyPr wrap="none" rtlCol="0">
-            <a:spAutoFit/>
-          </a:bodyPr>
-          <a:lstStyle/>
-          <a:p>
-            <a:r>
-              <a:rPr lang="en-US" dirty="0"/>
-              <a:t>Single function</a:t>
-            </a:r>
-          </a:p>
-        </p:txBody>
-      </p:sp>
-      <p:sp>
-        <p:nvSpPr>
-          <p:cNvPr id="36" name="Rounded Rectangle 35">
-            <a:extLst>
-              <a:ext uri="{FF2B5EF4-FFF2-40B4-BE49-F238E27FC236}">
-                <a16:creationId xmlns:a16="http://schemas.microsoft.com/office/drawing/2014/main" id="{FB9533D7-F54F-CF8D-9EEC-D1CDA7938CA5}"/>
-              </a:ext>
-            </a:extLst>
-          </p:cNvPr>
-          <p:cNvSpPr/>
-          <p:nvPr/>
-        </p:nvSpPr>
-        <p:spPr>
-          <a:xfrm>
-            <a:off x="7771219" y="870764"/>
-            <a:ext cx="1743342" cy="576008"/>
-          </a:xfrm>
-          <a:prstGeom prst="roundRect">
-            <a:avLst/>
-          </a:prstGeom>
-        </p:spPr>
-        <p:style>
-          <a:lnRef idx="1">
-            <a:schemeClr val="accent6"/>
-          </a:lnRef>
-          <a:fillRef idx="2">
-            <a:schemeClr val="accent6"/>
-          </a:fillRef>
-          <a:effectRef idx="1">
-            <a:schemeClr val="accent6"/>
-          </a:effectRef>
-          <a:fontRef idx="minor">
-            <a:schemeClr val="dk1"/>
-          </a:fontRef>
-        </p:style>
-        <p:txBody>
-          <a:bodyPr rtlCol="0" anchor="ctr"/>
-          <a:lstStyle/>
-          <a:p>
-            <a:pPr algn="ctr"/>
-            <a:r>
-              <a:rPr lang="en-US" dirty="0"/>
-              <a:t>Default values</a:t>
-            </a:r>
-          </a:p>
-        </p:txBody>
-      </p:sp>
-      <p:sp>
-        <p:nvSpPr>
-          <p:cNvPr id="37" name="TextBox 36">
-            <a:extLst>
-              <a:ext uri="{FF2B5EF4-FFF2-40B4-BE49-F238E27FC236}">
-                <a16:creationId xmlns:a16="http://schemas.microsoft.com/office/drawing/2014/main" id="{61BB4D89-F8C1-5487-8434-17B6D9623175}"/>
-              </a:ext>
-            </a:extLst>
-          </p:cNvPr>
-          <p:cNvSpPr txBox="1"/>
-          <p:nvPr/>
-        </p:nvSpPr>
-        <p:spPr>
-          <a:xfrm>
-            <a:off x="8409882" y="1627980"/>
-            <a:ext cx="417102" cy="369332"/>
-          </a:xfrm>
-          <a:prstGeom prst="rect">
-            <a:avLst/>
-          </a:prstGeom>
-          <a:noFill/>
-        </p:spPr>
-        <p:txBody>
-          <a:bodyPr wrap="none" rtlCol="0">
-            <a:spAutoFit/>
-          </a:bodyPr>
-          <a:lstStyle/>
-          <a:p>
-            <a:r>
-              <a:rPr lang="en-US" dirty="0"/>
-              <a:t>Or</a:t>
-            </a:r>
-          </a:p>
-        </p:txBody>
-      </p:sp>
-      <p:sp>
-        <p:nvSpPr>
-          <p:cNvPr id="38" name="TextBox 37">
-            <a:extLst>
-              <a:ext uri="{FF2B5EF4-FFF2-40B4-BE49-F238E27FC236}">
-                <a16:creationId xmlns:a16="http://schemas.microsoft.com/office/drawing/2014/main" id="{B5CC84AE-5D80-9D0B-B7D1-21538CCFA214}"/>
-              </a:ext>
-            </a:extLst>
-          </p:cNvPr>
-          <p:cNvSpPr txBox="1"/>
-          <p:nvPr/>
-        </p:nvSpPr>
-        <p:spPr>
-          <a:xfrm>
-            <a:off x="9703069" y="756003"/>
-            <a:ext cx="1682136" cy="1200329"/>
-          </a:xfrm>
-          <a:prstGeom prst="rect">
-            <a:avLst/>
-          </a:prstGeom>
-          <a:noFill/>
-        </p:spPr>
-        <p:txBody>
-          <a:bodyPr wrap="square" rtlCol="0">
-            <a:spAutoFit/>
-          </a:bodyPr>
-          <a:lstStyle/>
-          <a:p>
-            <a:r>
-              <a:rPr lang="en-US" dirty="0"/>
-              <a:t>Must calculate all default </a:t>
-            </a:r>
-            <a:r>
-              <a:rPr lang="en-US" dirty="0" err="1"/>
-              <a:t>hps</a:t>
-            </a:r>
-            <a:r>
-              <a:rPr lang="en-US" dirty="0"/>
-              <a:t> for the data for run model</a:t>
-            </a:r>
-          </a:p>
-        </p:txBody>
-      </p:sp>
-      <p:sp>
-        <p:nvSpPr>
-          <p:cNvPr id="40" name="Rectangle 39">
-            <a:extLst>
-              <a:ext uri="{FF2B5EF4-FFF2-40B4-BE49-F238E27FC236}">
-                <a16:creationId xmlns:a16="http://schemas.microsoft.com/office/drawing/2014/main" id="{72AC7B81-0D79-C580-682B-5ECA7B85315D}"/>
-              </a:ext>
-            </a:extLst>
-          </p:cNvPr>
-          <p:cNvSpPr/>
-          <p:nvPr/>
-        </p:nvSpPr>
-        <p:spPr>
-          <a:xfrm>
-            <a:off x="7955017" y="5303919"/>
-            <a:ext cx="2052108" cy="232689"/>
-          </a:xfrm>
-          <a:prstGeom prst="rect">
-            <a:avLst/>
-          </a:prstGeom>
-        </p:spPr>
-        <p:style>
-          <a:lnRef idx="2">
-            <a:schemeClr val="accent1">
-              <a:shade val="15000"/>
-            </a:schemeClr>
-          </a:lnRef>
-          <a:fillRef idx="1">
-            <a:schemeClr val="accent1"/>
-          </a:fillRef>
-          <a:effectRef idx="0">
-            <a:schemeClr val="accent1"/>
-          </a:effectRef>
-          <a:fontRef idx="minor">
-            <a:schemeClr val="lt1"/>
-          </a:fontRef>
-        </p:style>
-        <p:txBody>
-          <a:bodyPr rtlCol="0" anchor="ctr"/>
-          <a:lstStyle/>
-          <a:p>
-            <a:pPr algn="ctr"/>
-            <a:r>
-              <a:rPr lang="en-US" dirty="0"/>
-              <a:t>Supervised method</a:t>
-            </a:r>
-          </a:p>
-        </p:txBody>
-      </p:sp>
-      <p:cxnSp>
-        <p:nvCxnSpPr>
-          <p:cNvPr id="42" name="Straight Arrow Connector 41">
-            <a:extLst>
-              <a:ext uri="{FF2B5EF4-FFF2-40B4-BE49-F238E27FC236}">
-                <a16:creationId xmlns:a16="http://schemas.microsoft.com/office/drawing/2014/main" id="{18800586-BE1A-D69E-0FAB-AEBD1B4FA6D5}"/>
-              </a:ext>
-            </a:extLst>
-          </p:cNvPr>
-          <p:cNvCxnSpPr>
-            <a:cxnSpLocks/>
-          </p:cNvCxnSpPr>
-          <p:nvPr/>
-        </p:nvCxnSpPr>
-        <p:spPr>
-          <a:xfrm flipV="1">
-            <a:off x="4765012" y="5174870"/>
-            <a:ext cx="174457" cy="651594"/>
-          </a:xfrm>
-          <a:prstGeom prst="straightConnector1">
-            <a:avLst/>
-          </a:prstGeom>
-          <a:ln w="76200">
-            <a:solidFill>
-              <a:schemeClr val="tx1"/>
-            </a:solidFill>
-            <a:tailEnd type="triangle"/>
-          </a:ln>
-        </p:spPr>
-        <p:style>
-          <a:lnRef idx="1">
-            <a:schemeClr val="accent1"/>
-          </a:lnRef>
-          <a:fillRef idx="0">
-            <a:schemeClr val="accent1"/>
-          </a:fillRef>
-          <a:effectRef idx="0">
-            <a:schemeClr val="accent1"/>
-          </a:effectRef>
-          <a:fontRef idx="minor">
-            <a:schemeClr val="tx1"/>
-          </a:fontRef>
-        </p:style>
-      </p:cxnSp>
-      <p:sp>
-        <p:nvSpPr>
-          <p:cNvPr id="46" name="TextBox 45">
-            <a:extLst>
-              <a:ext uri="{FF2B5EF4-FFF2-40B4-BE49-F238E27FC236}">
-                <a16:creationId xmlns:a16="http://schemas.microsoft.com/office/drawing/2014/main" id="{053F7DFD-CEFE-BE7A-D86E-1DCAB21389CE}"/>
-              </a:ext>
-            </a:extLst>
-          </p:cNvPr>
-          <p:cNvSpPr txBox="1"/>
-          <p:nvPr/>
-        </p:nvSpPr>
-        <p:spPr>
-          <a:xfrm>
-            <a:off x="4058063" y="5834228"/>
-            <a:ext cx="3346877" cy="923330"/>
-          </a:xfrm>
-          <a:prstGeom prst="rect">
-            <a:avLst/>
-          </a:prstGeom>
-          <a:noFill/>
-        </p:spPr>
-        <p:txBody>
-          <a:bodyPr wrap="square" rtlCol="0">
-            <a:spAutoFit/>
-          </a:bodyPr>
-          <a:lstStyle/>
-          <a:p>
-            <a:r>
-              <a:rPr lang="en-US" dirty="0"/>
-              <a:t>This is always run when you don’t specify all the default tunings to *not* tune</a:t>
-            </a:r>
-          </a:p>
-        </p:txBody>
-      </p:sp>
-      <p:sp>
-        <p:nvSpPr>
-          <p:cNvPr id="47" name="TextBox 46">
-            <a:extLst>
-              <a:ext uri="{FF2B5EF4-FFF2-40B4-BE49-F238E27FC236}">
-                <a16:creationId xmlns:a16="http://schemas.microsoft.com/office/drawing/2014/main" id="{450AFB8B-A229-EEAC-5555-06075EA72E13}"/>
-              </a:ext>
-            </a:extLst>
-          </p:cNvPr>
-          <p:cNvSpPr txBox="1"/>
-          <p:nvPr/>
-        </p:nvSpPr>
-        <p:spPr>
-          <a:xfrm>
-            <a:off x="-48556" y="-18334"/>
-            <a:ext cx="3988079" cy="369332"/>
-          </a:xfrm>
-          <a:prstGeom prst="rect">
-            <a:avLst/>
-          </a:prstGeom>
-          <a:noFill/>
-        </p:spPr>
-        <p:txBody>
-          <a:bodyPr wrap="none" rtlCol="0">
-            <a:spAutoFit/>
-          </a:bodyPr>
-          <a:lstStyle/>
-          <a:p>
-            <a:r>
-              <a:rPr lang="en-US" dirty="0"/>
-              <a:t>** Eval not noted here, but applied after</a:t>
-            </a:r>
-          </a:p>
-        </p:txBody>
-      </p:sp>
-      <p:cxnSp>
-        <p:nvCxnSpPr>
-          <p:cNvPr id="48" name="Straight Arrow Connector 47">
-            <a:extLst>
-              <a:ext uri="{FF2B5EF4-FFF2-40B4-BE49-F238E27FC236}">
-                <a16:creationId xmlns:a16="http://schemas.microsoft.com/office/drawing/2014/main" id="{0B46EAA4-2911-2D15-DC14-10E6111CBA24}"/>
-              </a:ext>
-            </a:extLst>
-          </p:cNvPr>
-          <p:cNvCxnSpPr>
-            <a:cxnSpLocks/>
-          </p:cNvCxnSpPr>
-          <p:nvPr/>
-        </p:nvCxnSpPr>
-        <p:spPr>
-          <a:xfrm flipV="1">
-            <a:off x="7229742" y="6295893"/>
-            <a:ext cx="1880074" cy="823"/>
-          </a:xfrm>
-          <a:prstGeom prst="straightConnector1">
-            <a:avLst/>
-          </a:prstGeom>
-          <a:ln w="76200">
-            <a:solidFill>
-              <a:schemeClr val="tx1"/>
-            </a:solidFill>
-            <a:tailEnd type="triangle"/>
-          </a:ln>
-        </p:spPr>
-        <p:style>
-          <a:lnRef idx="1">
-            <a:schemeClr val="accent1"/>
-          </a:lnRef>
-          <a:fillRef idx="0">
-            <a:schemeClr val="accent1"/>
-          </a:fillRef>
-          <a:effectRef idx="0">
-            <a:schemeClr val="accent1"/>
-          </a:effectRef>
-          <a:fontRef idx="minor">
-            <a:schemeClr val="tx1"/>
-          </a:fontRef>
-        </p:style>
-      </p:cxnSp>
+              <a:t>Deployment</a:t>
+            </a:r>
+          </a:p>
+        </p:txBody>
+      </p:sp>
     </p:spTree>
     <p:extLst>
       <p:ext uri="{BB962C8B-B14F-4D97-AF65-F5344CB8AC3E}">
-        <p14:creationId xmlns:p14="http://schemas.microsoft.com/office/powerpoint/2010/main" val="2820453072"/>
+        <p14:creationId xmlns:p14="http://schemas.microsoft.com/office/powerpoint/2010/main" val="3571071518"/>
       </p:ext>
     </p:extLst>
   </p:cSld>
@@ -5354,7 +3748,7 @@
 </file>
 
 <file path=ppt/slides/slide5.xml><?xml version="1.0" encoding="utf-8"?>
-<p:sld xmlns:a="http://schemas.openxmlformats.org/drawingml/2006/main" xmlns:r="http://schemas.openxmlformats.org/officeDocument/2006/relationships" xmlns:p="http://schemas.openxmlformats.org/presentationml/2006/main" show="0">
+<p:sld xmlns:a="http://schemas.openxmlformats.org/drawingml/2006/main" xmlns:r="http://schemas.openxmlformats.org/officeDocument/2006/relationships" xmlns:p="http://schemas.openxmlformats.org/presentationml/2006/main">
   <p:cSld>
     <p:spTree>
       <p:nvGrpSpPr>
@@ -5372,146 +3766,109 @@
       </p:grpSpPr>
       <p:sp>
         <p:nvSpPr>
-          <p:cNvPr id="2" name="Title 1">
-            <a:extLst>
-              <a:ext uri="{FF2B5EF4-FFF2-40B4-BE49-F238E27FC236}">
-                <a16:creationId xmlns:a16="http://schemas.microsoft.com/office/drawing/2014/main" id="{306FEBE2-243B-20DD-353C-234A8B764AC2}"/>
-              </a:ext>
-            </a:extLst>
-          </p:cNvPr>
-          <p:cNvSpPr>
-            <a:spLocks noGrp="1"/>
-          </p:cNvSpPr>
-          <p:nvPr>
-            <p:ph type="title"/>
-          </p:nvPr>
-        </p:nvSpPr>
-        <p:spPr/>
-        <p:txBody>
-          <a:bodyPr/>
-          <a:lstStyle/>
-          <a:p>
-            <a:r>
-              <a:rPr lang="en-US" dirty="0"/>
-              <a:t>Requested structure</a:t>
-            </a:r>
-          </a:p>
-        </p:txBody>
-      </p:sp>
-      <p:sp>
-        <p:nvSpPr>
-          <p:cNvPr id="4" name="Rectangle 3">
-            <a:extLst>
-              <a:ext uri="{FF2B5EF4-FFF2-40B4-BE49-F238E27FC236}">
-                <a16:creationId xmlns:a16="http://schemas.microsoft.com/office/drawing/2014/main" id="{E6AE1316-80DC-7453-35F2-7F15ABFA6500}"/>
-              </a:ext>
-            </a:extLst>
-          </p:cNvPr>
-          <p:cNvSpPr/>
-          <p:nvPr/>
+          <p:cNvPr id="3" name="Content Placeholder 2">
+            <a:extLst>
+              <a:ext uri="{FF2B5EF4-FFF2-40B4-BE49-F238E27FC236}">
+                <a16:creationId xmlns:a16="http://schemas.microsoft.com/office/drawing/2014/main" id="{B1478E97-7E10-E576-F66E-B3D26543CA75}"/>
+              </a:ext>
+            </a:extLst>
+          </p:cNvPr>
+          <p:cNvSpPr>
+            <a:spLocks noGrp="1"/>
+          </p:cNvSpPr>
+          <p:nvPr>
+            <p:ph idx="1"/>
+          </p:nvPr>
         </p:nvSpPr>
         <p:spPr>
           <a:xfrm>
-            <a:off x="3599916" y="2841007"/>
-            <a:ext cx="1854437" cy="456102"/>
+            <a:off x="145991" y="133558"/>
+            <a:ext cx="4391826" cy="2985657"/>
           </a:xfrm>
-          <a:prstGeom prst="rect">
-            <a:avLst/>
-          </a:prstGeom>
         </p:spPr>
-        <p:style>
-          <a:lnRef idx="2">
-            <a:schemeClr val="accent1">
-              <a:shade val="15000"/>
-            </a:schemeClr>
-          </a:lnRef>
-          <a:fillRef idx="1">
-            <a:schemeClr val="accent1"/>
-          </a:fillRef>
-          <a:effectRef idx="0">
-            <a:schemeClr val="accent1"/>
-          </a:effectRef>
-          <a:fontRef idx="minor">
-            <a:schemeClr val="lt1"/>
-          </a:fontRef>
-        </p:style>
-        <p:txBody>
-          <a:bodyPr rtlCol="0" anchor="ctr"/>
-          <a:lstStyle/>
-          <a:p>
-            <a:pPr algn="ctr"/>
+        <p:txBody>
+          <a:bodyPr>
+            <a:normAutofit fontScale="77500" lnSpcReduction="20000"/>
+          </a:bodyPr>
+          <a:lstStyle/>
+          <a:p>
+            <a:pPr marL="0" indent="0">
+              <a:buNone/>
+            </a:pPr>
+            <a:r>
+              <a:rPr lang="en-US" sz="3400" dirty="0"/>
+              <a:t>Robustness</a:t>
+            </a:r>
+          </a:p>
+          <a:p>
             <a:r>
               <a:rPr lang="en-US" dirty="0"/>
-              <a:t>Fold evaluation</a:t>
-            </a:r>
-          </a:p>
-        </p:txBody>
-      </p:sp>
-      <p:sp>
-        <p:nvSpPr>
-          <p:cNvPr id="5" name="Rectangle 4">
-            <a:extLst>
-              <a:ext uri="{FF2B5EF4-FFF2-40B4-BE49-F238E27FC236}">
-                <a16:creationId xmlns:a16="http://schemas.microsoft.com/office/drawing/2014/main" id="{23B489CD-76CA-A77E-E098-B92006BDF637}"/>
-              </a:ext>
-            </a:extLst>
-          </p:cNvPr>
-          <p:cNvSpPr/>
+              <a:t>Run-throughs with no </a:t>
+            </a:r>
+            <a:r>
+              <a:rPr lang="en-US" dirty="0" err="1"/>
+              <a:t>fdata</a:t>
+            </a:r>
+            <a:endParaRPr lang="en-US" dirty="0"/>
+          </a:p>
+          <a:p>
+            <a:r>
+              <a:rPr lang="en-US" dirty="0" err="1"/>
+              <a:t>Seqdata</a:t>
+            </a:r>
+            <a:r>
+              <a:rPr lang="en-US" dirty="0"/>
+              <a:t> run-through</a:t>
+            </a:r>
+          </a:p>
+          <a:p>
+            <a:r>
+              <a:rPr lang="en-US" dirty="0"/>
+              <a:t>All models run-through</a:t>
+            </a:r>
+          </a:p>
+          <a:p>
+            <a:r>
+              <a:rPr lang="en-US" dirty="0"/>
+              <a:t>More data run-through</a:t>
+            </a:r>
+          </a:p>
+          <a:p>
+            <a:r>
+              <a:rPr lang="en-US" dirty="0"/>
+              <a:t>Generalize for regression response</a:t>
+            </a:r>
+          </a:p>
+          <a:p>
+            <a:r>
+              <a:rPr lang="en-US" dirty="0">
+                <a:effectLst/>
+                <a:latin typeface=".AppleSystemUIFontMonospaced"/>
+              </a:rPr>
+              <a:t>Handle conversion of 100% of molecules to 0 and 1</a:t>
+            </a:r>
+          </a:p>
+          <a:p>
+            <a:endParaRPr lang="en-US" dirty="0"/>
+          </a:p>
+        </p:txBody>
+      </p:sp>
+      <p:sp>
+        <p:nvSpPr>
+          <p:cNvPr id="5" name="TextBox 4">
+            <a:extLst>
+              <a:ext uri="{FF2B5EF4-FFF2-40B4-BE49-F238E27FC236}">
+                <a16:creationId xmlns:a16="http://schemas.microsoft.com/office/drawing/2014/main" id="{73521B96-0D31-D465-6F9D-BF1ABA566B27}"/>
+              </a:ext>
+            </a:extLst>
+          </p:cNvPr>
+          <p:cNvSpPr txBox="1"/>
           <p:nvPr/>
         </p:nvSpPr>
         <p:spPr>
           <a:xfrm>
-            <a:off x="3893321" y="3385816"/>
-            <a:ext cx="1854437" cy="456102"/>
-          </a:xfrm>
-          <a:prstGeom prst="rect">
-            <a:avLst/>
-          </a:prstGeom>
-        </p:spPr>
-        <p:style>
-          <a:lnRef idx="2">
-            <a:schemeClr val="accent1">
-              <a:shade val="15000"/>
-            </a:schemeClr>
-          </a:lnRef>
-          <a:fillRef idx="1">
-            <a:schemeClr val="accent1"/>
-          </a:fillRef>
-          <a:effectRef idx="0">
-            <a:schemeClr val="accent1"/>
-          </a:effectRef>
-          <a:fontRef idx="minor">
-            <a:schemeClr val="lt1"/>
-          </a:fontRef>
-        </p:style>
-        <p:txBody>
-          <a:bodyPr rtlCol="0" anchor="ctr"/>
-          <a:lstStyle/>
-          <a:p>
-            <a:pPr algn="ctr"/>
-            <a:r>
-              <a:rPr lang="en-US" dirty="0"/>
-              <a:t>Model function isolated</a:t>
-            </a:r>
-          </a:p>
-        </p:txBody>
-      </p:sp>
-      <p:sp>
-        <p:nvSpPr>
-          <p:cNvPr id="7" name="TextBox 6">
-            <a:extLst>
-              <a:ext uri="{FF2B5EF4-FFF2-40B4-BE49-F238E27FC236}">
-                <a16:creationId xmlns:a16="http://schemas.microsoft.com/office/drawing/2014/main" id="{C67CC0BD-6009-FA68-E8B6-F35708CC0504}"/>
-              </a:ext>
-            </a:extLst>
-          </p:cNvPr>
-          <p:cNvSpPr txBox="1"/>
-          <p:nvPr/>
-        </p:nvSpPr>
-        <p:spPr>
-          <a:xfrm>
-            <a:off x="3477736" y="1527938"/>
-            <a:ext cx="3539148" cy="923330"/>
+            <a:off x="145991" y="3126081"/>
+            <a:ext cx="5707941" cy="3908762"/>
           </a:xfrm>
           <a:prstGeom prst="rect">
             <a:avLst/>
@@ -5519,30 +3876,157 @@
           <a:noFill/>
         </p:spPr>
         <p:txBody>
-          <a:bodyPr wrap="square" rtlCol="0">
+          <a:bodyPr wrap="square">
             <a:spAutoFit/>
           </a:bodyPr>
           <a:lstStyle/>
           <a:p>
             <a:r>
               <a:rPr lang="en-US" dirty="0"/>
-              <a:t>User selects training/testing/validation structure</a:t>
-            </a:r>
-          </a:p>
-          <a:p>
-            <a:r>
-              <a:rPr lang="en-US" dirty="0"/>
-              <a:t>Can run fold evaluation</a:t>
-            </a:r>
-          </a:p>
-        </p:txBody>
-      </p:sp>
-      <p:sp>
-        <p:nvSpPr>
-          <p:cNvPr id="8" name="TextBox 7">
-            <a:extLst>
-              <a:ext uri="{FF2B5EF4-FFF2-40B4-BE49-F238E27FC236}">
-                <a16:creationId xmlns:a16="http://schemas.microsoft.com/office/drawing/2014/main" id="{EC33526F-BE6D-3CAF-2B42-D364CC6EDE5B}"/>
+              <a:t>User friendly</a:t>
+            </a:r>
+          </a:p>
+          <a:p>
+            <a:pPr marL="285750" indent="-285750">
+              <a:buFont typeface="Arial" panose="020B0604020202020204" pitchFamily="34" charset="0"/>
+              <a:buChar char="•"/>
+            </a:pPr>
+            <a:r>
+              <a:rPr lang="en-US" sz="1600" dirty="0"/>
+              <a:t>Populate help button</a:t>
+            </a:r>
+          </a:p>
+          <a:p>
+            <a:pPr marL="285750" indent="-285750">
+              <a:buFont typeface="Arial" panose="020B0604020202020204" pitchFamily="34" charset="0"/>
+              <a:buChar char="•"/>
+            </a:pPr>
+            <a:r>
+              <a:rPr lang="en-US" sz="1600" dirty="0"/>
+              <a:t>Completion criteria so “Done” only appears when done by panel, tab</a:t>
+            </a:r>
+          </a:p>
+          <a:p>
+            <a:pPr marL="285750" indent="-285750">
+              <a:buFont typeface="Arial" panose="020B0604020202020204" pitchFamily="34" charset="0"/>
+              <a:buChar char="•"/>
+            </a:pPr>
+            <a:r>
+              <a:rPr lang="en-US" sz="1600" dirty="0">
+                <a:effectLst/>
+                <a:latin typeface=".AppleSystemUIFontMonospaced"/>
+              </a:rPr>
+              <a:t>Add trimming of sample names</a:t>
+            </a:r>
+          </a:p>
+          <a:p>
+            <a:pPr marL="285750" indent="-285750">
+              <a:buFont typeface="Arial" panose="020B0604020202020204" pitchFamily="34" charset="0"/>
+              <a:buChar char="•"/>
+            </a:pPr>
+            <a:r>
+              <a:rPr lang="en-US" sz="1600" dirty="0">
+                <a:effectLst/>
+                <a:latin typeface=".AppleSystemUIFontMonospaced"/>
+              </a:rPr>
+              <a:t>Update welcome page text/glossary</a:t>
+            </a:r>
+          </a:p>
+          <a:p>
+            <a:pPr marL="285750" indent="-285750">
+              <a:buFont typeface="Arial" panose="020B0604020202020204" pitchFamily="34" charset="0"/>
+              <a:buChar char="•"/>
+            </a:pPr>
+            <a:r>
+              <a:rPr lang="en-US" sz="1600" dirty="0">
+                <a:effectLst/>
+                <a:latin typeface=".AppleSystemUIFontMonospaced"/>
+              </a:rPr>
+              <a:t>Req norm eval before "add” as applicable</a:t>
+            </a:r>
+          </a:p>
+          <a:p>
+            <a:pPr marL="285750" indent="-285750">
+              <a:buFont typeface="Arial" panose="020B0604020202020204" pitchFamily="34" charset="0"/>
+              <a:buChar char="•"/>
+            </a:pPr>
+            <a:r>
+              <a:rPr lang="en-US" sz="1600" dirty="0">
+                <a:latin typeface=".AppleSystemUIFontMonospaced"/>
+              </a:rPr>
+              <a:t>Time estimates for model if long &lt;- backburner</a:t>
+            </a:r>
+          </a:p>
+          <a:p>
+            <a:pPr marL="285750" indent="-285750">
+              <a:buFont typeface="Arial" panose="020B0604020202020204" pitchFamily="34" charset="0"/>
+              <a:buChar char="•"/>
+            </a:pPr>
+            <a:r>
+              <a:rPr lang="en-US" sz="1600" dirty="0">
+                <a:latin typeface=".AppleSystemUIFontMonospaced"/>
+              </a:rPr>
+              <a:t>K-means plots – get more hover info, most contributing PCA biomolecules</a:t>
+            </a:r>
+          </a:p>
+          <a:p>
+            <a:pPr marL="285750" indent="-285750">
+              <a:buFont typeface="Arial" panose="020B0604020202020204" pitchFamily="34" charset="0"/>
+              <a:buChar char="•"/>
+            </a:pPr>
+            <a:r>
+              <a:rPr lang="en-US" sz="1600" dirty="0">
+                <a:latin typeface=".AppleSystemUIFontMonospaced"/>
+              </a:rPr>
+              <a:t>More tool tips</a:t>
+            </a:r>
+          </a:p>
+          <a:p>
+            <a:pPr marL="285750" indent="-285750">
+              <a:buFont typeface="Arial" panose="020B0604020202020204" pitchFamily="34" charset="0"/>
+              <a:buChar char="•"/>
+            </a:pPr>
+            <a:r>
+              <a:rPr lang="en-US" sz="1600" dirty="0">
+                <a:latin typeface=".AppleSystemUIFontMonospaced"/>
+              </a:rPr>
+              <a:t>Progress pages</a:t>
+            </a:r>
+          </a:p>
+          <a:p>
+            <a:pPr marL="285750" indent="-285750">
+              <a:buFont typeface="Arial" panose="020B0604020202020204" pitchFamily="34" charset="0"/>
+              <a:buChar char="•"/>
+            </a:pPr>
+            <a:r>
+              <a:rPr lang="en-US" sz="1600" dirty="0">
+                <a:latin typeface=".AppleSystemUIFontMonospaced"/>
+              </a:rPr>
+              <a:t>Require missingness handling where needed</a:t>
+            </a:r>
+          </a:p>
+          <a:p>
+            <a:pPr marL="285750" indent="-285750">
+              <a:buFont typeface="Arial" panose="020B0604020202020204" pitchFamily="34" charset="0"/>
+              <a:buChar char="•"/>
+            </a:pPr>
+            <a:endParaRPr lang="en-US" sz="2000" dirty="0"/>
+          </a:p>
+          <a:p>
+            <a:pPr marL="285750" indent="-285750">
+              <a:buFont typeface="Arial" panose="020B0604020202020204" pitchFamily="34" charset="0"/>
+              <a:buChar char="•"/>
+            </a:pPr>
+            <a:endParaRPr lang="en-US" dirty="0"/>
+          </a:p>
+        </p:txBody>
+      </p:sp>
+      <p:sp>
+        <p:nvSpPr>
+          <p:cNvPr id="6" name="TextBox 5">
+            <a:extLst>
+              <a:ext uri="{FF2B5EF4-FFF2-40B4-BE49-F238E27FC236}">
+                <a16:creationId xmlns:a16="http://schemas.microsoft.com/office/drawing/2014/main" id="{0613F9C7-11D5-416D-54B0-0ECF2E367F80}"/>
               </a:ext>
             </a:extLst>
           </p:cNvPr>
@@ -5551,8 +4035,8 @@
         </p:nvSpPr>
         <p:spPr>
           <a:xfrm>
-            <a:off x="452930" y="1518813"/>
-            <a:ext cx="2785926" cy="923330"/>
+            <a:off x="4412975" y="41336"/>
+            <a:ext cx="8183932" cy="3170099"/>
           </a:xfrm>
           <a:prstGeom prst="rect">
             <a:avLst/>
@@ -5566,169 +4050,162 @@
           <a:lstStyle/>
           <a:p>
             <a:r>
+              <a:rPr lang="en-US" sz="2000" dirty="0"/>
+              <a:t>Bug fixes</a:t>
+            </a:r>
+          </a:p>
+          <a:p>
+            <a:pPr marL="285750" indent="-285750">
+              <a:buFont typeface="Arial" panose="020B0604020202020204" pitchFamily="34" charset="0"/>
+              <a:buChar char="•"/>
+            </a:pPr>
+            <a:r>
+              <a:rPr lang="en-US" dirty="0">
+                <a:effectLst/>
+                <a:latin typeface=".AppleSystemUIFontMonospaced"/>
+              </a:rPr>
+              <a:t>Normalization – remove error options where all data is complete or other weirdness</a:t>
+            </a:r>
+          </a:p>
+          <a:p>
+            <a:pPr marL="285750" indent="-285750">
+              <a:buFont typeface="Arial" panose="020B0604020202020204" pitchFamily="34" charset="0"/>
+              <a:buChar char="•"/>
+            </a:pPr>
+            <a:r>
+              <a:rPr lang="en-US" dirty="0">
+                <a:latin typeface=".AppleSystemUIFontMonospaced"/>
+              </a:rPr>
+              <a:t>Skip variable specifications if no f-data or </a:t>
+            </a:r>
+            <a:r>
+              <a:rPr lang="en-US" dirty="0" err="1">
+                <a:latin typeface=".AppleSystemUIFontMonospaced"/>
+              </a:rPr>
+              <a:t>e_meta</a:t>
+            </a:r>
+            <a:r>
+              <a:rPr lang="en-US" dirty="0">
+                <a:latin typeface=".AppleSystemUIFontMonospaced"/>
+              </a:rPr>
+              <a:t>?</a:t>
+            </a:r>
+          </a:p>
+          <a:p>
+            <a:pPr marL="285750" indent="-285750">
+              <a:buFont typeface="Arial" panose="020B0604020202020204" pitchFamily="34" charset="0"/>
+              <a:buChar char="•"/>
+            </a:pPr>
+            <a:r>
+              <a:rPr lang="en-US" dirty="0">
+                <a:effectLst/>
+                <a:latin typeface=".AppleSystemUIFontMonospaced"/>
+              </a:rPr>
+              <a:t>Expert mentor table overflow</a:t>
+            </a:r>
+          </a:p>
+          <a:p>
+            <a:pPr marL="285750" indent="-285750">
+              <a:buFont typeface="Arial" panose="020B0604020202020204" pitchFamily="34" charset="0"/>
+              <a:buChar char="•"/>
+            </a:pPr>
+            <a:r>
+              <a:rPr lang="en-US" dirty="0" err="1">
+                <a:effectLst/>
+              </a:rPr>
+              <a:t>Hclust</a:t>
+            </a:r>
+            <a:r>
+              <a:rPr lang="en-US" dirty="0">
+                <a:effectLst/>
+              </a:rPr>
+              <a:t> line color</a:t>
+            </a:r>
+          </a:p>
+          <a:p>
+            <a:pPr marL="285750" indent="-285750">
+              <a:buFont typeface="Arial" panose="020B0604020202020204" pitchFamily="34" charset="0"/>
+              <a:buChar char="•"/>
+            </a:pPr>
+            <a:r>
               <a:rPr lang="en-US" dirty="0"/>
-              <a:t>User selects if they want robustness to new data and hyperparameter excitement</a:t>
-            </a:r>
-          </a:p>
-        </p:txBody>
-      </p:sp>
-      <p:sp>
-        <p:nvSpPr>
-          <p:cNvPr id="10" name="Rounded Rectangle 9">
-            <a:extLst>
-              <a:ext uri="{FF2B5EF4-FFF2-40B4-BE49-F238E27FC236}">
-                <a16:creationId xmlns:a16="http://schemas.microsoft.com/office/drawing/2014/main" id="{912EB8DB-ED2B-AC73-A4C7-69925FC2CB44}"/>
-              </a:ext>
-            </a:extLst>
-          </p:cNvPr>
-          <p:cNvSpPr/>
+              <a:t>Double check defaults for all model hp settings</a:t>
+            </a:r>
+          </a:p>
+          <a:p>
+            <a:pPr marL="285750" indent="-285750">
+              <a:buFont typeface="Arial" panose="020B0604020202020204" pitchFamily="34" charset="0"/>
+              <a:buChar char="•"/>
+            </a:pPr>
+            <a:r>
+              <a:rPr lang="en-US" b="1" dirty="0">
+                <a:effectLst/>
+                <a:latin typeface="+mj-lt"/>
+              </a:rPr>
+              <a:t>Make confirm selection on analysis goals hide/appear</a:t>
+            </a:r>
+            <a:br>
+              <a:rPr lang="en-US" b="1" dirty="0">
+                <a:effectLst/>
+                <a:latin typeface="+mj-lt"/>
+              </a:rPr>
+            </a:br>
+            <a:r>
+              <a:rPr lang="en-US" b="1" dirty="0">
+                <a:effectLst/>
+                <a:latin typeface="+mj-lt"/>
+              </a:rPr>
+              <a:t>Make sure bundle and download downloads correctly</a:t>
+            </a:r>
+            <a:endParaRPr lang="en-US" dirty="0">
+              <a:effectLst/>
+              <a:latin typeface="+mj-lt"/>
+            </a:endParaRPr>
+          </a:p>
+          <a:p>
+            <a:pPr marL="285750" indent="-285750">
+              <a:buFont typeface="Arial" panose="020B0604020202020204" pitchFamily="34" charset="0"/>
+              <a:buChar char="•"/>
+            </a:pPr>
+            <a:r>
+              <a:rPr lang="en-US" b="1" dirty="0">
+                <a:effectLst/>
+                <a:latin typeface="+mj-lt"/>
+              </a:rPr>
+              <a:t>Reorder the rows in download tables</a:t>
+            </a:r>
+            <a:endParaRPr lang="en-US" dirty="0">
+              <a:effectLst/>
+              <a:latin typeface="+mj-lt"/>
+            </a:endParaRPr>
+          </a:p>
+          <a:p>
+            <a:pPr marL="285750" indent="-285750">
+              <a:buFont typeface="Arial" panose="020B0604020202020204" pitchFamily="34" charset="0"/>
+              <a:buChar char="•"/>
+            </a:pPr>
+            <a:endParaRPr lang="en-US" dirty="0">
+              <a:effectLst/>
+            </a:endParaRPr>
+          </a:p>
+        </p:txBody>
+      </p:sp>
+      <p:sp>
+        <p:nvSpPr>
+          <p:cNvPr id="7" name="TextBox 6">
+            <a:extLst>
+              <a:ext uri="{FF2B5EF4-FFF2-40B4-BE49-F238E27FC236}">
+                <a16:creationId xmlns:a16="http://schemas.microsoft.com/office/drawing/2014/main" id="{B3CC0DBC-2AC2-5B31-ED7E-DBDE8EF3E1D8}"/>
+              </a:ext>
+            </a:extLst>
+          </p:cNvPr>
+          <p:cNvSpPr txBox="1"/>
           <p:nvPr/>
         </p:nvSpPr>
         <p:spPr>
           <a:xfrm>
-            <a:off x="615297" y="2610633"/>
-            <a:ext cx="1743342" cy="576008"/>
-          </a:xfrm>
-          <a:prstGeom prst="roundRect">
-            <a:avLst/>
-          </a:prstGeom>
-        </p:spPr>
-        <p:style>
-          <a:lnRef idx="1">
-            <a:schemeClr val="accent6"/>
-          </a:lnRef>
-          <a:fillRef idx="2">
-            <a:schemeClr val="accent6"/>
-          </a:fillRef>
-          <a:effectRef idx="1">
-            <a:schemeClr val="accent6"/>
-          </a:effectRef>
-          <a:fontRef idx="minor">
-            <a:schemeClr val="dk1"/>
-          </a:fontRef>
-        </p:style>
-        <p:txBody>
-          <a:bodyPr rtlCol="0" anchor="ctr"/>
-          <a:lstStyle/>
-          <a:p>
-            <a:pPr algn="ctr"/>
-            <a:r>
-              <a:rPr lang="en-US" dirty="0"/>
-              <a:t>HP tuning</a:t>
-            </a:r>
-          </a:p>
-        </p:txBody>
-      </p:sp>
-      <p:sp>
-        <p:nvSpPr>
-          <p:cNvPr id="11" name="Rounded Rectangle 10">
-            <a:extLst>
-              <a:ext uri="{FF2B5EF4-FFF2-40B4-BE49-F238E27FC236}">
-                <a16:creationId xmlns:a16="http://schemas.microsoft.com/office/drawing/2014/main" id="{77D90A80-E1FB-C68D-C70F-D8365C9EE8FA}"/>
-              </a:ext>
-            </a:extLst>
-          </p:cNvPr>
-          <p:cNvSpPr/>
-          <p:nvPr/>
-        </p:nvSpPr>
-        <p:spPr>
-          <a:xfrm>
-            <a:off x="615297" y="4038620"/>
-            <a:ext cx="1743342" cy="576008"/>
-          </a:xfrm>
-          <a:prstGeom prst="roundRect">
-            <a:avLst/>
-          </a:prstGeom>
-        </p:spPr>
-        <p:style>
-          <a:lnRef idx="1">
-            <a:schemeClr val="accent6"/>
-          </a:lnRef>
-          <a:fillRef idx="2">
-            <a:schemeClr val="accent6"/>
-          </a:fillRef>
-          <a:effectRef idx="1">
-            <a:schemeClr val="accent6"/>
-          </a:effectRef>
-          <a:fontRef idx="minor">
-            <a:schemeClr val="dk1"/>
-          </a:fontRef>
-        </p:style>
-        <p:txBody>
-          <a:bodyPr rtlCol="0" anchor="ctr"/>
-          <a:lstStyle/>
-          <a:p>
-            <a:pPr algn="ctr"/>
-            <a:r>
-              <a:rPr lang="en-US" dirty="0"/>
-              <a:t>Default values</a:t>
-            </a:r>
-          </a:p>
-        </p:txBody>
-      </p:sp>
-      <p:sp>
-        <p:nvSpPr>
-          <p:cNvPr id="12" name="Rounded Rectangle 11">
-            <a:extLst>
-              <a:ext uri="{FF2B5EF4-FFF2-40B4-BE49-F238E27FC236}">
-                <a16:creationId xmlns:a16="http://schemas.microsoft.com/office/drawing/2014/main" id="{D677B87E-CAC4-FDBB-A6F1-6E4D841A1F8C}"/>
-              </a:ext>
-            </a:extLst>
-          </p:cNvPr>
-          <p:cNvSpPr/>
-          <p:nvPr/>
-        </p:nvSpPr>
-        <p:spPr>
-          <a:xfrm>
-            <a:off x="615297" y="5373608"/>
-            <a:ext cx="1743342" cy="576008"/>
-          </a:xfrm>
-          <a:prstGeom prst="roundRect">
-            <a:avLst/>
-          </a:prstGeom>
-        </p:spPr>
-        <p:style>
-          <a:lnRef idx="1">
-            <a:schemeClr val="accent6"/>
-          </a:lnRef>
-          <a:fillRef idx="2">
-            <a:schemeClr val="accent6"/>
-          </a:fillRef>
-          <a:effectRef idx="1">
-            <a:schemeClr val="accent6"/>
-          </a:effectRef>
-          <a:fontRef idx="minor">
-            <a:schemeClr val="dk1"/>
-          </a:fontRef>
-        </p:style>
-        <p:txBody>
-          <a:bodyPr rtlCol="0" anchor="ctr"/>
-          <a:lstStyle/>
-          <a:p>
-            <a:pPr algn="ctr"/>
-            <a:r>
-              <a:rPr lang="en-US" dirty="0"/>
-              <a:t>Custom values</a:t>
-            </a:r>
-          </a:p>
-        </p:txBody>
-      </p:sp>
-      <p:sp>
-        <p:nvSpPr>
-          <p:cNvPr id="13" name="TextBox 12">
-            <a:extLst>
-              <a:ext uri="{FF2B5EF4-FFF2-40B4-BE49-F238E27FC236}">
-                <a16:creationId xmlns:a16="http://schemas.microsoft.com/office/drawing/2014/main" id="{CD70AC41-5B76-0D64-2684-F75B709D2EE7}"/>
-              </a:ext>
-            </a:extLst>
-          </p:cNvPr>
-          <p:cNvSpPr txBox="1"/>
-          <p:nvPr/>
-        </p:nvSpPr>
-        <p:spPr>
-          <a:xfrm>
-            <a:off x="1278417" y="3448131"/>
-            <a:ext cx="417102" cy="369332"/>
+            <a:off x="5941847" y="2857161"/>
+            <a:ext cx="5853931" cy="3724096"/>
           </a:xfrm>
           <a:prstGeom prst="rect">
             <a:avLst/>
@@ -5736,24 +4213,147 @@
           <a:noFill/>
         </p:spPr>
         <p:txBody>
-          <a:bodyPr wrap="none" rtlCol="0">
+          <a:bodyPr wrap="square" rtlCol="0">
             <a:spAutoFit/>
           </a:bodyPr>
           <a:lstStyle/>
           <a:p>
             <a:r>
+              <a:rPr lang="en-US" sz="2000" dirty="0"/>
+              <a:t>Feature additions</a:t>
+            </a:r>
+          </a:p>
+          <a:p>
+            <a:pPr marL="285750" indent="-285750">
+              <a:buFont typeface="Arial" panose="020B0604020202020204" pitchFamily="34" charset="0"/>
+              <a:buChar char="•"/>
+            </a:pPr>
+            <a:r>
               <a:rPr lang="en-US" dirty="0"/>
-              <a:t>Or</a:t>
-            </a:r>
-          </a:p>
-        </p:txBody>
-      </p:sp>
-      <p:sp>
-        <p:nvSpPr>
-          <p:cNvPr id="14" name="TextBox 13">
-            <a:extLst>
-              <a:ext uri="{FF2B5EF4-FFF2-40B4-BE49-F238E27FC236}">
-                <a16:creationId xmlns:a16="http://schemas.microsoft.com/office/drawing/2014/main" id="{B7E536C7-4A60-A5FB-4555-4AF0288DAF0D}"/>
+              <a:t>Peptide rollup</a:t>
+            </a:r>
+          </a:p>
+          <a:p>
+            <a:pPr marL="285750" indent="-285750">
+              <a:buFont typeface="Arial" panose="020B0604020202020204" pitchFamily="34" charset="0"/>
+              <a:buChar char="•"/>
+            </a:pPr>
+            <a:r>
+              <a:rPr lang="en-US" dirty="0"/>
+              <a:t>Recommendation function for </a:t>
+            </a:r>
+            <a:r>
+              <a:rPr lang="en-US" dirty="0" err="1"/>
+              <a:t>nclust</a:t>
+            </a:r>
+            <a:endParaRPr lang="en-US" dirty="0"/>
+          </a:p>
+          <a:p>
+            <a:pPr marL="742950" lvl="1" indent="-285750">
+              <a:buFont typeface="Arial" panose="020B0604020202020204" pitchFamily="34" charset="0"/>
+              <a:buChar char="•"/>
+            </a:pPr>
+            <a:r>
+              <a:rPr lang="en-US" dirty="0"/>
+              <a:t>Move samples/biomolecules to other tab?</a:t>
+            </a:r>
+          </a:p>
+          <a:p>
+            <a:pPr marL="285750" indent="-285750">
+              <a:buFont typeface="Arial" panose="020B0604020202020204" pitchFamily="34" charset="0"/>
+              <a:buChar char="•"/>
+            </a:pPr>
+            <a:r>
+              <a:rPr lang="en-US" dirty="0"/>
+              <a:t>Downloads</a:t>
+            </a:r>
+          </a:p>
+          <a:p>
+            <a:pPr marL="742950" lvl="1" indent="-285750">
+              <a:buFont typeface="Arial" panose="020B0604020202020204" pitchFamily="34" charset="0"/>
+              <a:buChar char="•"/>
+            </a:pPr>
+            <a:r>
+              <a:rPr lang="en-US" dirty="0"/>
+              <a:t>RVs with a level for models in case users </a:t>
+            </a:r>
+            <a:r>
+              <a:rPr lang="en-US" dirty="0" err="1"/>
+              <a:t>wanna</a:t>
+            </a:r>
+            <a:r>
+              <a:rPr lang="en-US" dirty="0"/>
+              <a:t> go back</a:t>
+            </a:r>
+          </a:p>
+          <a:p>
+            <a:pPr marL="1200150" lvl="2" indent="-285750">
+              <a:buFont typeface="Arial" panose="020B0604020202020204" pitchFamily="34" charset="0"/>
+              <a:buChar char="•"/>
+            </a:pPr>
+            <a:r>
+              <a:rPr lang="en-US" dirty="0"/>
+              <a:t>For advanced users, allow different models for different hp tunings</a:t>
+            </a:r>
+          </a:p>
+          <a:p>
+            <a:pPr marL="742950" lvl="1" indent="-285750">
+              <a:buFont typeface="Arial" panose="020B0604020202020204" pitchFamily="34" charset="0"/>
+              <a:buChar char="•"/>
+            </a:pPr>
+            <a:r>
+              <a:rPr lang="en-US" dirty="0"/>
+              <a:t>Cap the number of new models users can do</a:t>
+            </a:r>
+          </a:p>
+          <a:p>
+            <a:pPr marL="742950" lvl="1" indent="-285750">
+              <a:buFont typeface="Arial" panose="020B0604020202020204" pitchFamily="34" charset="0"/>
+              <a:buChar char="•"/>
+            </a:pPr>
+            <a:r>
+              <a:rPr lang="en-US" dirty="0"/>
+              <a:t>Or save and return to </a:t>
+            </a:r>
+            <a:r>
+              <a:rPr lang="en-US" dirty="0" err="1"/>
+              <a:t>expert_mentor</a:t>
+            </a:r>
+            <a:endParaRPr lang="en-US" dirty="0"/>
+          </a:p>
+          <a:p>
+            <a:pPr marL="285750" indent="-285750">
+              <a:buFont typeface="Arial" panose="020B0604020202020204" pitchFamily="34" charset="0"/>
+              <a:buChar char="•"/>
+            </a:pPr>
+            <a:r>
+              <a:rPr lang="en-US" dirty="0"/>
+              <a:t>New normalization – solidify in </a:t>
+            </a:r>
+            <a:r>
+              <a:rPr lang="en-US" dirty="0" err="1"/>
+              <a:t>pmartR</a:t>
+            </a:r>
+            <a:endParaRPr lang="en-US" dirty="0"/>
+          </a:p>
+          <a:p>
+            <a:pPr marL="285750" indent="-285750">
+              <a:buFont typeface="Arial" panose="020B0604020202020204" pitchFamily="34" charset="0"/>
+              <a:buChar char="•"/>
+            </a:pPr>
+            <a:r>
+              <a:rPr lang="en-US" dirty="0"/>
+              <a:t>Generalize for regression -- Dan</a:t>
+            </a:r>
+          </a:p>
+        </p:txBody>
+      </p:sp>
+      <p:sp>
+        <p:nvSpPr>
+          <p:cNvPr id="9" name="TextBox 8">
+            <a:extLst>
+              <a:ext uri="{FF2B5EF4-FFF2-40B4-BE49-F238E27FC236}">
+                <a16:creationId xmlns:a16="http://schemas.microsoft.com/office/drawing/2014/main" id="{7FC554C6-C8B6-EBE3-A74D-AB97DE2FA49E}"/>
               </a:ext>
             </a:extLst>
           </p:cNvPr>
@@ -5762,8 +4362,8 @@
         </p:nvSpPr>
         <p:spPr>
           <a:xfrm>
-            <a:off x="1278417" y="4835786"/>
-            <a:ext cx="417102" cy="369332"/>
+            <a:off x="10263499" y="2395496"/>
+            <a:ext cx="1532279" cy="923330"/>
           </a:xfrm>
           <a:prstGeom prst="rect">
             <a:avLst/>
@@ -5778,832 +4378,27 @@
           <a:p>
             <a:r>
               <a:rPr lang="en-US" dirty="0"/>
-              <a:t>Or</a:t>
-            </a:r>
-          </a:p>
-        </p:txBody>
-      </p:sp>
-      <p:sp>
-        <p:nvSpPr>
-          <p:cNvPr id="15" name="TextBox 14">
-            <a:extLst>
-              <a:ext uri="{FF2B5EF4-FFF2-40B4-BE49-F238E27FC236}">
-                <a16:creationId xmlns:a16="http://schemas.microsoft.com/office/drawing/2014/main" id="{ABA00D94-1920-1A94-026E-2858230D953A}"/>
-              </a:ext>
-            </a:extLst>
-          </p:cNvPr>
-          <p:cNvSpPr txBox="1"/>
-          <p:nvPr/>
-        </p:nvSpPr>
-        <p:spPr>
-          <a:xfrm>
-            <a:off x="7333848" y="816592"/>
-            <a:ext cx="2317633" cy="646331"/>
-          </a:xfrm>
-          <a:prstGeom prst="rect">
-            <a:avLst/>
-          </a:prstGeom>
-          <a:noFill/>
-        </p:spPr>
-        <p:txBody>
-          <a:bodyPr wrap="square" rtlCol="0">
-            <a:spAutoFit/>
-          </a:bodyPr>
-          <a:lstStyle/>
-          <a:p>
+              <a:t>Deployment</a:t>
+            </a:r>
+          </a:p>
+          <a:p>
+            <a:pPr marL="285750" indent="-285750">
+              <a:buFont typeface="Arial" panose="020B0604020202020204" pitchFamily="34" charset="0"/>
+              <a:buChar char="•"/>
+            </a:pPr>
             <a:r>
               <a:rPr lang="en-US" dirty="0"/>
-              <a:t>If not using default </a:t>
-            </a:r>
-          </a:p>
-          <a:p>
+              <a:t>Docker</a:t>
+            </a:r>
+          </a:p>
+          <a:p>
+            <a:pPr marL="285750" indent="-285750">
+              <a:buFont typeface="Arial" panose="020B0604020202020204" pitchFamily="34" charset="0"/>
+              <a:buChar char="•"/>
+            </a:pPr>
             <a:r>
               <a:rPr lang="en-US" dirty="0"/>
-              <a:t>values, user picks </a:t>
-            </a:r>
-            <a:r>
-              <a:rPr lang="en-US" dirty="0" err="1"/>
-              <a:t>Hps</a:t>
-            </a:r>
-            <a:r>
-              <a:rPr lang="en-US" dirty="0"/>
-              <a:t> </a:t>
-            </a:r>
-          </a:p>
-        </p:txBody>
-      </p:sp>
-      <p:sp>
-        <p:nvSpPr>
-          <p:cNvPr id="20" name="Rectangle 19">
-            <a:extLst>
-              <a:ext uri="{FF2B5EF4-FFF2-40B4-BE49-F238E27FC236}">
-                <a16:creationId xmlns:a16="http://schemas.microsoft.com/office/drawing/2014/main" id="{1260562E-F64F-EDB4-4220-3175805DB7DE}"/>
-              </a:ext>
-            </a:extLst>
-          </p:cNvPr>
-          <p:cNvSpPr/>
-          <p:nvPr/>
-        </p:nvSpPr>
-        <p:spPr>
-          <a:xfrm>
-            <a:off x="3514457" y="2743819"/>
-            <a:ext cx="3367043" cy="1201237"/>
-          </a:xfrm>
-          <a:prstGeom prst="rect">
-            <a:avLst/>
-          </a:prstGeom>
-          <a:noFill/>
-          <a:ln w="57150"/>
-        </p:spPr>
-        <p:style>
-          <a:lnRef idx="2">
-            <a:schemeClr val="accent1">
-              <a:shade val="15000"/>
-            </a:schemeClr>
-          </a:lnRef>
-          <a:fillRef idx="1">
-            <a:schemeClr val="accent1"/>
-          </a:fillRef>
-          <a:effectRef idx="0">
-            <a:schemeClr val="accent1"/>
-          </a:effectRef>
-          <a:fontRef idx="minor">
-            <a:schemeClr val="lt1"/>
-          </a:fontRef>
-        </p:style>
-        <p:txBody>
-          <a:bodyPr rtlCol="0" anchor="ctr"/>
-          <a:lstStyle/>
-          <a:p>
-            <a:pPr algn="ctr"/>
-            <a:endParaRPr lang="en-US"/>
-          </a:p>
-        </p:txBody>
-      </p:sp>
-      <p:sp>
-        <p:nvSpPr>
-          <p:cNvPr id="22" name="Rounded Rectangle 21">
-            <a:extLst>
-              <a:ext uri="{FF2B5EF4-FFF2-40B4-BE49-F238E27FC236}">
-                <a16:creationId xmlns:a16="http://schemas.microsoft.com/office/drawing/2014/main" id="{3E561FF7-A8DA-9FE5-0B38-18C95600F300}"/>
-              </a:ext>
-            </a:extLst>
-          </p:cNvPr>
-          <p:cNvSpPr/>
-          <p:nvPr/>
-        </p:nvSpPr>
-        <p:spPr>
-          <a:xfrm>
-            <a:off x="7240546" y="2749008"/>
-            <a:ext cx="1743342" cy="576008"/>
-          </a:xfrm>
-          <a:prstGeom prst="roundRect">
-            <a:avLst/>
-          </a:prstGeom>
-        </p:spPr>
-        <p:style>
-          <a:lnRef idx="1">
-            <a:schemeClr val="accent6"/>
-          </a:lnRef>
-          <a:fillRef idx="2">
-            <a:schemeClr val="accent6"/>
-          </a:fillRef>
-          <a:effectRef idx="1">
-            <a:schemeClr val="accent6"/>
-          </a:effectRef>
-          <a:fontRef idx="minor">
-            <a:schemeClr val="dk1"/>
-          </a:fontRef>
-        </p:style>
-        <p:txBody>
-          <a:bodyPr rtlCol="0" anchor="ctr"/>
-          <a:lstStyle/>
-          <a:p>
-            <a:pPr algn="ctr"/>
-            <a:r>
-              <a:rPr lang="en-US" dirty="0"/>
-              <a:t>Custom values</a:t>
-            </a:r>
-          </a:p>
-        </p:txBody>
-      </p:sp>
-      <p:sp>
-        <p:nvSpPr>
-          <p:cNvPr id="23" name="TextBox 22">
-            <a:extLst>
-              <a:ext uri="{FF2B5EF4-FFF2-40B4-BE49-F238E27FC236}">
-                <a16:creationId xmlns:a16="http://schemas.microsoft.com/office/drawing/2014/main" id="{750A6D15-A797-65E3-B236-18B732DEDA9F}"/>
-              </a:ext>
-            </a:extLst>
-          </p:cNvPr>
-          <p:cNvSpPr txBox="1"/>
-          <p:nvPr/>
-        </p:nvSpPr>
-        <p:spPr>
-          <a:xfrm>
-            <a:off x="7903666" y="3478065"/>
-            <a:ext cx="417102" cy="369332"/>
-          </a:xfrm>
-          <a:prstGeom prst="rect">
-            <a:avLst/>
-          </a:prstGeom>
-          <a:noFill/>
-        </p:spPr>
-        <p:txBody>
-          <a:bodyPr wrap="none" rtlCol="0">
-            <a:spAutoFit/>
-          </a:bodyPr>
-          <a:lstStyle/>
-          <a:p>
-            <a:r>
-              <a:rPr lang="en-US" dirty="0"/>
-              <a:t>Or</a:t>
-            </a:r>
-          </a:p>
-        </p:txBody>
-      </p:sp>
-      <p:sp>
-        <p:nvSpPr>
-          <p:cNvPr id="24" name="Rounded Rectangle 23">
-            <a:extLst>
-              <a:ext uri="{FF2B5EF4-FFF2-40B4-BE49-F238E27FC236}">
-                <a16:creationId xmlns:a16="http://schemas.microsoft.com/office/drawing/2014/main" id="{59C17E15-C5F5-7111-81EF-74C0897614F2}"/>
-              </a:ext>
-            </a:extLst>
-          </p:cNvPr>
-          <p:cNvSpPr/>
-          <p:nvPr/>
-        </p:nvSpPr>
-        <p:spPr>
-          <a:xfrm>
-            <a:off x="7240546" y="3939661"/>
-            <a:ext cx="1743342" cy="981831"/>
-          </a:xfrm>
-          <a:prstGeom prst="roundRect">
-            <a:avLst/>
-          </a:prstGeom>
-        </p:spPr>
-        <p:style>
-          <a:lnRef idx="1">
-            <a:schemeClr val="accent6"/>
-          </a:lnRef>
-          <a:fillRef idx="2">
-            <a:schemeClr val="accent6"/>
-          </a:fillRef>
-          <a:effectRef idx="1">
-            <a:schemeClr val="accent6"/>
-          </a:effectRef>
-          <a:fontRef idx="minor">
-            <a:schemeClr val="dk1"/>
-          </a:fontRef>
-        </p:style>
-        <p:txBody>
-          <a:bodyPr rtlCol="0" anchor="ctr"/>
-          <a:lstStyle/>
-          <a:p>
-            <a:pPr algn="ctr"/>
-            <a:r>
-              <a:rPr lang="en-US" dirty="0"/>
-              <a:t>Which </a:t>
-            </a:r>
-            <a:r>
-              <a:rPr lang="en-US" dirty="0" err="1"/>
-              <a:t>hps</a:t>
-            </a:r>
-            <a:r>
-              <a:rPr lang="en-US" dirty="0"/>
-              <a:t> to tune</a:t>
-            </a:r>
-          </a:p>
-        </p:txBody>
-      </p:sp>
-      <p:sp>
-        <p:nvSpPr>
-          <p:cNvPr id="30" name="Rectangle 29">
-            <a:extLst>
-              <a:ext uri="{FF2B5EF4-FFF2-40B4-BE49-F238E27FC236}">
-                <a16:creationId xmlns:a16="http://schemas.microsoft.com/office/drawing/2014/main" id="{F6AFBE9E-5FCF-80C8-5822-E7DBA78800F8}"/>
-              </a:ext>
-            </a:extLst>
-          </p:cNvPr>
-          <p:cNvSpPr/>
-          <p:nvPr/>
-        </p:nvSpPr>
-        <p:spPr>
-          <a:xfrm>
-            <a:off x="306554" y="1454582"/>
-            <a:ext cx="2938931" cy="5185500"/>
-          </a:xfrm>
-          <a:prstGeom prst="rect">
-            <a:avLst/>
-          </a:prstGeom>
-          <a:noFill/>
-          <a:ln w="57150">
-            <a:solidFill>
-              <a:schemeClr val="accent4">
-                <a:lumMod val="75000"/>
-              </a:schemeClr>
-            </a:solidFill>
-          </a:ln>
-        </p:spPr>
-        <p:style>
-          <a:lnRef idx="2">
-            <a:schemeClr val="accent1">
-              <a:shade val="15000"/>
-            </a:schemeClr>
-          </a:lnRef>
-          <a:fillRef idx="1">
-            <a:schemeClr val="accent1"/>
-          </a:fillRef>
-          <a:effectRef idx="0">
-            <a:schemeClr val="accent1"/>
-          </a:effectRef>
-          <a:fontRef idx="minor">
-            <a:schemeClr val="lt1"/>
-          </a:fontRef>
-        </p:style>
-        <p:txBody>
-          <a:bodyPr rtlCol="0" anchor="ctr"/>
-          <a:lstStyle/>
-          <a:p>
-            <a:pPr algn="ctr"/>
-            <a:endParaRPr lang="en-US"/>
-          </a:p>
-        </p:txBody>
-      </p:sp>
-      <p:sp>
-        <p:nvSpPr>
-          <p:cNvPr id="31" name="Rectangle 30">
-            <a:extLst>
-              <a:ext uri="{FF2B5EF4-FFF2-40B4-BE49-F238E27FC236}">
-                <a16:creationId xmlns:a16="http://schemas.microsoft.com/office/drawing/2014/main" id="{D6273DC1-853B-AD21-85EC-A534E422D9B7}"/>
-              </a:ext>
-            </a:extLst>
-          </p:cNvPr>
-          <p:cNvSpPr/>
-          <p:nvPr/>
-        </p:nvSpPr>
-        <p:spPr>
-          <a:xfrm>
-            <a:off x="3405500" y="1454582"/>
-            <a:ext cx="3601958" cy="2724311"/>
-          </a:xfrm>
-          <a:prstGeom prst="rect">
-            <a:avLst/>
-          </a:prstGeom>
-          <a:noFill/>
-          <a:ln w="57150">
-            <a:solidFill>
-              <a:schemeClr val="accent4">
-                <a:lumMod val="75000"/>
-              </a:schemeClr>
-            </a:solidFill>
-          </a:ln>
-        </p:spPr>
-        <p:style>
-          <a:lnRef idx="2">
-            <a:schemeClr val="accent1">
-              <a:shade val="15000"/>
-            </a:schemeClr>
-          </a:lnRef>
-          <a:fillRef idx="1">
-            <a:schemeClr val="accent1"/>
-          </a:fillRef>
-          <a:effectRef idx="0">
-            <a:schemeClr val="accent1"/>
-          </a:effectRef>
-          <a:fontRef idx="minor">
-            <a:schemeClr val="lt1"/>
-          </a:fontRef>
-        </p:style>
-        <p:txBody>
-          <a:bodyPr rtlCol="0" anchor="ctr"/>
-          <a:lstStyle/>
-          <a:p>
-            <a:pPr algn="ctr"/>
-            <a:endParaRPr lang="en-US"/>
-          </a:p>
-        </p:txBody>
-      </p:sp>
-      <p:sp>
-        <p:nvSpPr>
-          <p:cNvPr id="32" name="Rectangle 31">
-            <a:extLst>
-              <a:ext uri="{FF2B5EF4-FFF2-40B4-BE49-F238E27FC236}">
-                <a16:creationId xmlns:a16="http://schemas.microsoft.com/office/drawing/2014/main" id="{8BD06DB1-E112-6445-4764-C181D84C8B4B}"/>
-              </a:ext>
-            </a:extLst>
-          </p:cNvPr>
-          <p:cNvSpPr/>
-          <p:nvPr/>
-        </p:nvSpPr>
-        <p:spPr>
-          <a:xfrm>
-            <a:off x="7153805" y="746485"/>
-            <a:ext cx="2415472" cy="4396710"/>
-          </a:xfrm>
-          <a:prstGeom prst="rect">
-            <a:avLst/>
-          </a:prstGeom>
-          <a:noFill/>
-          <a:ln w="57150">
-            <a:solidFill>
-              <a:schemeClr val="accent4">
-                <a:lumMod val="75000"/>
-              </a:schemeClr>
-            </a:solidFill>
-          </a:ln>
-        </p:spPr>
-        <p:style>
-          <a:lnRef idx="2">
-            <a:schemeClr val="accent1">
-              <a:shade val="15000"/>
-            </a:schemeClr>
-          </a:lnRef>
-          <a:fillRef idx="1">
-            <a:schemeClr val="accent1"/>
-          </a:fillRef>
-          <a:effectRef idx="0">
-            <a:schemeClr val="accent1"/>
-          </a:effectRef>
-          <a:fontRef idx="minor">
-            <a:schemeClr val="lt1"/>
-          </a:fontRef>
-        </p:style>
-        <p:txBody>
-          <a:bodyPr rtlCol="0" anchor="ctr"/>
-          <a:lstStyle/>
-          <a:p>
-            <a:pPr algn="ctr"/>
-            <a:endParaRPr lang="en-US"/>
-          </a:p>
-        </p:txBody>
-      </p:sp>
-      <p:sp>
-        <p:nvSpPr>
-          <p:cNvPr id="36" name="Rounded Rectangle 35">
-            <a:extLst>
-              <a:ext uri="{FF2B5EF4-FFF2-40B4-BE49-F238E27FC236}">
-                <a16:creationId xmlns:a16="http://schemas.microsoft.com/office/drawing/2014/main" id="{FB9533D7-F54F-CF8D-9EEC-D1CDA7938CA5}"/>
-              </a:ext>
-            </a:extLst>
-          </p:cNvPr>
-          <p:cNvSpPr/>
-          <p:nvPr/>
-        </p:nvSpPr>
-        <p:spPr>
-          <a:xfrm>
-            <a:off x="7265003" y="1399331"/>
-            <a:ext cx="1743342" cy="576008"/>
-          </a:xfrm>
-          <a:prstGeom prst="roundRect">
-            <a:avLst/>
-          </a:prstGeom>
-        </p:spPr>
-        <p:style>
-          <a:lnRef idx="1">
-            <a:schemeClr val="accent6"/>
-          </a:lnRef>
-          <a:fillRef idx="2">
-            <a:schemeClr val="accent6"/>
-          </a:fillRef>
-          <a:effectRef idx="1">
-            <a:schemeClr val="accent6"/>
-          </a:effectRef>
-          <a:fontRef idx="minor">
-            <a:schemeClr val="dk1"/>
-          </a:fontRef>
-        </p:style>
-        <p:txBody>
-          <a:bodyPr rtlCol="0" anchor="ctr"/>
-          <a:lstStyle/>
-          <a:p>
-            <a:pPr algn="ctr"/>
-            <a:r>
-              <a:rPr lang="en-US" dirty="0"/>
-              <a:t>Default values</a:t>
-            </a:r>
-          </a:p>
-        </p:txBody>
-      </p:sp>
-      <p:sp>
-        <p:nvSpPr>
-          <p:cNvPr id="37" name="TextBox 36">
-            <a:extLst>
-              <a:ext uri="{FF2B5EF4-FFF2-40B4-BE49-F238E27FC236}">
-                <a16:creationId xmlns:a16="http://schemas.microsoft.com/office/drawing/2014/main" id="{61BB4D89-F8C1-5487-8434-17B6D9623175}"/>
-              </a:ext>
-            </a:extLst>
-          </p:cNvPr>
-          <p:cNvSpPr txBox="1"/>
-          <p:nvPr/>
-        </p:nvSpPr>
-        <p:spPr>
-          <a:xfrm>
-            <a:off x="7903666" y="2156547"/>
-            <a:ext cx="417102" cy="369332"/>
-          </a:xfrm>
-          <a:prstGeom prst="rect">
-            <a:avLst/>
-          </a:prstGeom>
-          <a:noFill/>
-        </p:spPr>
-        <p:txBody>
-          <a:bodyPr wrap="none" rtlCol="0">
-            <a:spAutoFit/>
-          </a:bodyPr>
-          <a:lstStyle/>
-          <a:p>
-            <a:r>
-              <a:rPr lang="en-US" dirty="0"/>
-              <a:t>Or</a:t>
-            </a:r>
-          </a:p>
-        </p:txBody>
-      </p:sp>
-      <p:sp>
-        <p:nvSpPr>
-          <p:cNvPr id="18" name="Rectangle 17">
-            <a:extLst>
-              <a:ext uri="{FF2B5EF4-FFF2-40B4-BE49-F238E27FC236}">
-                <a16:creationId xmlns:a16="http://schemas.microsoft.com/office/drawing/2014/main" id="{7EFBA401-306C-7E41-2A27-643ED02C2BC3}"/>
-              </a:ext>
-            </a:extLst>
-          </p:cNvPr>
-          <p:cNvSpPr/>
-          <p:nvPr/>
-        </p:nvSpPr>
-        <p:spPr>
-          <a:xfrm>
-            <a:off x="10132014" y="2130928"/>
-            <a:ext cx="1637944" cy="629281"/>
-          </a:xfrm>
-          <a:prstGeom prst="rect">
-            <a:avLst/>
-          </a:prstGeom>
-        </p:spPr>
-        <p:style>
-          <a:lnRef idx="2">
-            <a:schemeClr val="accent1">
-              <a:shade val="15000"/>
-            </a:schemeClr>
-          </a:lnRef>
-          <a:fillRef idx="1">
-            <a:schemeClr val="accent1"/>
-          </a:fillRef>
-          <a:effectRef idx="0">
-            <a:schemeClr val="accent1"/>
-          </a:effectRef>
-          <a:fontRef idx="minor">
-            <a:schemeClr val="lt1"/>
-          </a:fontRef>
-        </p:style>
-        <p:txBody>
-          <a:bodyPr rtlCol="0" anchor="ctr"/>
-          <a:lstStyle/>
-          <a:p>
-            <a:pPr algn="ctr"/>
-            <a:r>
-              <a:rPr lang="en-US" dirty="0"/>
-              <a:t>Model function isolated</a:t>
-            </a:r>
-          </a:p>
-        </p:txBody>
-      </p:sp>
-      <p:sp>
-        <p:nvSpPr>
-          <p:cNvPr id="41" name="Rectangle 40">
-            <a:extLst>
-              <a:ext uri="{FF2B5EF4-FFF2-40B4-BE49-F238E27FC236}">
-                <a16:creationId xmlns:a16="http://schemas.microsoft.com/office/drawing/2014/main" id="{B2D22E1A-07ED-E1A8-9019-EC3E1187E961}"/>
-              </a:ext>
-            </a:extLst>
-          </p:cNvPr>
-          <p:cNvSpPr/>
-          <p:nvPr/>
-        </p:nvSpPr>
-        <p:spPr>
-          <a:xfrm>
-            <a:off x="10132014" y="2975479"/>
-            <a:ext cx="1637944" cy="1122313"/>
-          </a:xfrm>
-          <a:prstGeom prst="rect">
-            <a:avLst/>
-          </a:prstGeom>
-        </p:spPr>
-        <p:style>
-          <a:lnRef idx="2">
-            <a:schemeClr val="accent1">
-              <a:shade val="15000"/>
-            </a:schemeClr>
-          </a:lnRef>
-          <a:fillRef idx="1">
-            <a:schemeClr val="accent1"/>
-          </a:fillRef>
-          <a:effectRef idx="0">
-            <a:schemeClr val="accent1"/>
-          </a:effectRef>
-          <a:fontRef idx="minor">
-            <a:schemeClr val="lt1"/>
-          </a:fontRef>
-        </p:style>
-        <p:txBody>
-          <a:bodyPr rtlCol="0" anchor="ctr"/>
-          <a:lstStyle/>
-          <a:p>
-            <a:pPr algn="ctr"/>
-            <a:r>
-              <a:rPr lang="en-US" dirty="0"/>
-              <a:t>Tuning function isolated (if called)</a:t>
-            </a:r>
-          </a:p>
-        </p:txBody>
-      </p:sp>
-      <p:sp>
-        <p:nvSpPr>
-          <p:cNvPr id="42" name="Rectangle 41">
-            <a:extLst>
-              <a:ext uri="{FF2B5EF4-FFF2-40B4-BE49-F238E27FC236}">
-                <a16:creationId xmlns:a16="http://schemas.microsoft.com/office/drawing/2014/main" id="{133D60F5-3279-4510-8C8B-0B532710D257}"/>
-              </a:ext>
-            </a:extLst>
-          </p:cNvPr>
-          <p:cNvSpPr/>
-          <p:nvPr/>
-        </p:nvSpPr>
-        <p:spPr>
-          <a:xfrm>
-            <a:off x="9810571" y="746485"/>
-            <a:ext cx="2252791" cy="5893597"/>
-          </a:xfrm>
-          <a:prstGeom prst="rect">
-            <a:avLst/>
-          </a:prstGeom>
-          <a:noFill/>
-          <a:ln w="57150">
-            <a:solidFill>
-              <a:schemeClr val="accent4">
-                <a:lumMod val="75000"/>
-              </a:schemeClr>
-            </a:solidFill>
-          </a:ln>
-        </p:spPr>
-        <p:style>
-          <a:lnRef idx="2">
-            <a:schemeClr val="accent1">
-              <a:shade val="15000"/>
-            </a:schemeClr>
-          </a:lnRef>
-          <a:fillRef idx="1">
-            <a:schemeClr val="accent1"/>
-          </a:fillRef>
-          <a:effectRef idx="0">
-            <a:schemeClr val="accent1"/>
-          </a:effectRef>
-          <a:fontRef idx="minor">
-            <a:schemeClr val="lt1"/>
-          </a:fontRef>
-        </p:style>
-        <p:txBody>
-          <a:bodyPr rtlCol="0" anchor="ctr"/>
-          <a:lstStyle/>
-          <a:p>
-            <a:pPr algn="ctr"/>
-            <a:endParaRPr lang="en-US"/>
-          </a:p>
-        </p:txBody>
-      </p:sp>
-      <p:sp>
-        <p:nvSpPr>
-          <p:cNvPr id="43" name="TextBox 42">
-            <a:extLst>
-              <a:ext uri="{FF2B5EF4-FFF2-40B4-BE49-F238E27FC236}">
-                <a16:creationId xmlns:a16="http://schemas.microsoft.com/office/drawing/2014/main" id="{B18F7F97-F7D2-2E55-97EB-473FB5DD2EEB}"/>
-              </a:ext>
-            </a:extLst>
-          </p:cNvPr>
-          <p:cNvSpPr txBox="1"/>
-          <p:nvPr/>
-        </p:nvSpPr>
-        <p:spPr>
-          <a:xfrm>
-            <a:off x="9831524" y="884709"/>
-            <a:ext cx="1202573" cy="369332"/>
-          </a:xfrm>
-          <a:prstGeom prst="rect">
-            <a:avLst/>
-          </a:prstGeom>
-          <a:noFill/>
-        </p:spPr>
-        <p:txBody>
-          <a:bodyPr wrap="none" rtlCol="0">
-            <a:spAutoFit/>
-          </a:bodyPr>
-          <a:lstStyle/>
-          <a:p>
-            <a:r>
-              <a:rPr lang="en-US" dirty="0"/>
-              <a:t>Run model</a:t>
-            </a:r>
-          </a:p>
-        </p:txBody>
-      </p:sp>
-      <p:sp>
-        <p:nvSpPr>
-          <p:cNvPr id="44" name="TextBox 43">
-            <a:extLst>
-              <a:ext uri="{FF2B5EF4-FFF2-40B4-BE49-F238E27FC236}">
-                <a16:creationId xmlns:a16="http://schemas.microsoft.com/office/drawing/2014/main" id="{60DB0BF2-6783-D76F-C181-BB433DEB555E}"/>
-              </a:ext>
-            </a:extLst>
-          </p:cNvPr>
-          <p:cNvSpPr txBox="1"/>
-          <p:nvPr/>
-        </p:nvSpPr>
-        <p:spPr>
-          <a:xfrm>
-            <a:off x="3486779" y="5553480"/>
-            <a:ext cx="5850641" cy="646331"/>
-          </a:xfrm>
-          <a:prstGeom prst="rect">
-            <a:avLst/>
-          </a:prstGeom>
-          <a:noFill/>
-        </p:spPr>
-        <p:txBody>
-          <a:bodyPr wrap="none" rtlCol="0">
-            <a:spAutoFit/>
-          </a:bodyPr>
-          <a:lstStyle/>
-          <a:p>
-            <a:r>
-              <a:rPr lang="en-US" dirty="0"/>
-              <a:t>HP specification only needed where custom values are used;</a:t>
-            </a:r>
-          </a:p>
-          <a:p>
-            <a:r>
-              <a:rPr lang="en-US" dirty="0"/>
-              <a:t>No default calculations required</a:t>
-            </a:r>
-          </a:p>
-        </p:txBody>
-      </p:sp>
-      <p:sp>
-        <p:nvSpPr>
-          <p:cNvPr id="45" name="TextBox 44">
-            <a:extLst>
-              <a:ext uri="{FF2B5EF4-FFF2-40B4-BE49-F238E27FC236}">
-                <a16:creationId xmlns:a16="http://schemas.microsoft.com/office/drawing/2014/main" id="{BFD69B36-51A4-A4B4-714E-5FB057AC613C}"/>
-              </a:ext>
-            </a:extLst>
-          </p:cNvPr>
-          <p:cNvSpPr txBox="1"/>
-          <p:nvPr/>
-        </p:nvSpPr>
-        <p:spPr>
-          <a:xfrm>
-            <a:off x="3555045" y="4160226"/>
-            <a:ext cx="2299284" cy="369332"/>
-          </a:xfrm>
-          <a:prstGeom prst="rect">
-            <a:avLst/>
-          </a:prstGeom>
-          <a:noFill/>
-        </p:spPr>
-        <p:txBody>
-          <a:bodyPr wrap="none" rtlCol="0">
-            <a:spAutoFit/>
-          </a:bodyPr>
-          <a:lstStyle/>
-          <a:p>
-            <a:r>
-              <a:rPr lang="en-US" dirty="0"/>
-              <a:t>Defaults are used here</a:t>
-            </a:r>
-          </a:p>
-        </p:txBody>
-      </p:sp>
-      <p:sp>
-        <p:nvSpPr>
-          <p:cNvPr id="46" name="Rectangle 45">
-            <a:extLst>
-              <a:ext uri="{FF2B5EF4-FFF2-40B4-BE49-F238E27FC236}">
-                <a16:creationId xmlns:a16="http://schemas.microsoft.com/office/drawing/2014/main" id="{55238086-B883-2B66-F66F-105CEA267876}"/>
-              </a:ext>
-            </a:extLst>
-          </p:cNvPr>
-          <p:cNvSpPr/>
-          <p:nvPr/>
-        </p:nvSpPr>
-        <p:spPr>
-          <a:xfrm>
-            <a:off x="9889724" y="1518814"/>
-            <a:ext cx="1637944" cy="470790"/>
-          </a:xfrm>
-          <a:prstGeom prst="rect">
-            <a:avLst/>
-          </a:prstGeom>
-        </p:spPr>
-        <p:style>
-          <a:lnRef idx="2">
-            <a:schemeClr val="accent1">
-              <a:shade val="15000"/>
-            </a:schemeClr>
-          </a:lnRef>
-          <a:fillRef idx="1">
-            <a:schemeClr val="accent1"/>
-          </a:fillRef>
-          <a:effectRef idx="0">
-            <a:schemeClr val="accent1"/>
-          </a:effectRef>
-          <a:fontRef idx="minor">
-            <a:schemeClr val="lt1"/>
-          </a:fontRef>
-        </p:style>
-        <p:txBody>
-          <a:bodyPr rtlCol="0" anchor="ctr"/>
-          <a:lstStyle/>
-          <a:p>
-            <a:pPr algn="ctr"/>
-            <a:r>
-              <a:rPr lang="en-US" dirty="0"/>
-              <a:t>Supervised method</a:t>
-            </a:r>
-          </a:p>
-        </p:txBody>
-      </p:sp>
-      <p:sp>
-        <p:nvSpPr>
-          <p:cNvPr id="47" name="TextBox 46">
-            <a:extLst>
-              <a:ext uri="{FF2B5EF4-FFF2-40B4-BE49-F238E27FC236}">
-                <a16:creationId xmlns:a16="http://schemas.microsoft.com/office/drawing/2014/main" id="{12BEEC8E-3DE4-AF42-5583-06649BC16CFE}"/>
-              </a:ext>
-            </a:extLst>
-          </p:cNvPr>
-          <p:cNvSpPr txBox="1"/>
-          <p:nvPr/>
-        </p:nvSpPr>
-        <p:spPr>
-          <a:xfrm>
-            <a:off x="-48556" y="-18334"/>
-            <a:ext cx="3988079" cy="369332"/>
-          </a:xfrm>
-          <a:prstGeom prst="rect">
-            <a:avLst/>
-          </a:prstGeom>
-          <a:noFill/>
-        </p:spPr>
-        <p:txBody>
-          <a:bodyPr wrap="none" rtlCol="0">
-            <a:spAutoFit/>
-          </a:bodyPr>
-          <a:lstStyle/>
-          <a:p>
-            <a:r>
-              <a:rPr lang="en-US" dirty="0"/>
-              <a:t>** Eval not noted here, but applied after</a:t>
+              <a:t>Multiprobe</a:t>
             </a:r>
           </a:p>
         </p:txBody>
@@ -6611,7 +4406,7 @@
     </p:spTree>
     <p:extLst>
       <p:ext uri="{BB962C8B-B14F-4D97-AF65-F5344CB8AC3E}">
-        <p14:creationId xmlns:p14="http://schemas.microsoft.com/office/powerpoint/2010/main" val="1714935504"/>
+        <p14:creationId xmlns:p14="http://schemas.microsoft.com/office/powerpoint/2010/main" val="1746479879"/>
       </p:ext>
     </p:extLst>
   </p:cSld>
@@ -6643,7 +4438,7 @@
           <p:cNvPr id="2" name="Title 1">
             <a:extLst>
               <a:ext uri="{FF2B5EF4-FFF2-40B4-BE49-F238E27FC236}">
-                <a16:creationId xmlns:a16="http://schemas.microsoft.com/office/drawing/2014/main" id="{DEB97BBB-8EFB-7355-72AA-208D42E7BDCD}"/>
+                <a16:creationId xmlns:a16="http://schemas.microsoft.com/office/drawing/2014/main" id="{B9A4B4AA-F4E5-7B29-FF1C-950364C2E311}"/>
               </a:ext>
             </a:extLst>
           </p:cNvPr>
@@ -6659,69 +4454,77 @@
           <a:bodyPr/>
           <a:lstStyle/>
           <a:p>
+            <a:endParaRPr lang="en-US" dirty="0"/>
+          </a:p>
+        </p:txBody>
+      </p:sp>
+      <p:sp>
+        <p:nvSpPr>
+          <p:cNvPr id="3" name="Content Placeholder 2">
+            <a:extLst>
+              <a:ext uri="{FF2B5EF4-FFF2-40B4-BE49-F238E27FC236}">
+                <a16:creationId xmlns:a16="http://schemas.microsoft.com/office/drawing/2014/main" id="{26B0D00A-C133-EE49-7A0C-13DBF5627BDF}"/>
+              </a:ext>
+            </a:extLst>
+          </p:cNvPr>
+          <p:cNvSpPr>
+            <a:spLocks noGrp="1"/>
+          </p:cNvSpPr>
+          <p:nvPr>
+            <p:ph idx="1"/>
+          </p:nvPr>
+        </p:nvSpPr>
+        <p:spPr/>
+        <p:txBody>
+          <a:bodyPr/>
+          <a:lstStyle/>
+          <a:p>
             <a:r>
               <a:rPr lang="en-US" dirty="0"/>
-              <a:t>Front end tasks</a:t>
-            </a:r>
-          </a:p>
-        </p:txBody>
-      </p:sp>
-      <p:sp>
-        <p:nvSpPr>
-          <p:cNvPr id="3" name="Content Placeholder 2">
-            <a:extLst>
-              <a:ext uri="{FF2B5EF4-FFF2-40B4-BE49-F238E27FC236}">
-                <a16:creationId xmlns:a16="http://schemas.microsoft.com/office/drawing/2014/main" id="{4EDE26FF-0C45-F52A-A5D1-6FDB250A8AF7}"/>
-              </a:ext>
-            </a:extLst>
-          </p:cNvPr>
-          <p:cNvSpPr>
-            <a:spLocks noGrp="1"/>
-          </p:cNvSpPr>
-          <p:nvPr>
-            <p:ph idx="1"/>
-          </p:nvPr>
-        </p:nvSpPr>
-        <p:spPr/>
-        <p:txBody>
-          <a:bodyPr/>
-          <a:lstStyle/>
-          <a:p>
-            <a:r>
-              <a:rPr lang="en-US" dirty="0"/>
-              <a:t>Robustness</a:t>
-            </a:r>
-          </a:p>
-          <a:p>
-            <a:r>
-              <a:rPr lang="en-US" dirty="0"/>
-              <a:t>User friendly features</a:t>
-            </a:r>
-          </a:p>
-          <a:p>
-            <a:r>
-              <a:rPr lang="en-US" dirty="0"/>
-              <a:t>Bug fixes</a:t>
-            </a:r>
-          </a:p>
-          <a:p>
-            <a:r>
-              <a:rPr lang="en-US" dirty="0"/>
-              <a:t>Feature additions</a:t>
-            </a:r>
-          </a:p>
-          <a:p>
-            <a:r>
-              <a:rPr lang="en-US" dirty="0"/>
-              <a:t>Deployment</a:t>
-            </a:r>
+              <a:t>Aesthetics per Lisa and Kelly meeting</a:t>
+            </a:r>
+          </a:p>
+          <a:p>
+            <a:r>
+              <a:rPr lang="en-US" sz="1800" b="0" i="0" u="none" strike="noStrike" dirty="0">
+                <a:solidFill>
+                  <a:srgbClr val="000000"/>
+                </a:solidFill>
+                <a:effectLst/>
+                <a:latin typeface="Aptos" panose="020B0004020202020204" pitchFamily="34" charset="0"/>
+              </a:rPr>
+              <a:t>Then, I’m thinking that we need to make sure that we are providing the normalized/processed data on the Download tab and some sort of </a:t>
+            </a:r>
+            <a:r>
+              <a:rPr lang="en-US" sz="1800" b="0" i="0" u="none" strike="noStrike" dirty="0" err="1">
+                <a:solidFill>
+                  <a:srgbClr val="000000"/>
+                </a:solidFill>
+                <a:effectLst/>
+                <a:latin typeface="Aptos" panose="020B0004020202020204" pitchFamily="34" charset="0"/>
+              </a:rPr>
+              <a:t>slopeR</a:t>
+            </a:r>
+            <a:r>
+              <a:rPr lang="en-US" sz="1800" b="0" i="0" u="none" strike="noStrike" dirty="0">
+                <a:solidFill>
+                  <a:srgbClr val="000000"/>
+                </a:solidFill>
+                <a:effectLst/>
+                <a:latin typeface="Aptos" panose="020B0004020202020204" pitchFamily="34" charset="0"/>
+              </a:rPr>
+              <a:t> object which I would like to enable a user to upload together and “re-see” their analysis (or upload new data with equitable biomolecule names and the fitted model and get new predictions), but let’s start with the “re-see” case.</a:t>
+            </a:r>
+          </a:p>
+          <a:p>
+            <a:endParaRPr lang="en-US" dirty="0"/>
           </a:p>
         </p:txBody>
       </p:sp>
     </p:spTree>
     <p:extLst>
       <p:ext uri="{BB962C8B-B14F-4D97-AF65-F5344CB8AC3E}">
-        <p14:creationId xmlns:p14="http://schemas.microsoft.com/office/powerpoint/2010/main" val="3571071518"/>
+        <p14:creationId xmlns:p14="http://schemas.microsoft.com/office/powerpoint/2010/main" val="3286961370"/>
       </p:ext>
     </p:extLst>
   </p:cSld>
@@ -6750,10 +4553,38 @@
       </p:grpSpPr>
       <p:sp>
         <p:nvSpPr>
+          <p:cNvPr id="2" name="Title 1">
+            <a:extLst>
+              <a:ext uri="{FF2B5EF4-FFF2-40B4-BE49-F238E27FC236}">
+                <a16:creationId xmlns:a16="http://schemas.microsoft.com/office/drawing/2014/main" id="{0F5A8F16-333C-BB37-5D34-431C7818BFA3}"/>
+              </a:ext>
+            </a:extLst>
+          </p:cNvPr>
+          <p:cNvSpPr>
+            <a:spLocks noGrp="1"/>
+          </p:cNvSpPr>
+          <p:nvPr>
+            <p:ph type="title"/>
+          </p:nvPr>
+        </p:nvSpPr>
+        <p:spPr/>
+        <p:txBody>
+          <a:bodyPr/>
+          <a:lstStyle/>
+          <a:p>
+            <a:r>
+              <a:rPr lang="en-US" dirty="0"/>
+              <a:t>Multiprobe fun</a:t>
+            </a:r>
+          </a:p>
+        </p:txBody>
+      </p:sp>
+      <p:sp>
+        <p:nvSpPr>
           <p:cNvPr id="3" name="Content Placeholder 2">
             <a:extLst>
               <a:ext uri="{FF2B5EF4-FFF2-40B4-BE49-F238E27FC236}">
-                <a16:creationId xmlns:a16="http://schemas.microsoft.com/office/drawing/2014/main" id="{B1478E97-7E10-E576-F66E-B3D26543CA75}"/>
+                <a16:creationId xmlns:a16="http://schemas.microsoft.com/office/drawing/2014/main" id="{CF1239EA-DF5D-EE0F-4A84-70DDC1A0D301}"/>
               </a:ext>
             </a:extLst>
           </p:cNvPr>
@@ -6764,633 +4595,35 @@
             <p:ph idx="1"/>
           </p:nvPr>
         </p:nvSpPr>
-        <p:spPr>
-          <a:xfrm>
-            <a:off x="145991" y="133558"/>
-            <a:ext cx="4391826" cy="2985657"/>
-          </a:xfrm>
-        </p:spPr>
+        <p:spPr/>
         <p:txBody>
           <a:bodyPr>
-            <a:normAutofit fontScale="77500" lnSpcReduction="20000"/>
+            <a:normAutofit/>
           </a:bodyPr>
           <a:lstStyle/>
           <a:p>
-            <a:pPr marL="0" indent="0">
-              <a:buNone/>
-            </a:pPr>
-            <a:r>
-              <a:rPr lang="en-US" sz="3400" dirty="0"/>
-              <a:t>Robustness</a:t>
-            </a:r>
-          </a:p>
-          <a:p>
+            <a:r>
+              <a:rPr lang="en-US" dirty="0" err="1"/>
+              <a:t>Pmart</a:t>
+            </a:r>
             <a:r>
               <a:rPr lang="en-US" dirty="0"/>
-              <a:t>Run-throughs with no </a:t>
+              <a:t> app and SLOPE app</a:t>
+            </a:r>
+          </a:p>
+          <a:p>
+            <a:pPr lvl="1"/>
+            <a:r>
+              <a:rPr lang="en-US" dirty="0"/>
+              <a:t>May also incorporate ids for observers to make future </a:t>
             </a:r>
             <a:r>
               <a:rPr lang="en-US" dirty="0" err="1"/>
-              <a:t>fdata</a:t>
-            </a:r>
-            <a:endParaRPr lang="en-US" dirty="0"/>
-          </a:p>
-          <a:p>
-            <a:r>
-              <a:rPr lang="en-US" dirty="0" err="1"/>
-              <a:t>Seqdata</a:t>
+              <a:t>MultiProbe</a:t>
             </a:r>
             <a:r>
               <a:rPr lang="en-US" dirty="0"/>
-              <a:t> run-through</a:t>
-            </a:r>
-          </a:p>
-          <a:p>
-            <a:r>
-              <a:rPr lang="en-US" dirty="0"/>
-              <a:t>All models run-through</a:t>
-            </a:r>
-          </a:p>
-          <a:p>
-            <a:r>
-              <a:rPr lang="en-US" dirty="0"/>
-              <a:t>More data run-through</a:t>
-            </a:r>
-          </a:p>
-          <a:p>
-            <a:r>
-              <a:rPr lang="en-US" dirty="0"/>
-              <a:t>Generalize for regression response</a:t>
-            </a:r>
-          </a:p>
-          <a:p>
-            <a:r>
-              <a:rPr lang="en-US" dirty="0">
-                <a:effectLst/>
-                <a:latin typeface=".AppleSystemUIFontMonospaced"/>
-              </a:rPr>
-              <a:t>Handle conversion of 100% of molecules to 0 and 1</a:t>
-            </a:r>
-          </a:p>
-          <a:p>
-            <a:endParaRPr lang="en-US" dirty="0"/>
-          </a:p>
-        </p:txBody>
-      </p:sp>
-      <p:sp>
-        <p:nvSpPr>
-          <p:cNvPr id="5" name="TextBox 4">
-            <a:extLst>
-              <a:ext uri="{FF2B5EF4-FFF2-40B4-BE49-F238E27FC236}">
-                <a16:creationId xmlns:a16="http://schemas.microsoft.com/office/drawing/2014/main" id="{73521B96-0D31-D465-6F9D-BF1ABA566B27}"/>
-              </a:ext>
-            </a:extLst>
-          </p:cNvPr>
-          <p:cNvSpPr txBox="1"/>
-          <p:nvPr/>
-        </p:nvSpPr>
-        <p:spPr>
-          <a:xfrm>
-            <a:off x="145991" y="3126081"/>
-            <a:ext cx="5707941" cy="3908762"/>
-          </a:xfrm>
-          <a:prstGeom prst="rect">
-            <a:avLst/>
-          </a:prstGeom>
-          <a:noFill/>
-        </p:spPr>
-        <p:txBody>
-          <a:bodyPr wrap="square">
-            <a:spAutoFit/>
-          </a:bodyPr>
-          <a:lstStyle/>
-          <a:p>
-            <a:r>
-              <a:rPr lang="en-US" dirty="0"/>
-              <a:t>User friendly</a:t>
-            </a:r>
-          </a:p>
-          <a:p>
-            <a:pPr marL="285750" indent="-285750">
-              <a:buFont typeface="Arial" panose="020B0604020202020204" pitchFamily="34" charset="0"/>
-              <a:buChar char="•"/>
-            </a:pPr>
-            <a:r>
-              <a:rPr lang="en-US" sz="1600" dirty="0"/>
-              <a:t>Populate help button</a:t>
-            </a:r>
-          </a:p>
-          <a:p>
-            <a:pPr marL="285750" indent="-285750">
-              <a:buFont typeface="Arial" panose="020B0604020202020204" pitchFamily="34" charset="0"/>
-              <a:buChar char="•"/>
-            </a:pPr>
-            <a:r>
-              <a:rPr lang="en-US" sz="1600" dirty="0"/>
-              <a:t>Completion criteria so “Done” only appears when done by panel, tab</a:t>
-            </a:r>
-          </a:p>
-          <a:p>
-            <a:pPr marL="285750" indent="-285750">
-              <a:buFont typeface="Arial" panose="020B0604020202020204" pitchFamily="34" charset="0"/>
-              <a:buChar char="•"/>
-            </a:pPr>
-            <a:r>
-              <a:rPr lang="en-US" sz="1600" dirty="0">
-                <a:effectLst/>
-                <a:latin typeface=".AppleSystemUIFontMonospaced"/>
-              </a:rPr>
-              <a:t>Add trimming of sample names</a:t>
-            </a:r>
-          </a:p>
-          <a:p>
-            <a:pPr marL="285750" indent="-285750">
-              <a:buFont typeface="Arial" panose="020B0604020202020204" pitchFamily="34" charset="0"/>
-              <a:buChar char="•"/>
-            </a:pPr>
-            <a:r>
-              <a:rPr lang="en-US" sz="1600" dirty="0">
-                <a:effectLst/>
-                <a:latin typeface=".AppleSystemUIFontMonospaced"/>
-              </a:rPr>
-              <a:t>Update welcome page text/glossary</a:t>
-            </a:r>
-          </a:p>
-          <a:p>
-            <a:pPr marL="285750" indent="-285750">
-              <a:buFont typeface="Arial" panose="020B0604020202020204" pitchFamily="34" charset="0"/>
-              <a:buChar char="•"/>
-            </a:pPr>
-            <a:r>
-              <a:rPr lang="en-US" sz="1600" dirty="0">
-                <a:effectLst/>
-                <a:latin typeface=".AppleSystemUIFontMonospaced"/>
-              </a:rPr>
-              <a:t>Req norm eval before "add” as applicable</a:t>
-            </a:r>
-          </a:p>
-          <a:p>
-            <a:pPr marL="285750" indent="-285750">
-              <a:buFont typeface="Arial" panose="020B0604020202020204" pitchFamily="34" charset="0"/>
-              <a:buChar char="•"/>
-            </a:pPr>
-            <a:r>
-              <a:rPr lang="en-US" sz="1600" dirty="0">
-                <a:latin typeface=".AppleSystemUIFontMonospaced"/>
-              </a:rPr>
-              <a:t>Time estimates for model if long &lt;- backburner</a:t>
-            </a:r>
-          </a:p>
-          <a:p>
-            <a:pPr marL="285750" indent="-285750">
-              <a:buFont typeface="Arial" panose="020B0604020202020204" pitchFamily="34" charset="0"/>
-              <a:buChar char="•"/>
-            </a:pPr>
-            <a:r>
-              <a:rPr lang="en-US" sz="1600" dirty="0">
-                <a:latin typeface=".AppleSystemUIFontMonospaced"/>
-              </a:rPr>
-              <a:t>K-means plots – get more hover info, most contributing PCA biomolecules</a:t>
-            </a:r>
-          </a:p>
-          <a:p>
-            <a:pPr marL="285750" indent="-285750">
-              <a:buFont typeface="Arial" panose="020B0604020202020204" pitchFamily="34" charset="0"/>
-              <a:buChar char="•"/>
-            </a:pPr>
-            <a:r>
-              <a:rPr lang="en-US" sz="1600" dirty="0">
-                <a:latin typeface=".AppleSystemUIFontMonospaced"/>
-              </a:rPr>
-              <a:t>More tool tips</a:t>
-            </a:r>
-          </a:p>
-          <a:p>
-            <a:pPr marL="285750" indent="-285750">
-              <a:buFont typeface="Arial" panose="020B0604020202020204" pitchFamily="34" charset="0"/>
-              <a:buChar char="•"/>
-            </a:pPr>
-            <a:r>
-              <a:rPr lang="en-US" sz="1600" dirty="0">
-                <a:latin typeface=".AppleSystemUIFontMonospaced"/>
-              </a:rPr>
-              <a:t>Progress pages</a:t>
-            </a:r>
-          </a:p>
-          <a:p>
-            <a:pPr marL="285750" indent="-285750">
-              <a:buFont typeface="Arial" panose="020B0604020202020204" pitchFamily="34" charset="0"/>
-              <a:buChar char="•"/>
-            </a:pPr>
-            <a:r>
-              <a:rPr lang="en-US" sz="1600" dirty="0">
-                <a:latin typeface=".AppleSystemUIFontMonospaced"/>
-              </a:rPr>
-              <a:t>Require missingness handling where needed</a:t>
-            </a:r>
-          </a:p>
-          <a:p>
-            <a:pPr marL="285750" indent="-285750">
-              <a:buFont typeface="Arial" panose="020B0604020202020204" pitchFamily="34" charset="0"/>
-              <a:buChar char="•"/>
-            </a:pPr>
-            <a:endParaRPr lang="en-US" sz="2000" dirty="0"/>
-          </a:p>
-          <a:p>
-            <a:pPr marL="285750" indent="-285750">
-              <a:buFont typeface="Arial" panose="020B0604020202020204" pitchFamily="34" charset="0"/>
-              <a:buChar char="•"/>
-            </a:pPr>
-            <a:endParaRPr lang="en-US" dirty="0"/>
-          </a:p>
-        </p:txBody>
-      </p:sp>
-      <p:sp>
-        <p:nvSpPr>
-          <p:cNvPr id="6" name="TextBox 5">
-            <a:extLst>
-              <a:ext uri="{FF2B5EF4-FFF2-40B4-BE49-F238E27FC236}">
-                <a16:creationId xmlns:a16="http://schemas.microsoft.com/office/drawing/2014/main" id="{0613F9C7-11D5-416D-54B0-0ECF2E367F80}"/>
-              </a:ext>
-            </a:extLst>
-          </p:cNvPr>
-          <p:cNvSpPr txBox="1"/>
-          <p:nvPr/>
-        </p:nvSpPr>
-        <p:spPr>
-          <a:xfrm>
-            <a:off x="4412975" y="41336"/>
-            <a:ext cx="8183932" cy="3170099"/>
-          </a:xfrm>
-          <a:prstGeom prst="rect">
-            <a:avLst/>
-          </a:prstGeom>
-          <a:noFill/>
-        </p:spPr>
-        <p:txBody>
-          <a:bodyPr wrap="square" rtlCol="0">
-            <a:spAutoFit/>
-          </a:bodyPr>
-          <a:lstStyle/>
-          <a:p>
-            <a:r>
-              <a:rPr lang="en-US" sz="2000" dirty="0"/>
-              <a:t>Bug fixes</a:t>
-            </a:r>
-          </a:p>
-          <a:p>
-            <a:pPr marL="285750" indent="-285750">
-              <a:buFont typeface="Arial" panose="020B0604020202020204" pitchFamily="34" charset="0"/>
-              <a:buChar char="•"/>
-            </a:pPr>
-            <a:r>
-              <a:rPr lang="en-US" dirty="0">
-                <a:effectLst/>
-                <a:latin typeface=".AppleSystemUIFontMonospaced"/>
-              </a:rPr>
-              <a:t>Normalization – remove error options where all data is complete or other weirdness</a:t>
-            </a:r>
-          </a:p>
-          <a:p>
-            <a:pPr marL="285750" indent="-285750">
-              <a:buFont typeface="Arial" panose="020B0604020202020204" pitchFamily="34" charset="0"/>
-              <a:buChar char="•"/>
-            </a:pPr>
-            <a:r>
-              <a:rPr lang="en-US" dirty="0">
-                <a:latin typeface=".AppleSystemUIFontMonospaced"/>
-              </a:rPr>
-              <a:t>Skip variable specifications if no f-data or </a:t>
-            </a:r>
-            <a:r>
-              <a:rPr lang="en-US" dirty="0" err="1">
-                <a:latin typeface=".AppleSystemUIFontMonospaced"/>
-              </a:rPr>
-              <a:t>e_meta</a:t>
-            </a:r>
-            <a:r>
-              <a:rPr lang="en-US" dirty="0">
-                <a:latin typeface=".AppleSystemUIFontMonospaced"/>
-              </a:rPr>
-              <a:t>?</a:t>
-            </a:r>
-          </a:p>
-          <a:p>
-            <a:pPr marL="285750" indent="-285750">
-              <a:buFont typeface="Arial" panose="020B0604020202020204" pitchFamily="34" charset="0"/>
-              <a:buChar char="•"/>
-            </a:pPr>
-            <a:r>
-              <a:rPr lang="en-US" dirty="0">
-                <a:effectLst/>
-                <a:latin typeface=".AppleSystemUIFontMonospaced"/>
-              </a:rPr>
-              <a:t>Expert mentor table overflow</a:t>
-            </a:r>
-          </a:p>
-          <a:p>
-            <a:pPr marL="285750" indent="-285750">
-              <a:buFont typeface="Arial" panose="020B0604020202020204" pitchFamily="34" charset="0"/>
-              <a:buChar char="•"/>
-            </a:pPr>
-            <a:r>
-              <a:rPr lang="en-US" dirty="0" err="1">
-                <a:effectLst/>
-              </a:rPr>
-              <a:t>Hclust</a:t>
-            </a:r>
-            <a:r>
-              <a:rPr lang="en-US" dirty="0">
-                <a:effectLst/>
-              </a:rPr>
-              <a:t> line color</a:t>
-            </a:r>
-          </a:p>
-          <a:p>
-            <a:pPr marL="285750" indent="-285750">
-              <a:buFont typeface="Arial" panose="020B0604020202020204" pitchFamily="34" charset="0"/>
-              <a:buChar char="•"/>
-            </a:pPr>
-            <a:r>
-              <a:rPr lang="en-US" dirty="0"/>
-              <a:t>Double check defaults for all model hp settings</a:t>
-            </a:r>
-          </a:p>
-          <a:p>
-            <a:pPr marL="285750" indent="-285750">
-              <a:buFont typeface="Arial" panose="020B0604020202020204" pitchFamily="34" charset="0"/>
-              <a:buChar char="•"/>
-            </a:pPr>
-            <a:r>
-              <a:rPr lang="en-US" b="1" dirty="0">
-                <a:effectLst/>
-                <a:latin typeface="+mj-lt"/>
-              </a:rPr>
-              <a:t>Make confirm selection on analysis goals hide/appear</a:t>
-            </a:r>
-            <a:br>
-              <a:rPr lang="en-US" b="1" dirty="0">
-                <a:effectLst/>
-                <a:latin typeface="+mj-lt"/>
-              </a:rPr>
-            </a:br>
-            <a:r>
-              <a:rPr lang="en-US" b="1" dirty="0">
-                <a:effectLst/>
-                <a:latin typeface="+mj-lt"/>
-              </a:rPr>
-              <a:t>Make sure bundle and download downloads correctly</a:t>
-            </a:r>
-            <a:endParaRPr lang="en-US" dirty="0">
-              <a:effectLst/>
-              <a:latin typeface="+mj-lt"/>
-            </a:endParaRPr>
-          </a:p>
-          <a:p>
-            <a:pPr marL="285750" indent="-285750">
-              <a:buFont typeface="Arial" panose="020B0604020202020204" pitchFamily="34" charset="0"/>
-              <a:buChar char="•"/>
-            </a:pPr>
-            <a:r>
-              <a:rPr lang="en-US" b="1" dirty="0">
-                <a:effectLst/>
-                <a:latin typeface="+mj-lt"/>
-              </a:rPr>
-              <a:t>Reorder the rows in download tables</a:t>
-            </a:r>
-            <a:endParaRPr lang="en-US" dirty="0">
-              <a:effectLst/>
-              <a:latin typeface="+mj-lt"/>
-            </a:endParaRPr>
-          </a:p>
-          <a:p>
-            <a:pPr marL="285750" indent="-285750">
-              <a:buFont typeface="Arial" panose="020B0604020202020204" pitchFamily="34" charset="0"/>
-              <a:buChar char="•"/>
-            </a:pPr>
-            <a:endParaRPr lang="en-US" dirty="0">
-              <a:effectLst/>
-            </a:endParaRPr>
-          </a:p>
-        </p:txBody>
-      </p:sp>
-      <p:sp>
-        <p:nvSpPr>
-          <p:cNvPr id="7" name="TextBox 6">
-            <a:extLst>
-              <a:ext uri="{FF2B5EF4-FFF2-40B4-BE49-F238E27FC236}">
-                <a16:creationId xmlns:a16="http://schemas.microsoft.com/office/drawing/2014/main" id="{B3CC0DBC-2AC2-5B31-ED7E-DBDE8EF3E1D8}"/>
-              </a:ext>
-            </a:extLst>
-          </p:cNvPr>
-          <p:cNvSpPr txBox="1"/>
-          <p:nvPr/>
-        </p:nvSpPr>
-        <p:spPr>
-          <a:xfrm>
-            <a:off x="6338069" y="3228895"/>
-            <a:ext cx="5853931" cy="3724096"/>
-          </a:xfrm>
-          <a:prstGeom prst="rect">
-            <a:avLst/>
-          </a:prstGeom>
-          <a:noFill/>
-        </p:spPr>
-        <p:txBody>
-          <a:bodyPr wrap="square" rtlCol="0">
-            <a:spAutoFit/>
-          </a:bodyPr>
-          <a:lstStyle/>
-          <a:p>
-            <a:r>
-              <a:rPr lang="en-US" sz="2000" dirty="0"/>
-              <a:t>Feature additions</a:t>
-            </a:r>
-          </a:p>
-          <a:p>
-            <a:pPr marL="285750" indent="-285750">
-              <a:buFont typeface="Arial" panose="020B0604020202020204" pitchFamily="34" charset="0"/>
-              <a:buChar char="•"/>
-            </a:pPr>
-            <a:r>
-              <a:rPr lang="en-US" dirty="0"/>
-              <a:t>Peptide rollup</a:t>
-            </a:r>
-          </a:p>
-          <a:p>
-            <a:pPr marL="285750" indent="-285750">
-              <a:buFont typeface="Arial" panose="020B0604020202020204" pitchFamily="34" charset="0"/>
-              <a:buChar char="•"/>
-            </a:pPr>
-            <a:r>
-              <a:rPr lang="en-US" dirty="0"/>
-              <a:t>Recommendation function for </a:t>
-            </a:r>
-            <a:r>
-              <a:rPr lang="en-US" dirty="0" err="1"/>
-              <a:t>nclust</a:t>
-            </a:r>
-            <a:endParaRPr lang="en-US" dirty="0"/>
-          </a:p>
-          <a:p>
-            <a:pPr marL="742950" lvl="1" indent="-285750">
-              <a:buFont typeface="Arial" panose="020B0604020202020204" pitchFamily="34" charset="0"/>
-              <a:buChar char="•"/>
-            </a:pPr>
-            <a:r>
-              <a:rPr lang="en-US" dirty="0"/>
-              <a:t>Move samples/biomolecules to other tab?</a:t>
-            </a:r>
-          </a:p>
-          <a:p>
-            <a:pPr marL="285750" indent="-285750">
-              <a:buFont typeface="Arial" panose="020B0604020202020204" pitchFamily="34" charset="0"/>
-              <a:buChar char="•"/>
-            </a:pPr>
-            <a:r>
-              <a:rPr lang="en-US" dirty="0"/>
-              <a:t>Downloads</a:t>
-            </a:r>
-          </a:p>
-          <a:p>
-            <a:pPr marL="742950" lvl="1" indent="-285750">
-              <a:buFont typeface="Arial" panose="020B0604020202020204" pitchFamily="34" charset="0"/>
-              <a:buChar char="•"/>
-            </a:pPr>
-            <a:r>
-              <a:rPr lang="en-US" dirty="0"/>
-              <a:t>RVs with a level for models in case users </a:t>
-            </a:r>
-            <a:r>
-              <a:rPr lang="en-US" dirty="0" err="1"/>
-              <a:t>wanna</a:t>
-            </a:r>
-            <a:r>
-              <a:rPr lang="en-US" dirty="0"/>
-              <a:t> go back</a:t>
-            </a:r>
-          </a:p>
-          <a:p>
-            <a:pPr marL="1200150" lvl="2" indent="-285750">
-              <a:buFont typeface="Arial" panose="020B0604020202020204" pitchFamily="34" charset="0"/>
-              <a:buChar char="•"/>
-            </a:pPr>
-            <a:r>
-              <a:rPr lang="en-US" dirty="0"/>
-              <a:t>For advanced users, allow different models for different hp tunings</a:t>
-            </a:r>
-          </a:p>
-          <a:p>
-            <a:pPr marL="742950" lvl="1" indent="-285750">
-              <a:buFont typeface="Arial" panose="020B0604020202020204" pitchFamily="34" charset="0"/>
-              <a:buChar char="•"/>
-            </a:pPr>
-            <a:r>
-              <a:rPr lang="en-US" dirty="0"/>
-              <a:t>Cap the number of new models users can do</a:t>
-            </a:r>
-          </a:p>
-          <a:p>
-            <a:pPr marL="742950" lvl="1" indent="-285750">
-              <a:buFont typeface="Arial" panose="020B0604020202020204" pitchFamily="34" charset="0"/>
-              <a:buChar char="•"/>
-            </a:pPr>
-            <a:r>
-              <a:rPr lang="en-US" dirty="0"/>
-              <a:t>Or save and return to </a:t>
-            </a:r>
-            <a:r>
-              <a:rPr lang="en-US" dirty="0" err="1"/>
-              <a:t>expert_mentor</a:t>
-            </a:r>
-            <a:endParaRPr lang="en-US" dirty="0"/>
-          </a:p>
-          <a:p>
-            <a:pPr marL="285750" indent="-285750">
-              <a:buFont typeface="Arial" panose="020B0604020202020204" pitchFamily="34" charset="0"/>
-              <a:buChar char="•"/>
-            </a:pPr>
-            <a:r>
-              <a:rPr lang="en-US" dirty="0"/>
-              <a:t>New normalization – solidify in </a:t>
-            </a:r>
-            <a:r>
-              <a:rPr lang="en-US" dirty="0" err="1"/>
-              <a:t>pmartR</a:t>
-            </a:r>
-            <a:endParaRPr lang="en-US" dirty="0"/>
-          </a:p>
-          <a:p>
-            <a:pPr marL="285750" indent="-285750">
-              <a:buFont typeface="Arial" panose="020B0604020202020204" pitchFamily="34" charset="0"/>
-              <a:buChar char="•"/>
-            </a:pPr>
-            <a:r>
-              <a:rPr lang="en-US" dirty="0"/>
-              <a:t>Add </a:t>
-            </a:r>
-            <a:r>
-              <a:rPr lang="en-US" dirty="0" err="1"/>
-              <a:t>spls</a:t>
-            </a:r>
-            <a:r>
-              <a:rPr lang="en-US" dirty="0"/>
-              <a:t> da -- Dan</a:t>
-            </a:r>
-          </a:p>
-        </p:txBody>
-      </p:sp>
-      <p:sp>
-        <p:nvSpPr>
-          <p:cNvPr id="9" name="TextBox 8">
-            <a:extLst>
-              <a:ext uri="{FF2B5EF4-FFF2-40B4-BE49-F238E27FC236}">
-                <a16:creationId xmlns:a16="http://schemas.microsoft.com/office/drawing/2014/main" id="{7FC554C6-C8B6-EBE3-A74D-AB97DE2FA49E}"/>
-              </a:ext>
-            </a:extLst>
-          </p:cNvPr>
-          <p:cNvSpPr txBox="1"/>
-          <p:nvPr/>
-        </p:nvSpPr>
-        <p:spPr>
-          <a:xfrm>
-            <a:off x="10263499" y="2395496"/>
-            <a:ext cx="1532279" cy="923330"/>
-          </a:xfrm>
-          <a:prstGeom prst="rect">
-            <a:avLst/>
-          </a:prstGeom>
-          <a:noFill/>
-        </p:spPr>
-        <p:txBody>
-          <a:bodyPr wrap="none" rtlCol="0">
-            <a:spAutoFit/>
-          </a:bodyPr>
-          <a:lstStyle/>
-          <a:p>
-            <a:r>
-              <a:rPr lang="en-US" dirty="0"/>
-              <a:t>Deployment</a:t>
-            </a:r>
-          </a:p>
-          <a:p>
-            <a:pPr marL="285750" indent="-285750">
-              <a:buFont typeface="Arial" panose="020B0604020202020204" pitchFamily="34" charset="0"/>
-              <a:buChar char="•"/>
-            </a:pPr>
-            <a:r>
-              <a:rPr lang="en-US" dirty="0"/>
-              <a:t>Docker</a:t>
-            </a:r>
-          </a:p>
-          <a:p>
-            <a:pPr marL="285750" indent="-285750">
-              <a:buFont typeface="Arial" panose="020B0604020202020204" pitchFamily="34" charset="0"/>
-              <a:buChar char="•"/>
-            </a:pPr>
-            <a:r>
-              <a:rPr lang="en-US" dirty="0"/>
-              <a:t>Multiprobe</a:t>
+              <a:t> merges smoother</a:t>
             </a:r>
           </a:p>
         </p:txBody>
@@ -7398,7 +4631,7 @@
     </p:spTree>
     <p:extLst>
       <p:ext uri="{BB962C8B-B14F-4D97-AF65-F5344CB8AC3E}">
-        <p14:creationId xmlns:p14="http://schemas.microsoft.com/office/powerpoint/2010/main" val="1746479879"/>
+        <p14:creationId xmlns:p14="http://schemas.microsoft.com/office/powerpoint/2010/main" val="1469259572"/>
       </p:ext>
     </p:extLst>
   </p:cSld>
@@ -7427,182 +4660,1275 @@
       </p:grpSpPr>
       <p:sp>
         <p:nvSpPr>
-          <p:cNvPr id="2" name="Title 1">
-            <a:extLst>
-              <a:ext uri="{FF2B5EF4-FFF2-40B4-BE49-F238E27FC236}">
-                <a16:creationId xmlns:a16="http://schemas.microsoft.com/office/drawing/2014/main" id="{0F5A8F16-333C-BB37-5D34-431C7818BFA3}"/>
-              </a:ext>
-            </a:extLst>
-          </p:cNvPr>
-          <p:cNvSpPr>
-            <a:spLocks noGrp="1"/>
-          </p:cNvSpPr>
-          <p:nvPr>
-            <p:ph type="title"/>
-          </p:nvPr>
-        </p:nvSpPr>
-        <p:spPr/>
-        <p:txBody>
-          <a:bodyPr/>
-          <a:lstStyle/>
-          <a:p>
-            <a:r>
-              <a:rPr lang="en-US" dirty="0"/>
-              <a:t>Multiprobe fun</a:t>
-            </a:r>
-          </a:p>
-        </p:txBody>
-      </p:sp>
-      <p:sp>
-        <p:nvSpPr>
-          <p:cNvPr id="3" name="Content Placeholder 2">
-            <a:extLst>
-              <a:ext uri="{FF2B5EF4-FFF2-40B4-BE49-F238E27FC236}">
-                <a16:creationId xmlns:a16="http://schemas.microsoft.com/office/drawing/2014/main" id="{CF1239EA-DF5D-EE0F-4A84-70DDC1A0D301}"/>
-              </a:ext>
-            </a:extLst>
-          </p:cNvPr>
-          <p:cNvSpPr>
-            <a:spLocks noGrp="1"/>
-          </p:cNvSpPr>
-          <p:nvPr>
-            <p:ph idx="1"/>
-          </p:nvPr>
-        </p:nvSpPr>
-        <p:spPr/>
-        <p:txBody>
-          <a:bodyPr>
-            <a:normAutofit fontScale="92500"/>
+          <p:cNvPr id="5" name="TextBox 4">
+            <a:extLst>
+              <a:ext uri="{FF2B5EF4-FFF2-40B4-BE49-F238E27FC236}">
+                <a16:creationId xmlns:a16="http://schemas.microsoft.com/office/drawing/2014/main" id="{0680C72C-7802-4033-0DDD-82BBF909A34F}"/>
+              </a:ext>
+            </a:extLst>
+          </p:cNvPr>
+          <p:cNvSpPr txBox="1"/>
+          <p:nvPr/>
+        </p:nvSpPr>
+        <p:spPr>
+          <a:xfrm>
+            <a:off x="266006" y="141316"/>
+            <a:ext cx="11925993" cy="7017306"/>
+          </a:xfrm>
+          <a:prstGeom prst="rect">
+            <a:avLst/>
+          </a:prstGeom>
+          <a:noFill/>
+        </p:spPr>
+        <p:txBody>
+          <a:bodyPr wrap="square">
+            <a:spAutoFit/>
           </a:bodyPr>
           <a:lstStyle/>
           <a:p>
-            <a:r>
-              <a:rPr lang="en-US" dirty="0"/>
-              <a:t>Fixes to </a:t>
-            </a:r>
-            <a:r>
-              <a:rPr lang="en-US" dirty="0" err="1"/>
+            <a:pPr marL="0" marR="0">
+              <a:spcBef>
+                <a:spcPts val="0"/>
+              </a:spcBef>
+              <a:spcAft>
+                <a:spcPts val="0"/>
+              </a:spcAft>
+            </a:pPr>
+            <a:r>
+              <a:rPr lang="en-US" sz="1200" kern="100" dirty="0">
+                <a:effectLst/>
+                <a:latin typeface="Aptos" panose="020B0004020202020204" pitchFamily="34" charset="0"/>
+                <a:ea typeface="Aptos" panose="020B0004020202020204" pitchFamily="34" charset="0"/>
+                <a:cs typeface="Times New Roman" panose="02020603050405020304" pitchFamily="18" charset="0"/>
+              </a:rPr>
+              <a:t>1. Data ingestion in </a:t>
+            </a:r>
+            <a:r>
+              <a:rPr lang="en-US" sz="1200" kern="100" dirty="0" err="1">
+                <a:effectLst/>
+                <a:latin typeface="Aptos" panose="020B0004020202020204" pitchFamily="34" charset="0"/>
+                <a:ea typeface="Aptos" panose="020B0004020202020204" pitchFamily="34" charset="0"/>
+                <a:cs typeface="Times New Roman" panose="02020603050405020304" pitchFamily="18" charset="0"/>
+              </a:rPr>
+              <a:t>MultiProbe</a:t>
+            </a:r>
+            <a:r>
+              <a:rPr lang="en-US" sz="1200" kern="100" dirty="0">
+                <a:effectLst/>
+                <a:latin typeface="Aptos" panose="020B0004020202020204" pitchFamily="34" charset="0"/>
+                <a:ea typeface="Aptos" panose="020B0004020202020204" pitchFamily="34" charset="0"/>
+                <a:cs typeface="Times New Roman" panose="02020603050405020304" pitchFamily="18" charset="0"/>
+              </a:rPr>
+              <a:t> will not build data files for </a:t>
+            </a:r>
+            <a:r>
+              <a:rPr lang="en-US" sz="1200" kern="100" dirty="0" err="1">
+                <a:effectLst/>
+                <a:latin typeface="Aptos" panose="020B0004020202020204" pitchFamily="34" charset="0"/>
+                <a:ea typeface="Aptos" panose="020B0004020202020204" pitchFamily="34" charset="0"/>
+                <a:cs typeface="Times New Roman" panose="02020603050405020304" pitchFamily="18" charset="0"/>
+              </a:rPr>
               <a:t>Pmart</a:t>
             </a:r>
             <a:r>
-              <a:rPr lang="en-US" dirty="0"/>
-              <a:t> app</a:t>
-            </a:r>
-          </a:p>
-          <a:p>
-            <a:pPr lvl="1"/>
-            <a:r>
-              <a:rPr lang="en-US" dirty="0"/>
-              <a:t>Issue up on </a:t>
-            </a:r>
-            <a:r>
-              <a:rPr lang="en-US" dirty="0" err="1"/>
-              <a:t>gitlab</a:t>
-            </a:r>
+              <a:rPr lang="en-US" sz="1200" kern="100" dirty="0">
+                <a:effectLst/>
+                <a:latin typeface="Aptos" panose="020B0004020202020204" pitchFamily="34" charset="0"/>
+                <a:ea typeface="Aptos" panose="020B0004020202020204" pitchFamily="34" charset="0"/>
+                <a:cs typeface="Times New Roman" panose="02020603050405020304" pitchFamily="18" charset="0"/>
+              </a:rPr>
+              <a:t>/Slope</a:t>
+            </a:r>
+          </a:p>
+          <a:p>
+            <a:pPr marL="0" marR="0">
+              <a:spcBef>
+                <a:spcPts val="0"/>
+              </a:spcBef>
+              <a:spcAft>
+                <a:spcPts val="0"/>
+              </a:spcAft>
+            </a:pPr>
+            <a:r>
+              <a:rPr lang="en-US" sz="1200" kern="100" dirty="0">
+                <a:effectLst/>
+                <a:latin typeface="Aptos" panose="020B0004020202020204" pitchFamily="34" charset="0"/>
+                <a:ea typeface="Aptos" panose="020B0004020202020204" pitchFamily="34" charset="0"/>
+                <a:cs typeface="Times New Roman" panose="02020603050405020304" pitchFamily="18" charset="0"/>
+              </a:rPr>
+              <a:t>	- Observed in Demo by Belle last Monday (April 1</a:t>
+            </a:r>
+            <a:r>
+              <a:rPr lang="en-US" sz="1200" kern="100" baseline="30000" dirty="0">
+                <a:effectLst/>
+                <a:latin typeface="Aptos" panose="020B0004020202020204" pitchFamily="34" charset="0"/>
+                <a:ea typeface="Aptos" panose="020B0004020202020204" pitchFamily="34" charset="0"/>
+                <a:cs typeface="Times New Roman" panose="02020603050405020304" pitchFamily="18" charset="0"/>
+              </a:rPr>
+              <a:t>st</a:t>
+            </a:r>
+            <a:r>
+              <a:rPr lang="en-US" sz="1200" kern="100" dirty="0">
+                <a:effectLst/>
+                <a:latin typeface="Aptos" panose="020B0004020202020204" pitchFamily="34" charset="0"/>
+                <a:ea typeface="Aptos" panose="020B0004020202020204" pitchFamily="34" charset="0"/>
+                <a:cs typeface="Times New Roman" panose="02020603050405020304" pitchFamily="18" charset="0"/>
+              </a:rPr>
+              <a:t>)</a:t>
+            </a:r>
+            <a:br>
+              <a:rPr lang="en-US" sz="1200" kern="100" dirty="0">
+                <a:effectLst/>
+                <a:latin typeface="Aptos" panose="020B0004020202020204" pitchFamily="34" charset="0"/>
+                <a:ea typeface="Aptos" panose="020B0004020202020204" pitchFamily="34" charset="0"/>
+                <a:cs typeface="Times New Roman" panose="02020603050405020304" pitchFamily="18" charset="0"/>
+              </a:rPr>
+            </a:br>
+            <a:r>
+              <a:rPr lang="en-US" sz="1200" kern="100" dirty="0">
+                <a:effectLst/>
+                <a:latin typeface="Aptos" panose="020B0004020202020204" pitchFamily="34" charset="0"/>
+                <a:ea typeface="Aptos" panose="020B0004020202020204" pitchFamily="34" charset="0"/>
+                <a:cs typeface="Times New Roman" panose="02020603050405020304" pitchFamily="18" charset="0"/>
+              </a:rPr>
+              <a:t>	- Observed by </a:t>
+            </a:r>
+            <a:r>
+              <a:rPr lang="en-US" sz="1200" kern="100" dirty="0">
+                <a:solidFill>
+                  <a:srgbClr val="000000"/>
+                </a:solidFill>
+                <a:effectLst/>
+                <a:highlight>
+                  <a:srgbClr val="FFFFFF"/>
+                </a:highlight>
+                <a:latin typeface="Calibri" panose="020F0502020204030204" pitchFamily="34" charset="0"/>
+                <a:ea typeface="Aptos" panose="020B0004020202020204" pitchFamily="34" charset="0"/>
+                <a:cs typeface="Times New Roman" panose="02020603050405020304" pitchFamily="18" charset="0"/>
+              </a:rPr>
+              <a:t>Gabrielle last Wednesday (April 3</a:t>
+            </a:r>
+            <a:r>
+              <a:rPr lang="en-US" sz="1200" kern="100" baseline="30000" dirty="0">
+                <a:solidFill>
+                  <a:srgbClr val="000000"/>
+                </a:solidFill>
+                <a:effectLst/>
+                <a:highlight>
+                  <a:srgbClr val="FFFFFF"/>
+                </a:highlight>
+                <a:latin typeface="Calibri" panose="020F0502020204030204" pitchFamily="34" charset="0"/>
+                <a:ea typeface="Aptos" panose="020B0004020202020204" pitchFamily="34" charset="0"/>
+                <a:cs typeface="Times New Roman" panose="02020603050405020304" pitchFamily="18" charset="0"/>
+              </a:rPr>
+              <a:t>rd</a:t>
+            </a:r>
+            <a:r>
+              <a:rPr lang="en-US" sz="1200" kern="100" dirty="0">
+                <a:solidFill>
+                  <a:srgbClr val="000000"/>
+                </a:solidFill>
+                <a:effectLst/>
+                <a:highlight>
+                  <a:srgbClr val="FFFFFF"/>
+                </a:highlight>
+                <a:latin typeface="Calibri" panose="020F0502020204030204" pitchFamily="34" charset="0"/>
+                <a:ea typeface="Aptos" panose="020B0004020202020204" pitchFamily="34" charset="0"/>
+                <a:cs typeface="Times New Roman" panose="02020603050405020304" pitchFamily="18" charset="0"/>
+              </a:rPr>
+              <a:t>)</a:t>
+            </a:r>
+            <a:endParaRPr lang="en-US" sz="1200" kern="100" dirty="0">
+              <a:effectLst/>
+              <a:latin typeface="Aptos" panose="020B0004020202020204" pitchFamily="34" charset="0"/>
+              <a:ea typeface="Aptos" panose="020B0004020202020204" pitchFamily="34" charset="0"/>
+              <a:cs typeface="Times New Roman" panose="02020603050405020304" pitchFamily="18" charset="0"/>
+            </a:endParaRPr>
+          </a:p>
+          <a:p>
+            <a:pPr marL="0" marR="0">
+              <a:spcBef>
+                <a:spcPts val="0"/>
+              </a:spcBef>
+              <a:spcAft>
+                <a:spcPts val="0"/>
+              </a:spcAft>
+            </a:pPr>
+            <a:r>
+              <a:rPr lang="en-US" sz="1200" kern="100" dirty="0">
+                <a:solidFill>
+                  <a:srgbClr val="000000"/>
+                </a:solidFill>
+                <a:effectLst/>
+                <a:highlight>
+                  <a:srgbClr val="FFFFFF"/>
+                </a:highlight>
+                <a:latin typeface="Calibri" panose="020F0502020204030204" pitchFamily="34" charset="0"/>
+                <a:ea typeface="Aptos" panose="020B0004020202020204" pitchFamily="34" charset="0"/>
+                <a:cs typeface="Times New Roman" panose="02020603050405020304" pitchFamily="18" charset="0"/>
+              </a:rPr>
+              <a:t>	- Discussed briefly with Grant and Scott on Thursday (April 4</a:t>
+            </a:r>
+            <a:r>
+              <a:rPr lang="en-US" sz="1200" kern="100" baseline="30000" dirty="0">
+                <a:solidFill>
+                  <a:srgbClr val="000000"/>
+                </a:solidFill>
+                <a:effectLst/>
+                <a:highlight>
+                  <a:srgbClr val="FFFFFF"/>
+                </a:highlight>
+                <a:latin typeface="Calibri" panose="020F0502020204030204" pitchFamily="34" charset="0"/>
+                <a:ea typeface="Aptos" panose="020B0004020202020204" pitchFamily="34" charset="0"/>
+                <a:cs typeface="Times New Roman" panose="02020603050405020304" pitchFamily="18" charset="0"/>
+              </a:rPr>
+              <a:t>th</a:t>
+            </a:r>
+            <a:r>
+              <a:rPr lang="en-US" sz="1200" kern="100" dirty="0">
+                <a:solidFill>
+                  <a:srgbClr val="000000"/>
+                </a:solidFill>
+                <a:effectLst/>
+                <a:highlight>
+                  <a:srgbClr val="FFFFFF"/>
+                </a:highlight>
+                <a:latin typeface="Calibri" panose="020F0502020204030204" pitchFamily="34" charset="0"/>
+                <a:ea typeface="Aptos" panose="020B0004020202020204" pitchFamily="34" charset="0"/>
+                <a:cs typeface="Times New Roman" panose="02020603050405020304" pitchFamily="18" charset="0"/>
+              </a:rPr>
+              <a:t>) – it appears that this is from a lack of metadata enforcement required to populate fields</a:t>
+            </a:r>
+            <a:endParaRPr lang="en-US" sz="1200" kern="100" dirty="0">
+              <a:effectLst/>
+              <a:latin typeface="Aptos" panose="020B0004020202020204" pitchFamily="34" charset="0"/>
+              <a:ea typeface="Aptos" panose="020B0004020202020204" pitchFamily="34" charset="0"/>
+              <a:cs typeface="Times New Roman" panose="02020603050405020304" pitchFamily="18" charset="0"/>
+            </a:endParaRPr>
+          </a:p>
+          <a:p>
+            <a:pPr marL="0" marR="0">
+              <a:spcBef>
+                <a:spcPts val="0"/>
+              </a:spcBef>
+              <a:spcAft>
+                <a:spcPts val="0"/>
+              </a:spcAft>
+            </a:pPr>
+            <a:r>
+              <a:rPr lang="en-US" sz="1200" kern="100" dirty="0">
+                <a:effectLst/>
+                <a:latin typeface="Aptos" panose="020B0004020202020204" pitchFamily="34" charset="0"/>
+                <a:ea typeface="Aptos" panose="020B0004020202020204" pitchFamily="34" charset="0"/>
+                <a:cs typeface="Times New Roman" panose="02020603050405020304" pitchFamily="18" charset="0"/>
+              </a:rPr>
+              <a:t> </a:t>
+            </a:r>
+          </a:p>
+          <a:p>
+            <a:pPr marL="0" marR="0">
+              <a:spcBef>
+                <a:spcPts val="0"/>
+              </a:spcBef>
+              <a:spcAft>
+                <a:spcPts val="0"/>
+              </a:spcAft>
+            </a:pPr>
+            <a:r>
+              <a:rPr lang="en-US" sz="1200" kern="100" dirty="0">
+                <a:effectLst/>
+                <a:latin typeface="Aptos" panose="020B0004020202020204" pitchFamily="34" charset="0"/>
+                <a:ea typeface="Aptos" panose="020B0004020202020204" pitchFamily="34" charset="0"/>
+                <a:cs typeface="Times New Roman" panose="02020603050405020304" pitchFamily="18" charset="0"/>
+              </a:rPr>
+              <a:t>2. SLOPE crash when trying to get </a:t>
+            </a:r>
+            <a:r>
+              <a:rPr lang="en-US" sz="1200" kern="100" dirty="0" err="1">
+                <a:effectLst/>
+                <a:latin typeface="Aptos" panose="020B0004020202020204" pitchFamily="34" charset="0"/>
+                <a:ea typeface="Aptos" panose="020B0004020202020204" pitchFamily="34" charset="0"/>
+                <a:cs typeface="Times New Roman" panose="02020603050405020304" pitchFamily="18" charset="0"/>
+              </a:rPr>
+              <a:t>f_data</a:t>
+            </a:r>
+            <a:r>
+              <a:rPr lang="en-US" sz="1200" kern="100" dirty="0">
+                <a:effectLst/>
+                <a:latin typeface="Aptos" panose="020B0004020202020204" pitchFamily="34" charset="0"/>
+                <a:ea typeface="Aptos" panose="020B0004020202020204" pitchFamily="34" charset="0"/>
+                <a:cs typeface="Times New Roman" panose="02020603050405020304" pitchFamily="18" charset="0"/>
+              </a:rPr>
+              <a:t> from bucket</a:t>
+            </a:r>
+          </a:p>
+          <a:p>
+            <a:pPr marL="0" marR="0">
+              <a:spcBef>
+                <a:spcPts val="0"/>
+              </a:spcBef>
+              <a:spcAft>
+                <a:spcPts val="0"/>
+              </a:spcAft>
+            </a:pPr>
+            <a:r>
+              <a:rPr lang="en-US" sz="1200" kern="100" dirty="0">
+                <a:effectLst/>
+                <a:latin typeface="Aptos" panose="020B0004020202020204" pitchFamily="34" charset="0"/>
+                <a:ea typeface="Aptos" panose="020B0004020202020204" pitchFamily="34" charset="0"/>
+                <a:cs typeface="Times New Roman" panose="02020603050405020304" pitchFamily="18" charset="0"/>
+              </a:rPr>
+              <a:t>	- At least one deployment on dev seemed to work correctly, but there have been a few different deployment versions circulating between test, dev, and demo</a:t>
+            </a:r>
+          </a:p>
+          <a:p>
+            <a:pPr marL="0" marR="0">
+              <a:spcBef>
+                <a:spcPts val="0"/>
+              </a:spcBef>
+              <a:spcAft>
+                <a:spcPts val="0"/>
+              </a:spcAft>
+            </a:pPr>
+            <a:r>
+              <a:rPr lang="en-US" sz="1200" kern="100" dirty="0">
+                <a:effectLst/>
+                <a:latin typeface="Aptos" panose="020B0004020202020204" pitchFamily="34" charset="0"/>
+                <a:ea typeface="Aptos" panose="020B0004020202020204" pitchFamily="34" charset="0"/>
+                <a:cs typeface="Times New Roman" panose="02020603050405020304" pitchFamily="18" charset="0"/>
+              </a:rPr>
+              <a:t>	- Others trigger a dim(X) must be positive length error, implying that a NULL is being passed to a function expecting a matrix</a:t>
+            </a:r>
+          </a:p>
+          <a:p>
+            <a:pPr marL="0" marR="0">
+              <a:spcBef>
+                <a:spcPts val="0"/>
+              </a:spcBef>
+              <a:spcAft>
+                <a:spcPts val="0"/>
+              </a:spcAft>
+            </a:pPr>
+            <a:r>
+              <a:rPr lang="en-US" sz="1200" kern="100" dirty="0">
+                <a:effectLst/>
+                <a:latin typeface="Aptos" panose="020B0004020202020204" pitchFamily="34" charset="0"/>
+                <a:ea typeface="Aptos" panose="020B0004020202020204" pitchFamily="34" charset="0"/>
+                <a:cs typeface="Times New Roman" panose="02020603050405020304" pitchFamily="18" charset="0"/>
+              </a:rPr>
+              <a:t>	- </a:t>
+            </a:r>
+            <a:r>
+              <a:rPr lang="en-US" sz="1200" kern="100" dirty="0" err="1">
+                <a:effectLst/>
+                <a:latin typeface="Aptos" panose="020B0004020202020204" pitchFamily="34" charset="0"/>
+                <a:ea typeface="Aptos" panose="020B0004020202020204" pitchFamily="34" charset="0"/>
+                <a:cs typeface="Times New Roman" panose="02020603050405020304" pitchFamily="18" charset="0"/>
+              </a:rPr>
+              <a:t>Dubugging</a:t>
+            </a:r>
+            <a:r>
+              <a:rPr lang="en-US" sz="1200" kern="100" dirty="0">
+                <a:effectLst/>
+                <a:latin typeface="Aptos" panose="020B0004020202020204" pitchFamily="34" charset="0"/>
+                <a:ea typeface="Aptos" panose="020B0004020202020204" pitchFamily="34" charset="0"/>
+                <a:cs typeface="Times New Roman" panose="02020603050405020304" pitchFamily="18" charset="0"/>
+              </a:rPr>
+              <a:t> with Scott on Wagyu </a:t>
+            </a:r>
+            <a:r>
+              <a:rPr lang="en-US" sz="1200" kern="100" dirty="0">
+                <a:solidFill>
+                  <a:srgbClr val="000000"/>
+                </a:solidFill>
+                <a:effectLst/>
+                <a:highlight>
+                  <a:srgbClr val="FFFFFF"/>
+                </a:highlight>
+                <a:latin typeface="Calibri" panose="020F0502020204030204" pitchFamily="34" charset="0"/>
+                <a:ea typeface="Aptos" panose="020B0004020202020204" pitchFamily="34" charset="0"/>
+                <a:cs typeface="Times New Roman" panose="02020603050405020304" pitchFamily="18" charset="0"/>
+              </a:rPr>
+              <a:t>on Thursday (April 4</a:t>
+            </a:r>
+            <a:r>
+              <a:rPr lang="en-US" sz="1200" kern="100" baseline="30000" dirty="0">
+                <a:solidFill>
+                  <a:srgbClr val="000000"/>
+                </a:solidFill>
+                <a:effectLst/>
+                <a:highlight>
+                  <a:srgbClr val="FFFFFF"/>
+                </a:highlight>
+                <a:latin typeface="Calibri" panose="020F0502020204030204" pitchFamily="34" charset="0"/>
+                <a:ea typeface="Aptos" panose="020B0004020202020204" pitchFamily="34" charset="0"/>
+                <a:cs typeface="Times New Roman" panose="02020603050405020304" pitchFamily="18" charset="0"/>
+              </a:rPr>
+              <a:t>th</a:t>
+            </a:r>
+            <a:r>
+              <a:rPr lang="en-US" sz="1200" kern="100" dirty="0">
+                <a:solidFill>
+                  <a:srgbClr val="000000"/>
+                </a:solidFill>
+                <a:effectLst/>
+                <a:highlight>
+                  <a:srgbClr val="FFFFFF"/>
+                </a:highlight>
+                <a:latin typeface="Calibri" panose="020F0502020204030204" pitchFamily="34" charset="0"/>
+                <a:ea typeface="Aptos" panose="020B0004020202020204" pitchFamily="34" charset="0"/>
+                <a:cs typeface="Times New Roman" panose="02020603050405020304" pitchFamily="18" charset="0"/>
+              </a:rPr>
+              <a:t>)</a:t>
+            </a:r>
+            <a:r>
+              <a:rPr lang="en-US" sz="1200" kern="100" dirty="0">
+                <a:effectLst/>
+                <a:latin typeface="Aptos" panose="020B0004020202020204" pitchFamily="34" charset="0"/>
+                <a:ea typeface="Aptos" panose="020B0004020202020204" pitchFamily="34" charset="0"/>
+                <a:cs typeface="Times New Roman" panose="02020603050405020304" pitchFamily="18" charset="0"/>
+              </a:rPr>
+              <a:t>, we were able to confirm that a container built on Wagyu with AWS credentials is able to ingest the datasets from s3 buckets correctly (data used was taken from the URL triggered by </a:t>
+            </a:r>
+            <a:r>
+              <a:rPr lang="en-US" sz="1200" u="sng" kern="100" dirty="0">
+                <a:solidFill>
+                  <a:srgbClr val="0000FF"/>
+                </a:solidFill>
+                <a:effectLst/>
+                <a:latin typeface="Aptos" panose="020B0004020202020204" pitchFamily="34" charset="0"/>
+                <a:ea typeface="Aptos" panose="020B0004020202020204" pitchFamily="34" charset="0"/>
+                <a:cs typeface="Times New Roman" panose="02020603050405020304" pitchFamily="18" charset="0"/>
+                <a:hlinkClick r:id="rId2" tooltip="https://demo.multiprobe.us/configure/slope/1"/>
+              </a:rPr>
+              <a:t>https://demo.multiprobe.us/configure/slope/1</a:t>
+            </a:r>
+            <a:r>
+              <a:rPr lang="en-US" sz="1200" kern="100" dirty="0">
+                <a:effectLst/>
+                <a:latin typeface="Aptos" panose="020B0004020202020204" pitchFamily="34" charset="0"/>
+                <a:ea typeface="Aptos" panose="020B0004020202020204" pitchFamily="34" charset="0"/>
+                <a:cs typeface="Times New Roman" panose="02020603050405020304" pitchFamily="18" charset="0"/>
+              </a:rPr>
+              <a:t>), therefore something might be happening on the server side that is preventing the correct ingestion where this error occurs</a:t>
+            </a:r>
+          </a:p>
+          <a:p>
+            <a:pPr marL="0" marR="0">
+              <a:spcBef>
+                <a:spcPts val="0"/>
+              </a:spcBef>
+              <a:spcAft>
+                <a:spcPts val="0"/>
+              </a:spcAft>
+            </a:pPr>
+            <a:r>
+              <a:rPr lang="en-US" sz="1200" kern="100" dirty="0">
+                <a:effectLst/>
+                <a:latin typeface="Aptos" panose="020B0004020202020204" pitchFamily="34" charset="0"/>
+                <a:ea typeface="Aptos" panose="020B0004020202020204" pitchFamily="34" charset="0"/>
+                <a:cs typeface="Times New Roman" panose="02020603050405020304" pitchFamily="18" charset="0"/>
+              </a:rPr>
+              <a:t>	- Functional for </a:t>
+            </a:r>
+            <a:r>
+              <a:rPr lang="en-US" sz="1200" u="sng" kern="100" dirty="0">
+                <a:solidFill>
+                  <a:srgbClr val="0000FF"/>
+                </a:solidFill>
+                <a:effectLst/>
+                <a:latin typeface="Aptos" panose="020B0004020202020204" pitchFamily="34" charset="0"/>
+                <a:ea typeface="Aptos" panose="020B0004020202020204" pitchFamily="34" charset="0"/>
+                <a:cs typeface="Times New Roman" panose="02020603050405020304" pitchFamily="18" charset="0"/>
+                <a:hlinkClick r:id="rId3" tooltip="https://dev.multiprobe.us/configure/slope/16"/>
+              </a:rPr>
+              <a:t>https://dev.multiprobe.us/configure/slope/16</a:t>
+            </a:r>
+            <a:r>
+              <a:rPr lang="en-US" sz="1200" kern="100" dirty="0">
+                <a:effectLst/>
+                <a:latin typeface="Aptos" panose="020B0004020202020204" pitchFamily="34" charset="0"/>
+                <a:ea typeface="Aptos" panose="020B0004020202020204" pitchFamily="34" charset="0"/>
+                <a:cs typeface="Times New Roman" panose="02020603050405020304" pitchFamily="18" charset="0"/>
+              </a:rPr>
+              <a:t> (</a:t>
+            </a:r>
+            <a:r>
+              <a:rPr lang="en-US" sz="1200" kern="100" dirty="0" err="1">
+                <a:effectLst/>
+                <a:latin typeface="Aptos" panose="020B0004020202020204" pitchFamily="34" charset="0"/>
+                <a:ea typeface="Aptos" panose="020B0004020202020204" pitchFamily="34" charset="0"/>
+                <a:cs typeface="Times New Roman" panose="02020603050405020304" pitchFamily="18" charset="0"/>
+              </a:rPr>
+              <a:t>lipidomics</a:t>
+            </a:r>
+            <a:r>
+              <a:rPr lang="en-US" sz="1200" kern="100" dirty="0">
+                <a:effectLst/>
+                <a:latin typeface="Aptos" panose="020B0004020202020204" pitchFamily="34" charset="0"/>
+                <a:ea typeface="Aptos" panose="020B0004020202020204" pitchFamily="34" charset="0"/>
+                <a:cs typeface="Times New Roman" panose="02020603050405020304" pitchFamily="18" charset="0"/>
+              </a:rPr>
+              <a:t>)</a:t>
+            </a:r>
+          </a:p>
+          <a:p>
+            <a:pPr marL="0" marR="0">
+              <a:spcBef>
+                <a:spcPts val="0"/>
+              </a:spcBef>
+              <a:spcAft>
+                <a:spcPts val="0"/>
+              </a:spcAft>
+            </a:pPr>
+            <a:r>
+              <a:rPr lang="en-US" sz="1200" kern="100" dirty="0">
+                <a:effectLst/>
+                <a:latin typeface="Aptos" panose="020B0004020202020204" pitchFamily="34" charset="0"/>
+                <a:ea typeface="Aptos" panose="020B0004020202020204" pitchFamily="34" charset="0"/>
+                <a:cs typeface="Times New Roman" panose="02020603050405020304" pitchFamily="18" charset="0"/>
+              </a:rPr>
+              <a:t> </a:t>
+            </a:r>
+          </a:p>
+          <a:p>
+            <a:pPr marL="0" marR="0">
+              <a:spcBef>
+                <a:spcPts val="0"/>
+              </a:spcBef>
+              <a:spcAft>
+                <a:spcPts val="0"/>
+              </a:spcAft>
+            </a:pPr>
+            <a:r>
+              <a:rPr lang="en-US" sz="1200" kern="100" dirty="0">
+                <a:effectLst/>
+                <a:latin typeface="Aptos" panose="020B0004020202020204" pitchFamily="34" charset="0"/>
+                <a:ea typeface="Aptos" panose="020B0004020202020204" pitchFamily="34" charset="0"/>
+                <a:cs typeface="Times New Roman" panose="02020603050405020304" pitchFamily="18" charset="0"/>
+              </a:rPr>
+              <a:t>3. App crash on start-up for </a:t>
+            </a:r>
+            <a:r>
+              <a:rPr lang="en-US" sz="1200" kern="100" dirty="0" err="1">
+                <a:effectLst/>
+                <a:latin typeface="Aptos" panose="020B0004020202020204" pitchFamily="34" charset="0"/>
+                <a:ea typeface="Aptos" panose="020B0004020202020204" pitchFamily="34" charset="0"/>
+                <a:cs typeface="Times New Roman" panose="02020603050405020304" pitchFamily="18" charset="0"/>
+              </a:rPr>
+              <a:t>Pmart</a:t>
+            </a:r>
+            <a:endParaRPr lang="en-US" sz="1200" kern="100" dirty="0">
+              <a:effectLst/>
+              <a:latin typeface="Aptos" panose="020B0004020202020204" pitchFamily="34" charset="0"/>
+              <a:ea typeface="Aptos" panose="020B0004020202020204" pitchFamily="34" charset="0"/>
+              <a:cs typeface="Times New Roman" panose="02020603050405020304" pitchFamily="18" charset="0"/>
+            </a:endParaRPr>
+          </a:p>
+          <a:p>
+            <a:pPr marL="0" marR="0">
+              <a:spcBef>
+                <a:spcPts val="0"/>
+              </a:spcBef>
+              <a:spcAft>
+                <a:spcPts val="0"/>
+              </a:spcAft>
+            </a:pPr>
+            <a:r>
+              <a:rPr lang="en-US" sz="1200" kern="100" dirty="0">
+                <a:effectLst/>
+                <a:latin typeface="Aptos" panose="020B0004020202020204" pitchFamily="34" charset="0"/>
+                <a:ea typeface="Aptos" panose="020B0004020202020204" pitchFamily="34" charset="0"/>
+                <a:cs typeface="Times New Roman" panose="02020603050405020304" pitchFamily="18" charset="0"/>
+              </a:rPr>
+              <a:t>	- </a:t>
+            </a:r>
+            <a:r>
+              <a:rPr lang="en-US" sz="1200" u="sng" kern="100" dirty="0">
+                <a:solidFill>
+                  <a:srgbClr val="467886"/>
+                </a:solidFill>
+                <a:effectLst/>
+                <a:latin typeface="Aptos" panose="020B0004020202020204" pitchFamily="34" charset="0"/>
+                <a:ea typeface="Aptos" panose="020B0004020202020204" pitchFamily="34" charset="0"/>
+                <a:cs typeface="Times New Roman" panose="02020603050405020304" pitchFamily="18" charset="0"/>
+                <a:hlinkClick r:id="rId4"/>
+              </a:rPr>
+              <a:t>https://dev.multiprobe.us/pmart/?id=47&amp;s3_bucket=devstoragestack-devstoragestackdatabucket3fe72738-i1h2gniotjhk%2Fmerged_files%2F56&amp;datatype=proteomics&amp;f_data=761059fb-0e0e-4849-878c-208fffa6c523_f_data.csv&amp;e_data=672afdb7-1113-41e6-9eb9-8016235b183c_e_data.csv&amp;e_meta=7e8c3e15-2d3a-4e42-bdc1-a34bd7c9a1a8_e_meta.csv</a:t>
+            </a:r>
+            <a:endParaRPr lang="en-US" sz="1200" kern="100" dirty="0">
+              <a:effectLst/>
+              <a:latin typeface="Aptos" panose="020B0004020202020204" pitchFamily="34" charset="0"/>
+              <a:ea typeface="Aptos" panose="020B0004020202020204" pitchFamily="34" charset="0"/>
+              <a:cs typeface="Times New Roman" panose="02020603050405020304" pitchFamily="18" charset="0"/>
+            </a:endParaRPr>
+          </a:p>
+          <a:p>
+            <a:pPr marL="0" marR="0">
+              <a:spcBef>
+                <a:spcPts val="0"/>
+              </a:spcBef>
+              <a:spcAft>
+                <a:spcPts val="0"/>
+              </a:spcAft>
+            </a:pPr>
+            <a:r>
+              <a:rPr lang="en-US" sz="1200" kern="100" dirty="0">
+                <a:effectLst/>
+                <a:latin typeface="Aptos" panose="020B0004020202020204" pitchFamily="34" charset="0"/>
+                <a:ea typeface="Aptos" panose="020B0004020202020204" pitchFamily="34" charset="0"/>
+                <a:cs typeface="Times New Roman" panose="02020603050405020304" pitchFamily="18" charset="0"/>
+              </a:rPr>
+              <a:t>	- Have yet to test on Wagyu as was done for SLOPE</a:t>
+            </a:r>
+          </a:p>
+          <a:p>
+            <a:pPr marL="0" marR="0">
+              <a:spcBef>
+                <a:spcPts val="0"/>
+              </a:spcBef>
+              <a:spcAft>
+                <a:spcPts val="0"/>
+              </a:spcAft>
+            </a:pPr>
+            <a:r>
+              <a:rPr lang="en-US" sz="1200" kern="100" dirty="0">
+                <a:effectLst/>
+                <a:latin typeface="Aptos" panose="020B0004020202020204" pitchFamily="34" charset="0"/>
+                <a:ea typeface="Aptos" panose="020B0004020202020204" pitchFamily="34" charset="0"/>
+                <a:cs typeface="Times New Roman" panose="02020603050405020304" pitchFamily="18" charset="0"/>
+              </a:rPr>
+              <a:t>	- Fix pushed on 09Apr2024</a:t>
+            </a:r>
+          </a:p>
+          <a:p>
+            <a:pPr marL="0" marR="0">
+              <a:spcBef>
+                <a:spcPts val="0"/>
+              </a:spcBef>
+              <a:spcAft>
+                <a:spcPts val="0"/>
+              </a:spcAft>
+            </a:pPr>
+            <a:r>
+              <a:rPr lang="en-US" sz="1200" kern="100" dirty="0">
+                <a:effectLst/>
+                <a:latin typeface="Aptos" panose="020B0004020202020204" pitchFamily="34" charset="0"/>
+                <a:ea typeface="Aptos" panose="020B0004020202020204" pitchFamily="34" charset="0"/>
+                <a:cs typeface="Times New Roman" panose="02020603050405020304" pitchFamily="18" charset="0"/>
+              </a:rPr>
+              <a:t> </a:t>
+            </a:r>
+          </a:p>
+          <a:p>
+            <a:pPr marL="0" marR="0">
+              <a:spcBef>
+                <a:spcPts val="0"/>
+              </a:spcBef>
+              <a:spcAft>
+                <a:spcPts val="0"/>
+              </a:spcAft>
+            </a:pPr>
+            <a:r>
+              <a:rPr lang="en-US" sz="1200" kern="100" dirty="0">
+                <a:effectLst/>
+                <a:latin typeface="Aptos" panose="020B0004020202020204" pitchFamily="34" charset="0"/>
+                <a:ea typeface="Aptos" panose="020B0004020202020204" pitchFamily="34" charset="0"/>
+                <a:cs typeface="Times New Roman" panose="02020603050405020304" pitchFamily="18" charset="0"/>
+              </a:rPr>
+              <a:t>4. SLOPE keeps booting up new AWS instances</a:t>
+            </a:r>
+          </a:p>
+          <a:p>
+            <a:pPr marL="0" marR="0">
+              <a:spcBef>
+                <a:spcPts val="0"/>
+              </a:spcBef>
+              <a:spcAft>
+                <a:spcPts val="0"/>
+              </a:spcAft>
+            </a:pPr>
+            <a:r>
+              <a:rPr lang="en-US" sz="1200" kern="100" dirty="0">
+                <a:effectLst/>
+                <a:latin typeface="Aptos" panose="020B0004020202020204" pitchFamily="34" charset="0"/>
+                <a:ea typeface="Aptos" panose="020B0004020202020204" pitchFamily="34" charset="0"/>
+                <a:cs typeface="Times New Roman" panose="02020603050405020304" pitchFamily="18" charset="0"/>
+              </a:rPr>
+              <a:t>	- Does not interrupt the session that appears to be live when using the app</a:t>
+            </a:r>
+            <a:br>
+              <a:rPr lang="en-US" sz="1200" kern="100" dirty="0">
+                <a:effectLst/>
+                <a:latin typeface="Aptos" panose="020B0004020202020204" pitchFamily="34" charset="0"/>
+                <a:ea typeface="Aptos" panose="020B0004020202020204" pitchFamily="34" charset="0"/>
+                <a:cs typeface="Times New Roman" panose="02020603050405020304" pitchFamily="18" charset="0"/>
+              </a:rPr>
+            </a:br>
+            <a:r>
+              <a:rPr lang="en-US" sz="1200" kern="100" dirty="0">
+                <a:effectLst/>
+                <a:latin typeface="Aptos" panose="020B0004020202020204" pitchFamily="34" charset="0"/>
+                <a:ea typeface="Aptos" panose="020B0004020202020204" pitchFamily="34" charset="0"/>
+                <a:cs typeface="Times New Roman" panose="02020603050405020304" pitchFamily="18" charset="0"/>
+              </a:rPr>
+              <a:t>	- Occurs for previous and current instance of SLOPE, but not for </a:t>
+            </a:r>
+            <a:r>
+              <a:rPr lang="en-US" sz="1200" kern="100" dirty="0" err="1">
+                <a:effectLst/>
+                <a:latin typeface="Aptos" panose="020B0004020202020204" pitchFamily="34" charset="0"/>
+                <a:ea typeface="Aptos" panose="020B0004020202020204" pitchFamily="34" charset="0"/>
+                <a:cs typeface="Times New Roman" panose="02020603050405020304" pitchFamily="18" charset="0"/>
+              </a:rPr>
+              <a:t>Pmart</a:t>
+            </a:r>
+            <a:endParaRPr lang="en-US" sz="1200" kern="100" dirty="0">
+              <a:effectLst/>
+              <a:latin typeface="Aptos" panose="020B0004020202020204" pitchFamily="34" charset="0"/>
+              <a:ea typeface="Aptos" panose="020B0004020202020204" pitchFamily="34" charset="0"/>
+              <a:cs typeface="Times New Roman" panose="02020603050405020304" pitchFamily="18" charset="0"/>
+            </a:endParaRPr>
+          </a:p>
+          <a:p>
+            <a:pPr marL="0" marR="0">
+              <a:spcBef>
+                <a:spcPts val="0"/>
+              </a:spcBef>
+              <a:spcAft>
+                <a:spcPts val="0"/>
+              </a:spcAft>
+            </a:pPr>
+            <a:r>
+              <a:rPr lang="en-US" sz="1200" kern="100" dirty="0">
+                <a:effectLst/>
+                <a:latin typeface="Aptos" panose="020B0004020202020204" pitchFamily="34" charset="0"/>
+                <a:ea typeface="Aptos" panose="020B0004020202020204" pitchFamily="34" charset="0"/>
+                <a:cs typeface="Times New Roman" panose="02020603050405020304" pitchFamily="18" charset="0"/>
+              </a:rPr>
+              <a:t>	- May be related to the “Unhealthy” flag when containers are being checked, unsure why SLOPE is triggering as unhealthy</a:t>
+            </a:r>
+          </a:p>
+          <a:p>
+            <a:pPr marL="0" marR="0">
+              <a:spcBef>
+                <a:spcPts val="0"/>
+              </a:spcBef>
+              <a:spcAft>
+                <a:spcPts val="0"/>
+              </a:spcAft>
+            </a:pPr>
+            <a:r>
+              <a:rPr lang="en-US" sz="1200" kern="100" dirty="0">
+                <a:latin typeface="Aptos" panose="020B0004020202020204" pitchFamily="34" charset="0"/>
+                <a:ea typeface="Aptos" panose="020B0004020202020204" pitchFamily="34" charset="0"/>
+                <a:cs typeface="Times New Roman" panose="02020603050405020304" pitchFamily="18" charset="0"/>
+              </a:rPr>
+              <a:t>	- Resolved </a:t>
+            </a:r>
+            <a:r>
+              <a:rPr lang="en-US" sz="1200" kern="100" dirty="0">
+                <a:latin typeface="Aptos" panose="020B0004020202020204" pitchFamily="34" charset="0"/>
+                <a:ea typeface="Aptos" panose="020B0004020202020204" pitchFamily="34" charset="0"/>
+                <a:cs typeface="Times New Roman" panose="02020603050405020304" pitchFamily="18" charset="0"/>
+                <a:sym typeface="Wingdings" pitchFamily="2" charset="2"/>
+              </a:rPr>
+              <a:t></a:t>
+            </a:r>
+            <a:endParaRPr lang="en-US" sz="1200" kern="100" dirty="0">
+              <a:effectLst/>
+              <a:latin typeface="Aptos" panose="020B0004020202020204" pitchFamily="34" charset="0"/>
+              <a:ea typeface="Aptos" panose="020B0004020202020204" pitchFamily="34" charset="0"/>
+              <a:cs typeface="Times New Roman" panose="02020603050405020304" pitchFamily="18" charset="0"/>
+            </a:endParaRPr>
+          </a:p>
+          <a:p>
+            <a:pPr marL="0" marR="0">
+              <a:spcBef>
+                <a:spcPts val="0"/>
+              </a:spcBef>
+              <a:spcAft>
+                <a:spcPts val="0"/>
+              </a:spcAft>
+            </a:pPr>
+            <a:r>
+              <a:rPr lang="en-US" sz="1200" kern="100" dirty="0">
+                <a:effectLst/>
+                <a:latin typeface="Aptos" panose="020B0004020202020204" pitchFamily="34" charset="0"/>
+                <a:ea typeface="Aptos" panose="020B0004020202020204" pitchFamily="34" charset="0"/>
+                <a:cs typeface="Times New Roman" panose="02020603050405020304" pitchFamily="18" charset="0"/>
+              </a:rPr>
+              <a:t> </a:t>
+            </a:r>
+          </a:p>
+          <a:p>
+            <a:pPr marL="0" marR="0">
+              <a:spcBef>
+                <a:spcPts val="0"/>
+              </a:spcBef>
+              <a:spcAft>
+                <a:spcPts val="0"/>
+              </a:spcAft>
+            </a:pPr>
+            <a:r>
+              <a:rPr lang="en-US" sz="1200" kern="100" dirty="0">
+                <a:effectLst/>
+                <a:latin typeface="Aptos" panose="020B0004020202020204" pitchFamily="34" charset="0"/>
+                <a:ea typeface="Aptos" panose="020B0004020202020204" pitchFamily="34" charset="0"/>
+                <a:cs typeface="Times New Roman" panose="02020603050405020304" pitchFamily="18" charset="0"/>
+              </a:rPr>
+              <a:t>4. Update datatype flag in Multiprobe to send “</a:t>
+            </a:r>
+            <a:r>
+              <a:rPr lang="en-US" sz="1200" kern="100" dirty="0" err="1">
+                <a:effectLst/>
+                <a:latin typeface="Aptos" panose="020B0004020202020204" pitchFamily="34" charset="0"/>
+                <a:ea typeface="Aptos" panose="020B0004020202020204" pitchFamily="34" charset="0"/>
+                <a:cs typeface="Times New Roman" panose="02020603050405020304" pitchFamily="18" charset="0"/>
+              </a:rPr>
+              <a:t>proteomicsTMT</a:t>
+            </a:r>
+            <a:r>
+              <a:rPr lang="en-US" sz="1200" kern="100" dirty="0">
+                <a:effectLst/>
+                <a:latin typeface="Aptos" panose="020B0004020202020204" pitchFamily="34" charset="0"/>
+                <a:ea typeface="Aptos" panose="020B0004020202020204" pitchFamily="34" charset="0"/>
+                <a:cs typeface="Times New Roman" panose="02020603050405020304" pitchFamily="18" charset="0"/>
+              </a:rPr>
+              <a:t>” and </a:t>
+            </a:r>
+            <a:r>
+              <a:rPr lang="en-US" sz="1200" kern="100" dirty="0" err="1">
+                <a:effectLst/>
+                <a:latin typeface="Aptos" panose="020B0004020202020204" pitchFamily="34" charset="0"/>
+                <a:ea typeface="Aptos" panose="020B0004020202020204" pitchFamily="34" charset="0"/>
+                <a:cs typeface="Times New Roman" panose="02020603050405020304" pitchFamily="18" charset="0"/>
+              </a:rPr>
+              <a:t>Pmart</a:t>
+            </a:r>
+            <a:r>
+              <a:rPr lang="en-US" sz="1200" kern="100" dirty="0">
+                <a:effectLst/>
+                <a:latin typeface="Aptos" panose="020B0004020202020204" pitchFamily="34" charset="0"/>
+                <a:ea typeface="Aptos" panose="020B0004020202020204" pitchFamily="34" charset="0"/>
+                <a:cs typeface="Times New Roman" panose="02020603050405020304" pitchFamily="18" charset="0"/>
+              </a:rPr>
+              <a:t>/Slope code to ingest “</a:t>
+            </a:r>
+            <a:r>
+              <a:rPr lang="en-US" sz="1200" kern="100" dirty="0" err="1">
+                <a:effectLst/>
+                <a:latin typeface="Aptos" panose="020B0004020202020204" pitchFamily="34" charset="0"/>
+                <a:ea typeface="Aptos" panose="020B0004020202020204" pitchFamily="34" charset="0"/>
+                <a:cs typeface="Times New Roman" panose="02020603050405020304" pitchFamily="18" charset="0"/>
+              </a:rPr>
+              <a:t>proteomicsTMT</a:t>
+            </a:r>
+            <a:r>
+              <a:rPr lang="en-US" sz="1200" kern="100" dirty="0">
+                <a:effectLst/>
+                <a:latin typeface="Aptos" panose="020B0004020202020204" pitchFamily="34" charset="0"/>
+                <a:ea typeface="Aptos" panose="020B0004020202020204" pitchFamily="34" charset="0"/>
+                <a:cs typeface="Times New Roman" panose="02020603050405020304" pitchFamily="18" charset="0"/>
+              </a:rPr>
+              <a:t>” flag</a:t>
+            </a:r>
+          </a:p>
+          <a:p>
+            <a:pPr marL="0" marR="0" indent="457200">
+              <a:spcBef>
+                <a:spcPts val="0"/>
+              </a:spcBef>
+              <a:spcAft>
+                <a:spcPts val="0"/>
+              </a:spcAft>
+            </a:pPr>
+            <a:r>
+              <a:rPr lang="en-US" sz="1200" kern="100" dirty="0">
+                <a:effectLst/>
+                <a:latin typeface="Aptos" panose="020B0004020202020204" pitchFamily="34" charset="0"/>
+                <a:ea typeface="Aptos" panose="020B0004020202020204" pitchFamily="34" charset="0"/>
+                <a:cs typeface="Times New Roman" panose="02020603050405020304" pitchFamily="18" charset="0"/>
+              </a:rPr>
+              <a:t>- Back and forth with Sarah and Grant from March 7</a:t>
+            </a:r>
+            <a:r>
+              <a:rPr lang="en-US" sz="1200" kern="100" baseline="30000" dirty="0">
+                <a:effectLst/>
+                <a:latin typeface="Aptos" panose="020B0004020202020204" pitchFamily="34" charset="0"/>
+                <a:ea typeface="Aptos" panose="020B0004020202020204" pitchFamily="34" charset="0"/>
+                <a:cs typeface="Times New Roman" panose="02020603050405020304" pitchFamily="18" charset="0"/>
+              </a:rPr>
+              <a:t>th</a:t>
+            </a:r>
+            <a:r>
+              <a:rPr lang="en-US" sz="1200" kern="100" dirty="0">
+                <a:effectLst/>
+                <a:latin typeface="Aptos" panose="020B0004020202020204" pitchFamily="34" charset="0"/>
+                <a:ea typeface="Aptos" panose="020B0004020202020204" pitchFamily="34" charset="0"/>
+                <a:cs typeface="Times New Roman" panose="02020603050405020304" pitchFamily="18" charset="0"/>
+              </a:rPr>
+              <a:t> to March 18</a:t>
+            </a:r>
+            <a:r>
+              <a:rPr lang="en-US" sz="1200" kern="100" baseline="30000" dirty="0">
+                <a:effectLst/>
+                <a:latin typeface="Aptos" panose="020B0004020202020204" pitchFamily="34" charset="0"/>
+                <a:ea typeface="Aptos" panose="020B0004020202020204" pitchFamily="34" charset="0"/>
+                <a:cs typeface="Times New Roman" panose="02020603050405020304" pitchFamily="18" charset="0"/>
+              </a:rPr>
+              <a:t>th</a:t>
+            </a:r>
+            <a:r>
+              <a:rPr lang="en-US" sz="1200" kern="100" dirty="0">
+                <a:effectLst/>
+                <a:latin typeface="Aptos" panose="020B0004020202020204" pitchFamily="34" charset="0"/>
+                <a:ea typeface="Aptos" panose="020B0004020202020204" pitchFamily="34" charset="0"/>
+                <a:cs typeface="Times New Roman" panose="02020603050405020304" pitchFamily="18" charset="0"/>
+              </a:rPr>
+              <a:t> to implement datatype flag for “proteomics”, “</a:t>
+            </a:r>
+            <a:r>
+              <a:rPr lang="en-US" sz="1200" kern="100" dirty="0" err="1">
+                <a:effectLst/>
+                <a:latin typeface="Aptos" panose="020B0004020202020204" pitchFamily="34" charset="0"/>
+                <a:ea typeface="Aptos" panose="020B0004020202020204" pitchFamily="34" charset="0"/>
+                <a:cs typeface="Times New Roman" panose="02020603050405020304" pitchFamily="18" charset="0"/>
+              </a:rPr>
+              <a:t>lipidomics</a:t>
+            </a:r>
+            <a:r>
+              <a:rPr lang="en-US" sz="1200" kern="100" dirty="0">
+                <a:effectLst/>
+                <a:latin typeface="Aptos" panose="020B0004020202020204" pitchFamily="34" charset="0"/>
+                <a:ea typeface="Aptos" panose="020B0004020202020204" pitchFamily="34" charset="0"/>
+                <a:cs typeface="Times New Roman" panose="02020603050405020304" pitchFamily="18" charset="0"/>
+              </a:rPr>
+              <a:t>”, “metabolomics”, and “transcriptomics”</a:t>
+            </a:r>
+          </a:p>
+          <a:p>
+            <a:pPr marL="0" marR="0" indent="457200">
+              <a:spcBef>
+                <a:spcPts val="0"/>
+              </a:spcBef>
+              <a:spcAft>
+                <a:spcPts val="0"/>
+              </a:spcAft>
+            </a:pPr>
+            <a:r>
+              <a:rPr lang="en-US" sz="1200" kern="100" dirty="0">
+                <a:effectLst/>
+                <a:latin typeface="Aptos" panose="020B0004020202020204" pitchFamily="34" charset="0"/>
+                <a:ea typeface="Aptos" panose="020B0004020202020204" pitchFamily="34" charset="0"/>
+                <a:cs typeface="Times New Roman" panose="02020603050405020304" pitchFamily="18" charset="0"/>
+              </a:rPr>
+              <a:t>- Flags and handling added in SLOPE, </a:t>
+            </a:r>
+            <a:r>
+              <a:rPr lang="en-US" sz="1200" kern="100" dirty="0" err="1">
+                <a:effectLst/>
+                <a:latin typeface="Aptos" panose="020B0004020202020204" pitchFamily="34" charset="0"/>
+                <a:ea typeface="Aptos" panose="020B0004020202020204" pitchFamily="34" charset="0"/>
+                <a:cs typeface="Times New Roman" panose="02020603050405020304" pitchFamily="18" charset="0"/>
+              </a:rPr>
+              <a:t>Pmart</a:t>
+            </a:r>
+            <a:r>
+              <a:rPr lang="en-US" sz="1200" kern="100" dirty="0">
+                <a:effectLst/>
+                <a:latin typeface="Aptos" panose="020B0004020202020204" pitchFamily="34" charset="0"/>
+                <a:ea typeface="Aptos" panose="020B0004020202020204" pitchFamily="34" charset="0"/>
+                <a:cs typeface="Times New Roman" panose="02020603050405020304" pitchFamily="18" charset="0"/>
+              </a:rPr>
+              <a:t>, and </a:t>
+            </a:r>
+            <a:r>
+              <a:rPr lang="en-US" sz="1200" kern="100" dirty="0" err="1">
+                <a:effectLst/>
+                <a:latin typeface="Aptos" panose="020B0004020202020204" pitchFamily="34" charset="0"/>
+                <a:ea typeface="Aptos" panose="020B0004020202020204" pitchFamily="34" charset="0"/>
+                <a:cs typeface="Times New Roman" panose="02020603050405020304" pitchFamily="18" charset="0"/>
+              </a:rPr>
+              <a:t>MultiProbe</a:t>
+            </a:r>
+            <a:r>
+              <a:rPr lang="en-US" sz="1200" kern="100" dirty="0">
+                <a:effectLst/>
+                <a:latin typeface="Aptos" panose="020B0004020202020204" pitchFamily="34" charset="0"/>
+                <a:ea typeface="Aptos" panose="020B0004020202020204" pitchFamily="34" charset="0"/>
+                <a:cs typeface="Times New Roman" panose="02020603050405020304" pitchFamily="18" charset="0"/>
+              </a:rPr>
+              <a:t> from March 7</a:t>
+            </a:r>
+            <a:r>
+              <a:rPr lang="en-US" sz="1200" kern="100" baseline="30000" dirty="0">
+                <a:effectLst/>
+                <a:latin typeface="Aptos" panose="020B0004020202020204" pitchFamily="34" charset="0"/>
+                <a:ea typeface="Aptos" panose="020B0004020202020204" pitchFamily="34" charset="0"/>
+                <a:cs typeface="Times New Roman" panose="02020603050405020304" pitchFamily="18" charset="0"/>
+              </a:rPr>
+              <a:t>th</a:t>
+            </a:r>
+            <a:r>
+              <a:rPr lang="en-US" sz="1200" kern="100" dirty="0">
+                <a:effectLst/>
+                <a:latin typeface="Aptos" panose="020B0004020202020204" pitchFamily="34" charset="0"/>
+                <a:ea typeface="Aptos" panose="020B0004020202020204" pitchFamily="34" charset="0"/>
+                <a:cs typeface="Times New Roman" panose="02020603050405020304" pitchFamily="18" charset="0"/>
+              </a:rPr>
+              <a:t> to March 18</a:t>
+            </a:r>
+            <a:r>
+              <a:rPr lang="en-US" sz="1200" kern="100" baseline="30000" dirty="0">
+                <a:effectLst/>
+                <a:latin typeface="Aptos" panose="020B0004020202020204" pitchFamily="34" charset="0"/>
+                <a:ea typeface="Aptos" panose="020B0004020202020204" pitchFamily="34" charset="0"/>
+                <a:cs typeface="Times New Roman" panose="02020603050405020304" pitchFamily="18" charset="0"/>
+              </a:rPr>
+              <a:t>th</a:t>
+            </a:r>
+            <a:endParaRPr lang="en-US" sz="1200" kern="100" dirty="0">
+              <a:effectLst/>
+              <a:latin typeface="Aptos" panose="020B0004020202020204" pitchFamily="34" charset="0"/>
+              <a:ea typeface="Aptos" panose="020B0004020202020204" pitchFamily="34" charset="0"/>
+              <a:cs typeface="Times New Roman" panose="02020603050405020304" pitchFamily="18" charset="0"/>
+            </a:endParaRPr>
+          </a:p>
+          <a:p>
+            <a:pPr marL="0" marR="0" indent="457200">
+              <a:spcBef>
+                <a:spcPts val="0"/>
+              </a:spcBef>
+              <a:spcAft>
+                <a:spcPts val="0"/>
+              </a:spcAft>
+            </a:pPr>
+            <a:r>
+              <a:rPr lang="en-US" sz="1200" kern="100" dirty="0">
+                <a:effectLst/>
+                <a:latin typeface="Aptos" panose="020B0004020202020204" pitchFamily="34" charset="0"/>
+                <a:ea typeface="Aptos" panose="020B0004020202020204" pitchFamily="34" charset="0"/>
+                <a:cs typeface="Times New Roman" panose="02020603050405020304" pitchFamily="18" charset="0"/>
+              </a:rPr>
+              <a:t>- Followed up with new datatype flag for “</a:t>
+            </a:r>
+            <a:r>
+              <a:rPr lang="en-US" sz="1200" kern="100" dirty="0" err="1">
+                <a:effectLst/>
+                <a:latin typeface="Aptos" panose="020B0004020202020204" pitchFamily="34" charset="0"/>
+                <a:ea typeface="Aptos" panose="020B0004020202020204" pitchFamily="34" charset="0"/>
+                <a:cs typeface="Times New Roman" panose="02020603050405020304" pitchFamily="18" charset="0"/>
+              </a:rPr>
+              <a:t>proteomicsTMT</a:t>
+            </a:r>
+            <a:r>
+              <a:rPr lang="en-US" sz="1200" kern="100" dirty="0">
+                <a:effectLst/>
+                <a:latin typeface="Aptos" panose="020B0004020202020204" pitchFamily="34" charset="0"/>
+                <a:ea typeface="Aptos" panose="020B0004020202020204" pitchFamily="34" charset="0"/>
+                <a:cs typeface="Times New Roman" panose="02020603050405020304" pitchFamily="18" charset="0"/>
+              </a:rPr>
+              <a:t>” on March 25</a:t>
+            </a:r>
+            <a:r>
+              <a:rPr lang="en-US" sz="1200" kern="100" baseline="30000" dirty="0">
+                <a:effectLst/>
+                <a:latin typeface="Aptos" panose="020B0004020202020204" pitchFamily="34" charset="0"/>
+                <a:ea typeface="Aptos" panose="020B0004020202020204" pitchFamily="34" charset="0"/>
+                <a:cs typeface="Times New Roman" panose="02020603050405020304" pitchFamily="18" charset="0"/>
+              </a:rPr>
+              <a:t>th</a:t>
+            </a:r>
+            <a:r>
+              <a:rPr lang="en-US" sz="1200" kern="100" dirty="0">
+                <a:effectLst/>
+                <a:latin typeface="Aptos" panose="020B0004020202020204" pitchFamily="34" charset="0"/>
+                <a:ea typeface="Aptos" panose="020B0004020202020204" pitchFamily="34" charset="0"/>
+                <a:cs typeface="Times New Roman" panose="02020603050405020304" pitchFamily="18" charset="0"/>
+              </a:rPr>
+              <a:t> in response to email about issues with TMT ingestion</a:t>
+            </a:r>
+          </a:p>
+          <a:p>
+            <a:pPr marL="0" marR="0" indent="457200">
+              <a:spcBef>
+                <a:spcPts val="0"/>
+              </a:spcBef>
+              <a:spcAft>
+                <a:spcPts val="0"/>
+              </a:spcAft>
+            </a:pPr>
+            <a:r>
+              <a:rPr lang="en-US" sz="1200" kern="100" dirty="0">
+                <a:effectLst/>
+                <a:latin typeface="Aptos" panose="020B0004020202020204" pitchFamily="34" charset="0"/>
+                <a:ea typeface="Aptos" panose="020B0004020202020204" pitchFamily="34" charset="0"/>
+                <a:cs typeface="Times New Roman" panose="02020603050405020304" pitchFamily="18" charset="0"/>
+              </a:rPr>
+              <a:t>- Is the datatype parameter active across all multiprobe branches? (will crash app if absent)</a:t>
+            </a:r>
+          </a:p>
+          <a:p>
+            <a:pPr marL="0" marR="0" indent="457200">
+              <a:spcBef>
+                <a:spcPts val="0"/>
+              </a:spcBef>
+              <a:spcAft>
+                <a:spcPts val="0"/>
+              </a:spcAft>
+            </a:pPr>
+            <a:br>
+              <a:rPr lang="en-US" sz="1200" kern="100" dirty="0">
+                <a:effectLst/>
+                <a:latin typeface="Aptos" panose="020B0004020202020204" pitchFamily="34" charset="0"/>
+                <a:ea typeface="Aptos" panose="020B0004020202020204" pitchFamily="34" charset="0"/>
+                <a:cs typeface="Times New Roman" panose="02020603050405020304" pitchFamily="18" charset="0"/>
+              </a:rPr>
+            </a:br>
+            <a:r>
+              <a:rPr lang="en-US" sz="1200" kern="100" dirty="0">
+                <a:effectLst/>
+                <a:latin typeface="Aptos" panose="020B0004020202020204" pitchFamily="34" charset="0"/>
+                <a:ea typeface="Aptos" panose="020B0004020202020204" pitchFamily="34" charset="0"/>
+                <a:cs typeface="Times New Roman" panose="02020603050405020304" pitchFamily="18" charset="0"/>
+              </a:rPr>
+              <a:t>5. Batch information ingestion in </a:t>
+            </a:r>
+            <a:r>
+              <a:rPr lang="en-US" sz="1200" kern="100" dirty="0" err="1">
+                <a:effectLst/>
+                <a:latin typeface="Aptos" panose="020B0004020202020204" pitchFamily="34" charset="0"/>
+                <a:ea typeface="Aptos" panose="020B0004020202020204" pitchFamily="34" charset="0"/>
+                <a:cs typeface="Times New Roman" panose="02020603050405020304" pitchFamily="18" charset="0"/>
+              </a:rPr>
+              <a:t>Pmart</a:t>
+            </a:r>
+            <a:endParaRPr lang="en-US" sz="1200" kern="100" dirty="0">
+              <a:effectLst/>
+              <a:latin typeface="Aptos" panose="020B0004020202020204" pitchFamily="34" charset="0"/>
+              <a:ea typeface="Aptos" panose="020B0004020202020204" pitchFamily="34" charset="0"/>
+              <a:cs typeface="Times New Roman" panose="02020603050405020304" pitchFamily="18" charset="0"/>
+            </a:endParaRPr>
+          </a:p>
+          <a:p>
+            <a:pPr marL="0" marR="0" indent="457200">
+              <a:spcBef>
+                <a:spcPts val="0"/>
+              </a:spcBef>
+              <a:spcAft>
+                <a:spcPts val="0"/>
+              </a:spcAft>
+            </a:pPr>
+            <a:r>
+              <a:rPr lang="en-US" sz="1200" kern="100" dirty="0">
+                <a:effectLst/>
+                <a:latin typeface="Aptos" panose="020B0004020202020204" pitchFamily="34" charset="0"/>
+                <a:ea typeface="Aptos" panose="020B0004020202020204" pitchFamily="34" charset="0"/>
+                <a:cs typeface="Times New Roman" panose="02020603050405020304" pitchFamily="18" charset="0"/>
+              </a:rPr>
+              <a:t>- Column present in </a:t>
+            </a:r>
+            <a:r>
+              <a:rPr lang="en-US" sz="1200" kern="100" dirty="0" err="1">
+                <a:effectLst/>
+                <a:latin typeface="Aptos" panose="020B0004020202020204" pitchFamily="34" charset="0"/>
+                <a:ea typeface="Aptos" panose="020B0004020202020204" pitchFamily="34" charset="0"/>
+                <a:cs typeface="Times New Roman" panose="02020603050405020304" pitchFamily="18" charset="0"/>
+              </a:rPr>
+              <a:t>f_data</a:t>
+            </a:r>
+            <a:r>
+              <a:rPr lang="en-US" sz="1200" kern="100" dirty="0">
+                <a:effectLst/>
+                <a:latin typeface="Aptos" panose="020B0004020202020204" pitchFamily="34" charset="0"/>
+                <a:ea typeface="Aptos" panose="020B0004020202020204" pitchFamily="34" charset="0"/>
+                <a:cs typeface="Times New Roman" panose="02020603050405020304" pitchFamily="18" charset="0"/>
+              </a:rPr>
+              <a:t> that contains batch information (is it “</a:t>
+            </a:r>
+            <a:r>
+              <a:rPr lang="en-US" sz="1200" kern="100" dirty="0" err="1">
+                <a:effectLst/>
+                <a:latin typeface="Aptos" panose="020B0004020202020204" pitchFamily="34" charset="0"/>
+                <a:ea typeface="Aptos" panose="020B0004020202020204" pitchFamily="34" charset="0"/>
+                <a:cs typeface="Times New Roman" panose="02020603050405020304" pitchFamily="18" charset="0"/>
+              </a:rPr>
+              <a:t>file_batch</a:t>
+            </a:r>
+            <a:r>
+              <a:rPr lang="en-US" sz="1200" kern="100" dirty="0">
+                <a:effectLst/>
+                <a:latin typeface="Aptos" panose="020B0004020202020204" pitchFamily="34" charset="0"/>
+                <a:ea typeface="Aptos" panose="020B0004020202020204" pitchFamily="34" charset="0"/>
+                <a:cs typeface="Times New Roman" panose="02020603050405020304" pitchFamily="18" charset="0"/>
+              </a:rPr>
+              <a:t>”?)</a:t>
+            </a:r>
+          </a:p>
+          <a:p>
+            <a:pPr marL="0" marR="0" indent="457200">
+              <a:spcBef>
+                <a:spcPts val="0"/>
+              </a:spcBef>
+              <a:spcAft>
+                <a:spcPts val="0"/>
+              </a:spcAft>
+            </a:pPr>
+            <a:r>
+              <a:rPr lang="en-US" sz="1200" kern="100" dirty="0">
+                <a:effectLst/>
+                <a:latin typeface="Aptos" panose="020B0004020202020204" pitchFamily="34" charset="0"/>
+                <a:ea typeface="Aptos" panose="020B0004020202020204" pitchFamily="34" charset="0"/>
+                <a:cs typeface="Times New Roman" panose="02020603050405020304" pitchFamily="18" charset="0"/>
+              </a:rPr>
+              <a:t>- 8/21/23 group conversation with Devin, Grant and Scott mentions this format</a:t>
+            </a:r>
+          </a:p>
+          <a:p>
+            <a:r>
+              <a:rPr lang="en-US" sz="1200" dirty="0">
+                <a:effectLst/>
+                <a:latin typeface="Aptos" panose="020B0004020202020204" pitchFamily="34" charset="0"/>
+                <a:ea typeface="Aptos" panose="020B0004020202020204" pitchFamily="34" charset="0"/>
+                <a:cs typeface="Times New Roman" panose="02020603050405020304" pitchFamily="18" charset="0"/>
+              </a:rPr>
+              <a:t>- </a:t>
+            </a:r>
+            <a:r>
+              <a:rPr lang="en-US" sz="1200" dirty="0" err="1">
+                <a:effectLst/>
+                <a:latin typeface="Aptos" panose="020B0004020202020204" pitchFamily="34" charset="0"/>
+                <a:ea typeface="Aptos" panose="020B0004020202020204" pitchFamily="34" charset="0"/>
+                <a:cs typeface="Times New Roman" panose="02020603050405020304" pitchFamily="18" charset="0"/>
+              </a:rPr>
+              <a:t>Pmart</a:t>
+            </a:r>
+            <a:r>
+              <a:rPr lang="en-US" sz="1200" dirty="0">
+                <a:effectLst/>
+                <a:latin typeface="Aptos" panose="020B0004020202020204" pitchFamily="34" charset="0"/>
+                <a:ea typeface="Aptos" panose="020B0004020202020204" pitchFamily="34" charset="0"/>
+                <a:cs typeface="Times New Roman" panose="02020603050405020304" pitchFamily="18" charset="0"/>
+              </a:rPr>
+              <a:t> update yet to be pushed (resolving dependency conflicts)</a:t>
+            </a:r>
+            <a:br>
+              <a:rPr lang="en-US" sz="1800" dirty="0">
+                <a:effectLst/>
+                <a:latin typeface="Aptos" panose="020B0004020202020204" pitchFamily="34" charset="0"/>
+                <a:ea typeface="Aptos" panose="020B0004020202020204" pitchFamily="34" charset="0"/>
+                <a:cs typeface="Times New Roman" panose="02020603050405020304" pitchFamily="18" charset="0"/>
+              </a:rPr>
+            </a:br>
             <a:endParaRPr lang="en-US" dirty="0"/>
-          </a:p>
-          <a:p>
-            <a:pPr lvl="1"/>
-            <a:r>
-              <a:rPr lang="en-US" dirty="0"/>
-              <a:t>May also incorporate ids for observers to make future </a:t>
-            </a:r>
-            <a:r>
-              <a:rPr lang="en-US" dirty="0" err="1"/>
-              <a:t>MultiProbe</a:t>
-            </a:r>
-            <a:r>
-              <a:rPr lang="en-US" dirty="0"/>
-              <a:t> merges smoother</a:t>
-            </a:r>
-          </a:p>
-          <a:p>
-            <a:r>
-              <a:rPr lang="en-US" dirty="0"/>
-              <a:t>Fixes to </a:t>
-            </a:r>
-            <a:r>
-              <a:rPr lang="en-US" dirty="0" err="1"/>
-              <a:t>pmartR</a:t>
-            </a:r>
-            <a:endParaRPr lang="en-US" dirty="0"/>
-          </a:p>
-          <a:p>
-            <a:pPr lvl="1"/>
-            <a:r>
-              <a:rPr lang="en-US" dirty="0"/>
-              <a:t>Remove requirement that </a:t>
-            </a:r>
-            <a:r>
-              <a:rPr lang="en-US" dirty="0" err="1"/>
-              <a:t>emeta_cname</a:t>
-            </a:r>
-            <a:r>
-              <a:rPr lang="en-US" dirty="0"/>
-              <a:t> and </a:t>
-            </a:r>
-            <a:r>
-              <a:rPr lang="en-US" dirty="0" err="1"/>
-              <a:t>edata_cname</a:t>
-            </a:r>
-            <a:r>
-              <a:rPr lang="en-US" dirty="0"/>
-              <a:t> pairing are unique</a:t>
-            </a:r>
-          </a:p>
-          <a:p>
-            <a:pPr lvl="1"/>
-            <a:r>
-              <a:rPr lang="en-US" dirty="0"/>
-              <a:t>Make sure </a:t>
-            </a:r>
-            <a:r>
-              <a:rPr lang="en-US" dirty="0" err="1"/>
-              <a:t>protein_quant</a:t>
-            </a:r>
-            <a:r>
-              <a:rPr lang="en-US" dirty="0"/>
-              <a:t> accepts </a:t>
-            </a:r>
-            <a:r>
-              <a:rPr lang="en-US" dirty="0" err="1"/>
-              <a:t>bqquant</a:t>
-            </a:r>
-            <a:r>
-              <a:rPr lang="en-US" dirty="0"/>
-              <a:t> results – the fix above should address it</a:t>
-            </a:r>
-          </a:p>
-          <a:p>
-            <a:pPr lvl="1"/>
-            <a:r>
-              <a:rPr lang="en-US" dirty="0"/>
-              <a:t>Put up an issue</a:t>
-            </a:r>
-          </a:p>
-          <a:p>
-            <a:r>
-              <a:rPr lang="en-US" dirty="0"/>
-              <a:t>Everything up on </a:t>
-            </a:r>
-            <a:r>
-              <a:rPr lang="en-US"/>
-              <a:t>the multiprobe</a:t>
-            </a:r>
-            <a:endParaRPr lang="en-US" dirty="0"/>
-          </a:p>
-          <a:p>
-            <a:r>
-              <a:rPr lang="en-US" dirty="0"/>
-              <a:t>Mysterious disconnect error</a:t>
-            </a:r>
           </a:p>
         </p:txBody>
       </p:sp>
     </p:spTree>
     <p:extLst>
       <p:ext uri="{BB962C8B-B14F-4D97-AF65-F5344CB8AC3E}">
-        <p14:creationId xmlns:p14="http://schemas.microsoft.com/office/powerpoint/2010/main" val="1469259572"/>
+        <p14:creationId xmlns:p14="http://schemas.microsoft.com/office/powerpoint/2010/main" val="1348115705"/>
       </p:ext>
     </p:extLst>
   </p:cSld>
